--- a/report/2210991489_DevangSethi_PPT.pptx
+++ b/report/2210991489_DevangSethi_PPT.pptx
@@ -1,29 +1,29 @@
 
 <file path=ppt/presentation.xml><?xml version="1.0" encoding="utf-8"?>
-<p:presentation xmlns:a="http://schemas.openxmlformats.org/drawingml/2006/main" xmlns:r="http://schemas.openxmlformats.org/officeDocument/2006/relationships" xmlns:p="http://schemas.openxmlformats.org/presentationml/2006/main" xmlns:m="http://schemas.openxmlformats.org/officeDocument/2006/math" xmlns:a14="http://schemas.microsoft.com/office/drawing/2010/main">
+<p:presentation xmlns:a="http://schemas.openxmlformats.org/drawingml/2006/main" xmlns:r="http://schemas.openxmlformats.org/officeDocument/2006/relationships" xmlns:p="http://schemas.openxmlformats.org/presentationml/2006/main">
   <p:sldMasterIdLst>
-    <p:sldMasterId id="2147483648" r:id="rId5"/>
+    <p:sldMasterId id="2147483648" r:id="rId1"/>
   </p:sldMasterIdLst>
   <p:notesMasterIdLst>
-    <p:notesMasterId r:id="rId7"/>
+    <p:notesMasterId r:id="rId16"/>
   </p:notesMasterIdLst>
   <p:sldIdLst>
-    <p:sldId id="256" r:id="rId8"/>
-    <p:sldId id="257" r:id="rId9"/>
-    <p:sldId id="258" r:id="rId10"/>
-    <p:sldId id="259" r:id="rId11"/>
-    <p:sldId id="260" r:id="rId12"/>
-    <p:sldId id="261" r:id="rId13"/>
-    <p:sldId id="262" r:id="rId14"/>
-    <p:sldId id="263" r:id="rId15"/>
-    <p:sldId id="264" r:id="rId16"/>
-    <p:sldId id="265" r:id="rId17"/>
-    <p:sldId id="266" r:id="rId18"/>
-    <p:sldId id="267" r:id="rId19"/>
-    <p:sldId id="268" r:id="rId20"/>
-    <p:sldId id="269" r:id="rId21"/>
+    <p:sldId id="256" r:id="rId2"/>
+    <p:sldId id="257" r:id="rId3"/>
+    <p:sldId id="258" r:id="rId4"/>
+    <p:sldId id="259" r:id="rId5"/>
+    <p:sldId id="260" r:id="rId6"/>
+    <p:sldId id="261" r:id="rId7"/>
+    <p:sldId id="262" r:id="rId8"/>
+    <p:sldId id="263" r:id="rId9"/>
+    <p:sldId id="264" r:id="rId10"/>
+    <p:sldId id="265" r:id="rId11"/>
+    <p:sldId id="266" r:id="rId12"/>
+    <p:sldId id="267" r:id="rId13"/>
+    <p:sldId id="268" r:id="rId14"/>
+    <p:sldId id="269" r:id="rId15"/>
   </p:sldIdLst>
-  <p:sldSz cx="9144000" cy="6858000"/>
+  <p:sldSz cx="9144000" cy="6858000" type="screen4x3"/>
   <p:notesSz cx="6858000" cy="9144000"/>
   <p:defaultTextStyle>
     <a:defPPr marL="0" marR="0" indent="0" algn="l" defTabSz="914400" rtl="0" fontAlgn="auto" latinLnBrk="1" hangingPunct="0">
@@ -41,7 +41,7 @@
       <a:buFontTx/>
       <a:buNone/>
       <a:tabLst/>
-      <a:defRPr b="0" baseline="0" cap="none" i="0" spc="0" strike="noStrike" sz="1800" u="none" kumimoji="0" normalizeH="0">
+      <a:defRPr kumimoji="0" sz="1800" b="0" i="0" u="none" strike="noStrike" cap="none" spc="0" normalizeH="0" baseline="0">
         <a:ln>
           <a:noFill/>
         </a:ln>
@@ -67,7 +67,7 @@
       <a:buFontTx/>
       <a:buNone/>
       <a:tabLst/>
-      <a:defRPr b="0" baseline="0" cap="none" i="0" spc="0" strike="noStrike" sz="1800" u="none" kumimoji="0" normalizeH="0">
+      <a:defRPr kumimoji="0" sz="1800" b="0" i="0" u="none" strike="noStrike" cap="none" spc="0" normalizeH="0" baseline="0">
         <a:ln>
           <a:noFill/>
         </a:ln>
@@ -97,7 +97,7 @@
       <a:buFontTx/>
       <a:buNone/>
       <a:tabLst/>
-      <a:defRPr b="0" baseline="0" cap="none" i="0" spc="0" strike="noStrike" sz="1800" u="none" kumimoji="0" normalizeH="0">
+      <a:defRPr kumimoji="0" sz="1800" b="0" i="0" u="none" strike="noStrike" cap="none" spc="0" normalizeH="0" baseline="0">
         <a:ln>
           <a:noFill/>
         </a:ln>
@@ -127,7 +127,7 @@
       <a:buFontTx/>
       <a:buNone/>
       <a:tabLst/>
-      <a:defRPr b="0" baseline="0" cap="none" i="0" spc="0" strike="noStrike" sz="1800" u="none" kumimoji="0" normalizeH="0">
+      <a:defRPr kumimoji="0" sz="1800" b="0" i="0" u="none" strike="noStrike" cap="none" spc="0" normalizeH="0" baseline="0">
         <a:ln>
           <a:noFill/>
         </a:ln>
@@ -157,7 +157,7 @@
       <a:buFontTx/>
       <a:buNone/>
       <a:tabLst/>
-      <a:defRPr b="0" baseline="0" cap="none" i="0" spc="0" strike="noStrike" sz="1800" u="none" kumimoji="0" normalizeH="0">
+      <a:defRPr kumimoji="0" sz="1800" b="0" i="0" u="none" strike="noStrike" cap="none" spc="0" normalizeH="0" baseline="0">
         <a:ln>
           <a:noFill/>
         </a:ln>
@@ -187,7 +187,7 @@
       <a:buFontTx/>
       <a:buNone/>
       <a:tabLst/>
-      <a:defRPr b="0" baseline="0" cap="none" i="0" spc="0" strike="noStrike" sz="1800" u="none" kumimoji="0" normalizeH="0">
+      <a:defRPr kumimoji="0" sz="1800" b="0" i="0" u="none" strike="noStrike" cap="none" spc="0" normalizeH="0" baseline="0">
         <a:ln>
           <a:noFill/>
         </a:ln>
@@ -217,7 +217,7 @@
       <a:buFontTx/>
       <a:buNone/>
       <a:tabLst/>
-      <a:defRPr b="0" baseline="0" cap="none" i="0" spc="0" strike="noStrike" sz="1800" u="none" kumimoji="0" normalizeH="0">
+      <a:defRPr kumimoji="0" sz="1800" b="0" i="0" u="none" strike="noStrike" cap="none" spc="0" normalizeH="0" baseline="0">
         <a:ln>
           <a:noFill/>
         </a:ln>
@@ -247,7 +247,7 @@
       <a:buFontTx/>
       <a:buNone/>
       <a:tabLst/>
-      <a:defRPr b="0" baseline="0" cap="none" i="0" spc="0" strike="noStrike" sz="1800" u="none" kumimoji="0" normalizeH="0">
+      <a:defRPr kumimoji="0" sz="1800" b="0" i="0" u="none" strike="noStrike" cap="none" spc="0" normalizeH="0" baseline="0">
         <a:ln>
           <a:noFill/>
         </a:ln>
@@ -277,7 +277,7 @@
       <a:buFontTx/>
       <a:buNone/>
       <a:tabLst/>
-      <a:defRPr b="0" baseline="0" cap="none" i="0" spc="0" strike="noStrike" sz="1800" u="none" kumimoji="0" normalizeH="0">
+      <a:defRPr kumimoji="0" sz="1800" b="0" i="0" u="none" strike="noStrike" cap="none" spc="0" normalizeH="0" baseline="0">
         <a:ln>
           <a:noFill/>
         </a:ln>
@@ -307,7 +307,7 @@
       <a:buFontTx/>
       <a:buNone/>
       <a:tabLst/>
-      <a:defRPr b="0" baseline="0" cap="none" i="0" spc="0" strike="noStrike" sz="1800" u="none" kumimoji="0" normalizeH="0">
+      <a:defRPr kumimoji="0" sz="1800" b="0" i="0" u="none" strike="noStrike" cap="none" spc="0" normalizeH="0" baseline="0">
         <a:ln>
           <a:noFill/>
         </a:ln>
@@ -326,13 +326,14 @@
 </p:presentation>
 </file>
 
-<file path=ppt/commentAuthors.xml><?xml version="1.0" encoding="utf-8"?>
-<p:cmAuthorLst xmlns:a="http://schemas.openxmlformats.org/drawingml/2006/main" xmlns:r="http://schemas.openxmlformats.org/officeDocument/2006/relationships" xmlns:p="http://schemas.openxmlformats.org/presentationml/2006/main" xmlns:m="http://schemas.openxmlformats.org/officeDocument/2006/math" xmlns:a14="http://schemas.microsoft.com/office/drawing/2010/main"/>
-</file>
-
 <file path=ppt/notesMasters/notesMaster1.xml><?xml version="1.0" encoding="utf-8"?>
-<p:notesMaster xmlns:a="http://schemas.openxmlformats.org/drawingml/2006/main" xmlns:r="http://schemas.openxmlformats.org/officeDocument/2006/relationships" xmlns:p="http://schemas.openxmlformats.org/presentationml/2006/main" xmlns:m="http://schemas.openxmlformats.org/officeDocument/2006/math" xmlns:a14="http://schemas.microsoft.com/office/drawing/2010/main">
+<p:notesMaster xmlns:a="http://schemas.openxmlformats.org/drawingml/2006/main" xmlns:r="http://schemas.openxmlformats.org/officeDocument/2006/relationships" xmlns:p="http://schemas.openxmlformats.org/presentationml/2006/main">
   <p:cSld>
+    <p:bg>
+      <p:bgRef idx="1001">
+        <a:schemeClr val="bg1"/>
+      </p:bgRef>
+    </p:bg>
     <p:spTree>
       <p:nvGrpSpPr>
         <p:cNvPr id="1" name=""/>
@@ -350,7 +351,9 @@
       <p:sp>
         <p:nvSpPr>
           <p:cNvPr id="310" name="Shape 310"/>
-          <p:cNvSpPr/>
+          <p:cNvSpPr>
+            <a:spLocks noGrp="1" noRot="1" noChangeAspect="1"/>
+          </p:cNvSpPr>
           <p:nvPr>
             <p:ph type="sldImg"/>
           </p:nvPr>
@@ -368,14 +371,16 @@
           <a:bodyPr/>
           <a:lstStyle/>
           <a:p>
-            <a:pPr/>
+            <a:endParaRPr/>
           </a:p>
         </p:txBody>
       </p:sp>
       <p:sp>
         <p:nvSpPr>
           <p:cNvPr id="311" name="Shape 311"/>
-          <p:cNvSpPr/>
+          <p:cNvSpPr>
+            <a:spLocks noGrp="1"/>
+          </p:cNvSpPr>
           <p:nvPr>
             <p:ph type="body" sz="quarter" idx="1"/>
           </p:nvPr>
@@ -393,7 +398,7 @@
           <a:bodyPr/>
           <a:lstStyle/>
           <a:p>
-            <a:pPr/>
+            <a:endParaRPr/>
           </a:p>
         </p:txBody>
       </p:sp>
@@ -478,7 +483,7 @@
 </file>
 
 <file path=ppt/notesSlides/notesSlide1.xml><?xml version="1.0" encoding="utf-8"?>
-<p:notes xmlns:a="http://schemas.openxmlformats.org/drawingml/2006/main" xmlns:r="http://schemas.openxmlformats.org/officeDocument/2006/relationships" xmlns:p="http://schemas.openxmlformats.org/presentationml/2006/main" xmlns:m="http://schemas.openxmlformats.org/officeDocument/2006/math" xmlns:a14="http://schemas.microsoft.com/office/drawing/2010/main" showMasterSp="1" showMasterPhAnim="1">
+<p:notes xmlns:a="http://schemas.openxmlformats.org/drawingml/2006/main" xmlns:r="http://schemas.openxmlformats.org/officeDocument/2006/relationships" xmlns:p="http://schemas.openxmlformats.org/presentationml/2006/main">
   <p:cSld>
     <p:spTree>
       <p:nvGrpSpPr>
@@ -497,7 +502,9 @@
       <p:sp>
         <p:nvSpPr>
           <p:cNvPr id="317" name="Shape 317"/>
-          <p:cNvSpPr/>
+          <p:cNvSpPr>
+            <a:spLocks noGrp="1" noRot="1" noChangeAspect="1"/>
+          </p:cNvSpPr>
           <p:nvPr>
             <p:ph type="sldImg"/>
           </p:nvPr>
@@ -511,14 +518,16 @@
           <a:bodyPr/>
           <a:lstStyle/>
           <a:p>
-            <a:pPr/>
+            <a:endParaRPr/>
           </a:p>
         </p:txBody>
       </p:sp>
       <p:sp>
         <p:nvSpPr>
           <p:cNvPr id="318" name="Shape 318"/>
-          <p:cNvSpPr/>
+          <p:cNvSpPr>
+            <a:spLocks noGrp="1"/>
+          </p:cNvSpPr>
           <p:nvPr>
             <p:ph type="body" sz="quarter" idx="1"/>
           </p:nvPr>
@@ -541,7 +550,6 @@
             </a:lvl1pPr>
           </a:lstStyle>
           <a:p>
-            <a:pPr/>
             <a:r>
               <a:t>The objective of this study is to analyze how microservices handle data consistency and system failures. I also compare different architectural strategies and identify research gaps in current approaches.</a:t>
             </a:r>
@@ -557,7 +565,7 @@
 </file>
 
 <file path=ppt/notesSlides/notesSlide10.xml><?xml version="1.0" encoding="utf-8"?>
-<p:notes xmlns:a="http://schemas.openxmlformats.org/drawingml/2006/main" xmlns:r="http://schemas.openxmlformats.org/officeDocument/2006/relationships" xmlns:p="http://schemas.openxmlformats.org/presentationml/2006/main" xmlns:m="http://schemas.openxmlformats.org/officeDocument/2006/math" xmlns:a14="http://schemas.microsoft.com/office/drawing/2010/main" showMasterSp="1" showMasterPhAnim="1">
+<p:notes xmlns:a="http://schemas.openxmlformats.org/drawingml/2006/main" xmlns:r="http://schemas.openxmlformats.org/officeDocument/2006/relationships" xmlns:p="http://schemas.openxmlformats.org/presentationml/2006/main">
   <p:cSld>
     <p:spTree>
       <p:nvGrpSpPr>
@@ -576,7 +584,9 @@
       <p:sp>
         <p:nvSpPr>
           <p:cNvPr id="364" name="Shape 364"/>
-          <p:cNvSpPr/>
+          <p:cNvSpPr>
+            <a:spLocks noGrp="1" noRot="1" noChangeAspect="1"/>
+          </p:cNvSpPr>
           <p:nvPr>
             <p:ph type="sldImg"/>
           </p:nvPr>
@@ -590,14 +600,16 @@
           <a:bodyPr/>
           <a:lstStyle/>
           <a:p>
-            <a:pPr/>
+            <a:endParaRPr/>
           </a:p>
         </p:txBody>
       </p:sp>
       <p:sp>
         <p:nvSpPr>
           <p:cNvPr id="365" name="Shape 365"/>
-          <p:cNvSpPr/>
+          <p:cNvSpPr>
+            <a:spLocks noGrp="1"/>
+          </p:cNvSpPr>
           <p:nvPr>
             <p:ph type="body" sz="quarter" idx="1"/>
           </p:nvPr>
@@ -620,7 +632,6 @@
             </a:lvl1pPr>
           </a:lstStyle>
           <a:p>
-            <a:pPr/>
             <a:r>
               <a:t>The key finding is that no single approach works best. Systems must balance trade-offs, and combining multiple techniques gives better results.</a:t>
             </a:r>
@@ -636,7 +647,7 @@
 </file>
 
 <file path=ppt/notesSlides/notesSlide11.xml><?xml version="1.0" encoding="utf-8"?>
-<p:notes xmlns:a="http://schemas.openxmlformats.org/drawingml/2006/main" xmlns:r="http://schemas.openxmlformats.org/officeDocument/2006/relationships" xmlns:p="http://schemas.openxmlformats.org/presentationml/2006/main" xmlns:m="http://schemas.openxmlformats.org/officeDocument/2006/math" xmlns:a14="http://schemas.microsoft.com/office/drawing/2010/main" showMasterSp="1" showMasterPhAnim="1">
+<p:notes xmlns:a="http://schemas.openxmlformats.org/drawingml/2006/main" xmlns:r="http://schemas.openxmlformats.org/officeDocument/2006/relationships" xmlns:p="http://schemas.openxmlformats.org/presentationml/2006/main">
   <p:cSld>
     <p:spTree>
       <p:nvGrpSpPr>
@@ -655,7 +666,9 @@
       <p:sp>
         <p:nvSpPr>
           <p:cNvPr id="369" name="Shape 369"/>
-          <p:cNvSpPr/>
+          <p:cNvSpPr>
+            <a:spLocks noGrp="1" noRot="1" noChangeAspect="1"/>
+          </p:cNvSpPr>
           <p:nvPr>
             <p:ph type="sldImg"/>
           </p:nvPr>
@@ -669,14 +682,16 @@
           <a:bodyPr/>
           <a:lstStyle/>
           <a:p>
-            <a:pPr/>
+            <a:endParaRPr/>
           </a:p>
         </p:txBody>
       </p:sp>
       <p:sp>
         <p:nvSpPr>
           <p:cNvPr id="370" name="Shape 370"/>
-          <p:cNvSpPr/>
+          <p:cNvSpPr>
+            <a:spLocks noGrp="1"/>
+          </p:cNvSpPr>
           <p:nvPr>
             <p:ph type="body" sz="quarter" idx="1"/>
           </p:nvPr>
@@ -699,7 +714,6 @@
             </a:lvl1pPr>
           </a:lstStyle>
           <a:p>
-            <a:pPr/>
             <a:r>
               <a:t>In conclusion, microservices provide scalability but introduce complexity. Maintaining consistency and fault tolerance requires careful design, and decisions depend on system requirements.</a:t>
             </a:r>
@@ -715,7 +729,7 @@
 </file>
 
 <file path=ppt/notesSlides/notesSlide12.xml><?xml version="1.0" encoding="utf-8"?>
-<p:notes xmlns:a="http://schemas.openxmlformats.org/drawingml/2006/main" xmlns:r="http://schemas.openxmlformats.org/officeDocument/2006/relationships" xmlns:p="http://schemas.openxmlformats.org/presentationml/2006/main" xmlns:m="http://schemas.openxmlformats.org/officeDocument/2006/math" xmlns:a14="http://schemas.microsoft.com/office/drawing/2010/main" showMasterSp="1" showMasterPhAnim="1">
+<p:notes xmlns:a="http://schemas.openxmlformats.org/drawingml/2006/main" xmlns:r="http://schemas.openxmlformats.org/officeDocument/2006/relationships" xmlns:p="http://schemas.openxmlformats.org/presentationml/2006/main">
   <p:cSld>
     <p:spTree>
       <p:nvGrpSpPr>
@@ -734,7 +748,9 @@
       <p:sp>
         <p:nvSpPr>
           <p:cNvPr id="374" name="Shape 374"/>
-          <p:cNvSpPr/>
+          <p:cNvSpPr>
+            <a:spLocks noGrp="1" noRot="1" noChangeAspect="1"/>
+          </p:cNvSpPr>
           <p:nvPr>
             <p:ph type="sldImg"/>
           </p:nvPr>
@@ -748,14 +764,16 @@
           <a:bodyPr/>
           <a:lstStyle/>
           <a:p>
-            <a:pPr/>
+            <a:endParaRPr/>
           </a:p>
         </p:txBody>
       </p:sp>
       <p:sp>
         <p:nvSpPr>
           <p:cNvPr id="375" name="Shape 375"/>
-          <p:cNvSpPr/>
+          <p:cNvSpPr>
+            <a:spLocks noGrp="1"/>
+          </p:cNvSpPr>
           <p:nvPr>
             <p:ph type="body" sz="quarter" idx="1"/>
           </p:nvPr>
@@ -778,7 +796,6 @@
             </a:lvl1pPr>
           </a:lstStyle>
           <a:p>
-            <a:pPr/>
             <a:r>
               <a:t>Future work can focus on developing standard evaluation frameworks, improving real-world validation, and using AI for fault prediction and self-healing systems.</a:t>
             </a:r>
@@ -794,7 +811,7 @@
 </file>
 
 <file path=ppt/notesSlides/notesSlide2.xml><?xml version="1.0" encoding="utf-8"?>
-<p:notes xmlns:a="http://schemas.openxmlformats.org/drawingml/2006/main" xmlns:r="http://schemas.openxmlformats.org/officeDocument/2006/relationships" xmlns:p="http://schemas.openxmlformats.org/presentationml/2006/main" xmlns:m="http://schemas.openxmlformats.org/officeDocument/2006/math" xmlns:a14="http://schemas.microsoft.com/office/drawing/2010/main" showMasterSp="1" showMasterPhAnim="1">
+<p:notes xmlns:a="http://schemas.openxmlformats.org/drawingml/2006/main" xmlns:r="http://schemas.openxmlformats.org/officeDocument/2006/relationships" xmlns:p="http://schemas.openxmlformats.org/presentationml/2006/main">
   <p:cSld>
     <p:spTree>
       <p:nvGrpSpPr>
@@ -813,7 +830,9 @@
       <p:sp>
         <p:nvSpPr>
           <p:cNvPr id="322" name="Shape 322"/>
-          <p:cNvSpPr/>
+          <p:cNvSpPr>
+            <a:spLocks noGrp="1" noRot="1" noChangeAspect="1"/>
+          </p:cNvSpPr>
           <p:nvPr>
             <p:ph type="sldImg"/>
           </p:nvPr>
@@ -827,14 +846,16 @@
           <a:bodyPr/>
           <a:lstStyle/>
           <a:p>
-            <a:pPr/>
+            <a:endParaRPr/>
           </a:p>
         </p:txBody>
       </p:sp>
       <p:sp>
         <p:nvSpPr>
           <p:cNvPr id="323" name="Shape 323"/>
-          <p:cNvSpPr/>
+          <p:cNvSpPr>
+            <a:spLocks noGrp="1"/>
+          </p:cNvSpPr>
           <p:nvPr>
             <p:ph type="body" sz="quarter" idx="1"/>
           </p:nvPr>
@@ -857,7 +878,6 @@
             </a:lvl1pPr>
           </a:lstStyle>
           <a:p>
-            <a:pPr/>
             <a:r>
               <a:t>Microservices architecture breaks applications into small independent services. This improves scalability and flexibility, but because everything is distributed, managing data and failures becomes much more complex.</a:t>
             </a:r>
@@ -873,7 +893,7 @@
 </file>
 
 <file path=ppt/notesSlides/notesSlide3.xml><?xml version="1.0" encoding="utf-8"?>
-<p:notes xmlns:a="http://schemas.openxmlformats.org/drawingml/2006/main" xmlns:r="http://schemas.openxmlformats.org/officeDocument/2006/relationships" xmlns:p="http://schemas.openxmlformats.org/presentationml/2006/main" xmlns:m="http://schemas.openxmlformats.org/officeDocument/2006/math" xmlns:a14="http://schemas.microsoft.com/office/drawing/2010/main" showMasterSp="1" showMasterPhAnim="1">
+<p:notes xmlns:a="http://schemas.openxmlformats.org/drawingml/2006/main" xmlns:r="http://schemas.openxmlformats.org/officeDocument/2006/relationships" xmlns:p="http://schemas.openxmlformats.org/presentationml/2006/main">
   <p:cSld>
     <p:spTree>
       <p:nvGrpSpPr>
@@ -892,7 +912,9 @@
       <p:sp>
         <p:nvSpPr>
           <p:cNvPr id="327" name="Shape 327"/>
-          <p:cNvSpPr/>
+          <p:cNvSpPr>
+            <a:spLocks noGrp="1" noRot="1" noChangeAspect="1"/>
+          </p:cNvSpPr>
           <p:nvPr>
             <p:ph type="sldImg"/>
           </p:nvPr>
@@ -906,14 +928,16 @@
           <a:bodyPr/>
           <a:lstStyle/>
           <a:p>
-            <a:pPr/>
+            <a:endParaRPr/>
           </a:p>
         </p:txBody>
       </p:sp>
       <p:sp>
         <p:nvSpPr>
           <p:cNvPr id="328" name="Shape 328"/>
-          <p:cNvSpPr/>
+          <p:cNvSpPr>
+            <a:spLocks noGrp="1"/>
+          </p:cNvSpPr>
           <p:nvPr>
             <p:ph type="body" sz="quarter" idx="1"/>
           </p:nvPr>
@@ -927,7 +951,6 @@
           <a:bodyPr/>
           <a:lstStyle/>
           <a:p>
-            <a:pPr/>
             <a:r>
               <a:t>T</a:t>
             </a:r>
@@ -955,7 +978,7 @@
 </file>
 
 <file path=ppt/notesSlides/notesSlide4.xml><?xml version="1.0" encoding="utf-8"?>
-<p:notes xmlns:a="http://schemas.openxmlformats.org/drawingml/2006/main" xmlns:r="http://schemas.openxmlformats.org/officeDocument/2006/relationships" xmlns:p="http://schemas.openxmlformats.org/presentationml/2006/main" xmlns:m="http://schemas.openxmlformats.org/officeDocument/2006/math" xmlns:a14="http://schemas.microsoft.com/office/drawing/2010/main" showMasterSp="1" showMasterPhAnim="1">
+<p:notes xmlns:a="http://schemas.openxmlformats.org/drawingml/2006/main" xmlns:r="http://schemas.openxmlformats.org/officeDocument/2006/relationships" xmlns:p="http://schemas.openxmlformats.org/presentationml/2006/main">
   <p:cSld>
     <p:spTree>
       <p:nvGrpSpPr>
@@ -974,7 +997,9 @@
       <p:sp>
         <p:nvSpPr>
           <p:cNvPr id="332" name="Shape 332"/>
-          <p:cNvSpPr/>
+          <p:cNvSpPr>
+            <a:spLocks noGrp="1" noRot="1" noChangeAspect="1"/>
+          </p:cNvSpPr>
           <p:nvPr>
             <p:ph type="sldImg"/>
           </p:nvPr>
@@ -988,14 +1013,16 @@
           <a:bodyPr/>
           <a:lstStyle/>
           <a:p>
-            <a:pPr/>
+            <a:endParaRPr/>
           </a:p>
         </p:txBody>
       </p:sp>
       <p:sp>
         <p:nvSpPr>
           <p:cNvPr id="333" name="Shape 333"/>
-          <p:cNvSpPr/>
+          <p:cNvSpPr>
+            <a:spLocks noGrp="1"/>
+          </p:cNvSpPr>
           <p:nvPr>
             <p:ph type="body" sz="quarter" idx="1"/>
           </p:nvPr>
@@ -1018,7 +1045,6 @@
             </a:lvl1pPr>
           </a:lstStyle>
           <a:p>
-            <a:pPr/>
             <a:r>
               <a:t>To address this, I used a Systematic Literature Review approach, analyzing research papers from 2016 to 2026 across major academic data sources. </a:t>
             </a:r>
@@ -1034,7 +1060,7 @@
 </file>
 
 <file path=ppt/notesSlides/notesSlide5.xml><?xml version="1.0" encoding="utf-8"?>
-<p:notes xmlns:a="http://schemas.openxmlformats.org/drawingml/2006/main" xmlns:r="http://schemas.openxmlformats.org/officeDocument/2006/relationships" xmlns:p="http://schemas.openxmlformats.org/presentationml/2006/main" xmlns:m="http://schemas.openxmlformats.org/officeDocument/2006/math" xmlns:a14="http://schemas.microsoft.com/office/drawing/2010/main" showMasterSp="1" showMasterPhAnim="1">
+<p:notes xmlns:a="http://schemas.openxmlformats.org/drawingml/2006/main" xmlns:r="http://schemas.openxmlformats.org/officeDocument/2006/relationships" xmlns:p="http://schemas.openxmlformats.org/presentationml/2006/main">
   <p:cSld>
     <p:spTree>
       <p:nvGrpSpPr>
@@ -1053,7 +1079,9 @@
       <p:sp>
         <p:nvSpPr>
           <p:cNvPr id="337" name="Shape 337"/>
-          <p:cNvSpPr/>
+          <p:cNvSpPr>
+            <a:spLocks noGrp="1" noRot="1" noChangeAspect="1"/>
+          </p:cNvSpPr>
           <p:nvPr>
             <p:ph type="sldImg"/>
           </p:nvPr>
@@ -1067,14 +1095,16 @@
           <a:bodyPr/>
           <a:lstStyle/>
           <a:p>
-            <a:pPr/>
+            <a:endParaRPr/>
           </a:p>
         </p:txBody>
       </p:sp>
       <p:sp>
         <p:nvSpPr>
           <p:cNvPr id="338" name="Shape 338"/>
-          <p:cNvSpPr/>
+          <p:cNvSpPr>
+            <a:spLocks noGrp="1"/>
+          </p:cNvSpPr>
           <p:nvPr>
             <p:ph type="body" sz="quarter" idx="1"/>
           </p:nvPr>
@@ -1097,7 +1127,6 @@
             </a:lvl1pPr>
           </a:lstStyle>
           <a:p>
-            <a:pPr/>
             <a:r>
               <a:t>In microservices, strong consistency reduces scalability. So most systems adopt eventual consistency, where temporary inconsistencies are allowed but resolved over time.(example serve a is edited , the to view edits in service b takes few sec/sometime mins)</a:t>
             </a:r>
@@ -1113,7 +1142,7 @@
 </file>
 
 <file path=ppt/notesSlides/notesSlide6.xml><?xml version="1.0" encoding="utf-8"?>
-<p:notes xmlns:a="http://schemas.openxmlformats.org/drawingml/2006/main" xmlns:r="http://schemas.openxmlformats.org/officeDocument/2006/relationships" xmlns:p="http://schemas.openxmlformats.org/presentationml/2006/main" xmlns:m="http://schemas.openxmlformats.org/officeDocument/2006/math" xmlns:a14="http://schemas.microsoft.com/office/drawing/2010/main" showMasterSp="1" showMasterPhAnim="1">
+<p:notes xmlns:a="http://schemas.openxmlformats.org/drawingml/2006/main" xmlns:r="http://schemas.openxmlformats.org/officeDocument/2006/relationships" xmlns:p="http://schemas.openxmlformats.org/presentationml/2006/main">
   <p:cSld>
     <p:spTree>
       <p:nvGrpSpPr>
@@ -1132,7 +1161,9 @@
       <p:sp>
         <p:nvSpPr>
           <p:cNvPr id="342" name="Shape 342"/>
-          <p:cNvSpPr/>
+          <p:cNvSpPr>
+            <a:spLocks noGrp="1" noRot="1" noChangeAspect="1"/>
+          </p:cNvSpPr>
           <p:nvPr>
             <p:ph type="sldImg"/>
           </p:nvPr>
@@ -1146,14 +1177,16 @@
           <a:bodyPr/>
           <a:lstStyle/>
           <a:p>
-            <a:pPr/>
+            <a:endParaRPr/>
           </a:p>
         </p:txBody>
       </p:sp>
       <p:sp>
         <p:nvSpPr>
           <p:cNvPr id="343" name="Shape 343"/>
-          <p:cNvSpPr/>
+          <p:cNvSpPr>
+            <a:spLocks noGrp="1"/>
+          </p:cNvSpPr>
           <p:nvPr>
             <p:ph type="body" sz="quarter" idx="1"/>
           </p:nvPr>
@@ -1176,7 +1209,6 @@
             </a:lvl1pPr>
           </a:lstStyle>
           <a:p>
-            <a:pPr/>
             <a:r>
               <a:t>Traditional Two-Phase Commit ensures consistency but blocks the system during failures. Saga pattern is more practical as it breaks transactions into smaller steps and uses compensating actions.</a:t>
             </a:r>
@@ -1192,7 +1224,7 @@
 </file>
 
 <file path=ppt/notesSlides/notesSlide7.xml><?xml version="1.0" encoding="utf-8"?>
-<p:notes xmlns:a="http://schemas.openxmlformats.org/drawingml/2006/main" xmlns:r="http://schemas.openxmlformats.org/officeDocument/2006/relationships" xmlns:p="http://schemas.openxmlformats.org/presentationml/2006/main" xmlns:m="http://schemas.openxmlformats.org/officeDocument/2006/math" xmlns:a14="http://schemas.microsoft.com/office/drawing/2010/main" showMasterSp="1" showMasterPhAnim="1">
+<p:notes xmlns:a="http://schemas.openxmlformats.org/drawingml/2006/main" xmlns:r="http://schemas.openxmlformats.org/officeDocument/2006/relationships" xmlns:p="http://schemas.openxmlformats.org/presentationml/2006/main">
   <p:cSld>
     <p:spTree>
       <p:nvGrpSpPr>
@@ -1211,7 +1243,9 @@
       <p:sp>
         <p:nvSpPr>
           <p:cNvPr id="347" name="Shape 347"/>
-          <p:cNvSpPr/>
+          <p:cNvSpPr>
+            <a:spLocks noGrp="1" noRot="1" noChangeAspect="1"/>
+          </p:cNvSpPr>
           <p:nvPr>
             <p:ph type="sldImg"/>
           </p:nvPr>
@@ -1225,14 +1259,16 @@
           <a:bodyPr/>
           <a:lstStyle/>
           <a:p>
-            <a:pPr/>
+            <a:endParaRPr/>
           </a:p>
         </p:txBody>
       </p:sp>
       <p:sp>
         <p:nvSpPr>
           <p:cNvPr id="348" name="Shape 348"/>
-          <p:cNvSpPr/>
+          <p:cNvSpPr>
+            <a:spLocks noGrp="1"/>
+          </p:cNvSpPr>
           <p:nvPr>
             <p:ph type="body" sz="quarter" idx="1"/>
           </p:nvPr>
@@ -1255,7 +1291,6 @@
             </a:lvl1pPr>
           </a:lstStyle>
           <a:p>
-            <a:pPr/>
             <a:r>
               <a:t>Failures in microservices are often partial, meaning some services fail while others continue. This can lead to cascading failures if not handled properly.</a:t>
             </a:r>
@@ -1271,7 +1306,7 @@
 </file>
 
 <file path=ppt/notesSlides/notesSlide8.xml><?xml version="1.0" encoding="utf-8"?>
-<p:notes xmlns:a="http://schemas.openxmlformats.org/drawingml/2006/main" xmlns:r="http://schemas.openxmlformats.org/officeDocument/2006/relationships" xmlns:p="http://schemas.openxmlformats.org/presentationml/2006/main" xmlns:m="http://schemas.openxmlformats.org/officeDocument/2006/math" xmlns:a14="http://schemas.microsoft.com/office/drawing/2010/main" showMasterSp="1" showMasterPhAnim="1">
+<p:notes xmlns:a="http://schemas.openxmlformats.org/drawingml/2006/main" xmlns:r="http://schemas.openxmlformats.org/officeDocument/2006/relationships" xmlns:p="http://schemas.openxmlformats.org/presentationml/2006/main">
   <p:cSld>
     <p:spTree>
       <p:nvGrpSpPr>
@@ -1290,7 +1325,9 @@
       <p:sp>
         <p:nvSpPr>
           <p:cNvPr id="352" name="Shape 352"/>
-          <p:cNvSpPr/>
+          <p:cNvSpPr>
+            <a:spLocks noGrp="1" noRot="1" noChangeAspect="1"/>
+          </p:cNvSpPr>
           <p:nvPr>
             <p:ph type="sldImg"/>
           </p:nvPr>
@@ -1304,14 +1341,16 @@
           <a:bodyPr/>
           <a:lstStyle/>
           <a:p>
-            <a:pPr/>
+            <a:endParaRPr/>
           </a:p>
         </p:txBody>
       </p:sp>
       <p:sp>
         <p:nvSpPr>
           <p:cNvPr id="353" name="Shape 353"/>
-          <p:cNvSpPr/>
+          <p:cNvSpPr>
+            <a:spLocks noGrp="1"/>
+          </p:cNvSpPr>
           <p:nvPr>
             <p:ph type="body" sz="quarter" idx="1"/>
           </p:nvPr>
@@ -1334,7 +1373,6 @@
             </a:lvl1pPr>
           </a:lstStyle>
           <a:p>
-            <a:pPr/>
             <a:r>
               <a:t>To handle failures, systems use design patterns like circuit breakers, retries, and replication. These prevent failures from spreading and improve system reliability.</a:t>
             </a:r>
@@ -1350,7 +1388,7 @@
 </file>
 
 <file path=ppt/notesSlides/notesSlide9.xml><?xml version="1.0" encoding="utf-8"?>
-<p:notes xmlns:a="http://schemas.openxmlformats.org/drawingml/2006/main" xmlns:r="http://schemas.openxmlformats.org/officeDocument/2006/relationships" xmlns:p="http://schemas.openxmlformats.org/presentationml/2006/main" xmlns:m="http://schemas.openxmlformats.org/officeDocument/2006/math" xmlns:a14="http://schemas.microsoft.com/office/drawing/2010/main" showMasterSp="1" showMasterPhAnim="1">
+<p:notes xmlns:a="http://schemas.openxmlformats.org/drawingml/2006/main" xmlns:r="http://schemas.openxmlformats.org/officeDocument/2006/relationships" xmlns:p="http://schemas.openxmlformats.org/presentationml/2006/main">
   <p:cSld>
     <p:spTree>
       <p:nvGrpSpPr>
@@ -1369,7 +1407,9 @@
       <p:sp>
         <p:nvSpPr>
           <p:cNvPr id="359" name="Shape 359"/>
-          <p:cNvSpPr/>
+          <p:cNvSpPr>
+            <a:spLocks noGrp="1" noRot="1" noChangeAspect="1"/>
+          </p:cNvSpPr>
           <p:nvPr>
             <p:ph type="sldImg"/>
           </p:nvPr>
@@ -1383,14 +1423,16 @@
           <a:bodyPr/>
           <a:lstStyle/>
           <a:p>
-            <a:pPr/>
+            <a:endParaRPr/>
           </a:p>
         </p:txBody>
       </p:sp>
       <p:sp>
         <p:nvSpPr>
           <p:cNvPr id="360" name="Shape 360"/>
-          <p:cNvSpPr/>
+          <p:cNvSpPr>
+            <a:spLocks noGrp="1"/>
+          </p:cNvSpPr>
           <p:nvPr>
             <p:ph type="body" sz="quarter" idx="1"/>
           </p:nvPr>
@@ -1456,7 +1498,7 @@
 </file>
 
 <file path=ppt/slideLayouts/slideLayout1.xml><?xml version="1.0" encoding="utf-8"?>
-<p:sldLayout xmlns:a="http://schemas.openxmlformats.org/drawingml/2006/main" xmlns:r="http://schemas.openxmlformats.org/officeDocument/2006/relationships" xmlns:p="http://schemas.openxmlformats.org/presentationml/2006/main" xmlns:m="http://schemas.openxmlformats.org/officeDocument/2006/math" xmlns:a14="http://schemas.microsoft.com/office/drawing/2010/main" type="tx" showMasterSp="1" showMasterPhAnim="1">
+<p:sldLayout xmlns:a="http://schemas.openxmlformats.org/drawingml/2006/main" xmlns:r="http://schemas.openxmlformats.org/officeDocument/2006/relationships" xmlns:p="http://schemas.openxmlformats.org/presentationml/2006/main" type="tx">
   <p:cSld name="Blank Slide">
     <p:spTree>
       <p:nvGrpSpPr>
@@ -1475,7 +1517,9 @@
       <p:sp>
         <p:nvSpPr>
           <p:cNvPr id="26" name="Slide Number"/>
-          <p:cNvSpPr txBox="1"/>
+          <p:cNvSpPr txBox="1">
+            <a:spLocks noGrp="1"/>
+          </p:cNvSpPr>
           <p:nvPr>
             <p:ph type="sldNum" sz="quarter" idx="2"/>
           </p:nvPr>
@@ -1489,8 +1533,10 @@
           <a:bodyPr/>
           <a:lstStyle/>
           <a:p>
-            <a:pPr/>
-            <a:fld id="{86CB4B4D-7CA3-9044-876B-883B54F8677D}" type="slidenum"/>
+            <a:fld id="{86CB4B4D-7CA3-9044-876B-883B54F8677D}" type="slidenum">
+              <a:t>‹#›</a:t>
+            </a:fld>
+            <a:endParaRPr/>
           </a:p>
         </p:txBody>
       </p:sp>
@@ -1499,12 +1545,12 @@
   <p:clrMapOvr>
     <a:masterClrMapping/>
   </p:clrMapOvr>
-  <p:transition xmlns:p14="http://schemas.microsoft.com/office/powerpoint/2010/main" spd="med" advClick="1"/>
+  <p:transition spd="med"/>
 </p:sldLayout>
 </file>
 
 <file path=ppt/slideLayouts/slideLayout10.xml><?xml version="1.0" encoding="utf-8"?>
-<p:sldLayout xmlns:a="http://schemas.openxmlformats.org/drawingml/2006/main" xmlns:r="http://schemas.openxmlformats.org/officeDocument/2006/relationships" xmlns:p="http://schemas.openxmlformats.org/presentationml/2006/main" xmlns:m="http://schemas.openxmlformats.org/officeDocument/2006/math" xmlns:a14="http://schemas.microsoft.com/office/drawing/2010/main" type="tx" showMasterSp="0" showMasterPhAnim="1">
+<p:sldLayout xmlns:a="http://schemas.openxmlformats.org/drawingml/2006/main" xmlns:r="http://schemas.openxmlformats.org/officeDocument/2006/relationships" xmlns:p="http://schemas.openxmlformats.org/presentationml/2006/main" showMasterSp="0" type="tx">
   <p:cSld name="Title, Content over Content">
     <p:spTree>
       <p:nvGrpSpPr>
@@ -1545,7 +1591,7 @@
           <a:bodyPr lIns="45719" rIns="45719"/>
           <a:lstStyle/>
           <a:p>
-            <a:pPr/>
+            <a:endParaRPr/>
           </a:p>
         </p:txBody>
       </p:sp>
@@ -1574,7 +1620,7 @@
           <a:bodyPr lIns="45719" rIns="45719"/>
           <a:lstStyle/>
           <a:p>
-            <a:pPr/>
+            <a:endParaRPr/>
           </a:p>
         </p:txBody>
       </p:sp>
@@ -1587,10 +1633,8 @@
           <p:nvPr/>
         </p:nvPicPr>
         <p:blipFill>
-          <a:blip r:embed="rId2">
-            <a:extLst/>
-          </a:blip>
-          <a:srcRect l="0" t="0" r="0" b="10718"/>
+          <a:blip r:embed="rId2"/>
+          <a:srcRect b="10718"/>
           <a:stretch>
             <a:fillRect/>
           </a:stretch>
@@ -1617,10 +1661,8 @@
           <p:nvPr/>
         </p:nvPicPr>
         <p:blipFill>
-          <a:blip r:embed="rId2">
-            <a:extLst/>
-          </a:blip>
-          <a:srcRect l="0" t="0" r="0" b="10718"/>
+          <a:blip r:embed="rId2"/>
+          <a:srcRect b="10718"/>
           <a:stretch>
             <a:fillRect/>
           </a:stretch>
@@ -1681,7 +1723,7 @@
             </a:bodyPr>
             <a:lstStyle/>
             <a:p>
-              <a:pPr/>
+              <a:endParaRPr/>
             </a:p>
           </p:txBody>
         </p:sp>
@@ -1694,10 +1736,8 @@
             <p:nvPr/>
           </p:nvPicPr>
           <p:blipFill>
-            <a:blip r:embed="rId2">
-              <a:extLst/>
-            </a:blip>
-            <a:srcRect l="0" t="0" r="0" b="10718"/>
+            <a:blip r:embed="rId2"/>
+            <a:srcRect b="10718"/>
             <a:stretch>
               <a:fillRect/>
             </a:stretch>
@@ -1746,7 +1786,7 @@
             </a:bodyPr>
             <a:lstStyle/>
             <a:p>
-              <a:pPr/>
+              <a:endParaRPr/>
             </a:p>
           </p:txBody>
         </p:sp>
@@ -1760,9 +1800,7 @@
           <p:nvPr/>
         </p:nvPicPr>
         <p:blipFill>
-          <a:blip r:embed="rId3">
-            <a:extLst/>
-          </a:blip>
+          <a:blip r:embed="rId3"/>
           <a:stretch>
             <a:fillRect/>
           </a:stretch>
@@ -1789,10 +1827,8 @@
           <p:nvPr/>
         </p:nvPicPr>
         <p:blipFill>
-          <a:blip r:embed="rId2">
-            <a:extLst/>
-          </a:blip>
-          <a:srcRect l="0" t="0" r="0" b="10718"/>
+          <a:blip r:embed="rId2"/>
+          <a:srcRect b="10718"/>
           <a:stretch>
             <a:fillRect/>
           </a:stretch>
@@ -1853,7 +1889,7 @@
             </a:bodyPr>
             <a:lstStyle/>
             <a:p>
-              <a:pPr/>
+              <a:endParaRPr/>
             </a:p>
           </p:txBody>
         </p:sp>
@@ -1866,10 +1902,8 @@
             <p:nvPr/>
           </p:nvPicPr>
           <p:blipFill>
-            <a:blip r:embed="rId2">
-              <a:extLst/>
-            </a:blip>
-            <a:srcRect l="0" t="0" r="0" b="10718"/>
+            <a:blip r:embed="rId2"/>
+            <a:srcRect b="10718"/>
             <a:stretch>
               <a:fillRect/>
             </a:stretch>
@@ -1918,7 +1952,7 @@
             </a:bodyPr>
             <a:lstStyle/>
             <a:p>
-              <a:pPr/>
+              <a:endParaRPr/>
             </a:p>
           </p:txBody>
         </p:sp>
@@ -1932,9 +1966,7 @@
           <p:nvPr/>
         </p:nvPicPr>
         <p:blipFill>
-          <a:blip r:embed="rId3">
-            <a:extLst/>
-          </a:blip>
+          <a:blip r:embed="rId3"/>
           <a:stretch>
             <a:fillRect/>
           </a:stretch>
@@ -1955,7 +1987,9 @@
       <p:sp>
         <p:nvSpPr>
           <p:cNvPr id="245" name="Title Text"/>
-          <p:cNvSpPr txBox="1"/>
+          <p:cNvSpPr txBox="1">
+            <a:spLocks noGrp="1"/>
+          </p:cNvSpPr>
           <p:nvPr>
             <p:ph type="title"/>
           </p:nvPr>
@@ -1971,11 +2005,10 @@
         </p:spPr>
         <p:txBody>
           <a:bodyPr lIns="0" tIns="0" rIns="0" bIns="0">
-            <a:normAutofit fontScale="100000" lnSpcReduction="0"/>
+            <a:normAutofit/>
           </a:bodyPr>
           <a:lstStyle/>
           <a:p>
-            <a:pPr/>
             <a:r>
               <a:t>Title Text</a:t>
             </a:r>
@@ -1985,7 +2018,9 @@
       <p:sp>
         <p:nvSpPr>
           <p:cNvPr id="246" name="Body Level One…"/>
-          <p:cNvSpPr txBox="1"/>
+          <p:cNvSpPr txBox="1">
+            <a:spLocks noGrp="1"/>
+          </p:cNvSpPr>
           <p:nvPr>
             <p:ph type="body" sz="half" idx="1"/>
           </p:nvPr>
@@ -2001,11 +2036,10 @@
         </p:spPr>
         <p:txBody>
           <a:bodyPr lIns="0" tIns="0" rIns="0" bIns="0">
-            <a:normAutofit fontScale="100000" lnSpcReduction="0"/>
+            <a:normAutofit/>
           </a:bodyPr>
           <a:lstStyle/>
           <a:p>
-            <a:pPr/>
             <a:r>
               <a:t>Body Level One</a:t>
             </a:r>
@@ -2039,7 +2073,9 @@
       <p:sp>
         <p:nvSpPr>
           <p:cNvPr id="247" name="PlaceHolder 3"/>
-          <p:cNvSpPr/>
+          <p:cNvSpPr>
+            <a:spLocks noGrp="1"/>
+          </p:cNvSpPr>
           <p:nvPr>
             <p:ph type="body" sz="half" idx="21"/>
           </p:nvPr>
@@ -2055,20 +2091,23 @@
         </p:spPr>
         <p:txBody>
           <a:bodyPr lIns="0" tIns="0" rIns="0" bIns="0">
-            <a:normAutofit fontScale="100000" lnSpcReduction="0"/>
+            <a:normAutofit/>
           </a:bodyPr>
           <a:lstStyle/>
           <a:p>
             <a:pPr>
               <a:defRPr spc="-100"/>
             </a:pPr>
+            <a:endParaRPr/>
           </a:p>
         </p:txBody>
       </p:sp>
       <p:sp>
         <p:nvSpPr>
           <p:cNvPr id="248" name="Slide Number"/>
-          <p:cNvSpPr txBox="1"/>
+          <p:cNvSpPr txBox="1">
+            <a:spLocks noGrp="1"/>
+          </p:cNvSpPr>
           <p:nvPr>
             <p:ph type="sldNum" sz="quarter" idx="2"/>
           </p:nvPr>
@@ -2082,8 +2121,10 @@
           <a:bodyPr/>
           <a:lstStyle/>
           <a:p>
-            <a:pPr/>
-            <a:fld id="{86CB4B4D-7CA3-9044-876B-883B54F8677D}" type="slidenum"/>
+            <a:fld id="{86CB4B4D-7CA3-9044-876B-883B54F8677D}" type="slidenum">
+              <a:t>‹#›</a:t>
+            </a:fld>
+            <a:endParaRPr/>
           </a:p>
         </p:txBody>
       </p:sp>
@@ -2092,12 +2133,12 @@
   <p:clrMapOvr>
     <a:masterClrMapping/>
   </p:clrMapOvr>
-  <p:transition xmlns:p14="http://schemas.microsoft.com/office/powerpoint/2010/main" spd="med" advClick="1"/>
+  <p:transition spd="med"/>
 </p:sldLayout>
 </file>
 
 <file path=ppt/slideLayouts/slideLayout11.xml><?xml version="1.0" encoding="utf-8"?>
-<p:sldLayout xmlns:a="http://schemas.openxmlformats.org/drawingml/2006/main" xmlns:r="http://schemas.openxmlformats.org/officeDocument/2006/relationships" xmlns:p="http://schemas.openxmlformats.org/presentationml/2006/main" xmlns:m="http://schemas.openxmlformats.org/officeDocument/2006/math" xmlns:a14="http://schemas.microsoft.com/office/drawing/2010/main" type="tx" showMasterSp="0" showMasterPhAnim="1">
+<p:sldLayout xmlns:a="http://schemas.openxmlformats.org/drawingml/2006/main" xmlns:r="http://schemas.openxmlformats.org/officeDocument/2006/relationships" xmlns:p="http://schemas.openxmlformats.org/presentationml/2006/main" showMasterSp="0" type="tx">
   <p:cSld name="Title, 4 Content">
     <p:spTree>
       <p:nvGrpSpPr>
@@ -2138,7 +2179,7 @@
           <a:bodyPr lIns="45719" rIns="45719"/>
           <a:lstStyle/>
           <a:p>
-            <a:pPr/>
+            <a:endParaRPr/>
           </a:p>
         </p:txBody>
       </p:sp>
@@ -2167,7 +2208,7 @@
           <a:bodyPr lIns="45719" rIns="45719"/>
           <a:lstStyle/>
           <a:p>
-            <a:pPr/>
+            <a:endParaRPr/>
           </a:p>
         </p:txBody>
       </p:sp>
@@ -2180,10 +2221,8 @@
           <p:nvPr/>
         </p:nvPicPr>
         <p:blipFill>
-          <a:blip r:embed="rId2">
-            <a:extLst/>
-          </a:blip>
-          <a:srcRect l="0" t="0" r="0" b="10718"/>
+          <a:blip r:embed="rId2"/>
+          <a:srcRect b="10718"/>
           <a:stretch>
             <a:fillRect/>
           </a:stretch>
@@ -2210,10 +2249,8 @@
           <p:nvPr/>
         </p:nvPicPr>
         <p:blipFill>
-          <a:blip r:embed="rId2">
-            <a:extLst/>
-          </a:blip>
-          <a:srcRect l="0" t="0" r="0" b="10718"/>
+          <a:blip r:embed="rId2"/>
+          <a:srcRect b="10718"/>
           <a:stretch>
             <a:fillRect/>
           </a:stretch>
@@ -2274,7 +2311,7 @@
             </a:bodyPr>
             <a:lstStyle/>
             <a:p>
-              <a:pPr/>
+              <a:endParaRPr/>
             </a:p>
           </p:txBody>
         </p:sp>
@@ -2287,10 +2324,8 @@
             <p:nvPr/>
           </p:nvPicPr>
           <p:blipFill>
-            <a:blip r:embed="rId2">
-              <a:extLst/>
-            </a:blip>
-            <a:srcRect l="0" t="0" r="0" b="10718"/>
+            <a:blip r:embed="rId2"/>
+            <a:srcRect b="10718"/>
             <a:stretch>
               <a:fillRect/>
             </a:stretch>
@@ -2339,7 +2374,7 @@
             </a:bodyPr>
             <a:lstStyle/>
             <a:p>
-              <a:pPr/>
+              <a:endParaRPr/>
             </a:p>
           </p:txBody>
         </p:sp>
@@ -2353,9 +2388,7 @@
           <p:nvPr/>
         </p:nvPicPr>
         <p:blipFill>
-          <a:blip r:embed="rId3">
-            <a:extLst/>
-          </a:blip>
+          <a:blip r:embed="rId3"/>
           <a:stretch>
             <a:fillRect/>
           </a:stretch>
@@ -2382,10 +2415,8 @@
           <p:nvPr/>
         </p:nvPicPr>
         <p:blipFill>
-          <a:blip r:embed="rId2">
-            <a:extLst/>
-          </a:blip>
-          <a:srcRect l="0" t="0" r="0" b="10718"/>
+          <a:blip r:embed="rId2"/>
+          <a:srcRect b="10718"/>
           <a:stretch>
             <a:fillRect/>
           </a:stretch>
@@ -2446,7 +2477,7 @@
             </a:bodyPr>
             <a:lstStyle/>
             <a:p>
-              <a:pPr/>
+              <a:endParaRPr/>
             </a:p>
           </p:txBody>
         </p:sp>
@@ -2459,10 +2490,8 @@
             <p:nvPr/>
           </p:nvPicPr>
           <p:blipFill>
-            <a:blip r:embed="rId2">
-              <a:extLst/>
-            </a:blip>
-            <a:srcRect l="0" t="0" r="0" b="10718"/>
+            <a:blip r:embed="rId2"/>
+            <a:srcRect b="10718"/>
             <a:stretch>
               <a:fillRect/>
             </a:stretch>
@@ -2511,7 +2540,7 @@
             </a:bodyPr>
             <a:lstStyle/>
             <a:p>
-              <a:pPr/>
+              <a:endParaRPr/>
             </a:p>
           </p:txBody>
         </p:sp>
@@ -2525,9 +2554,7 @@
           <p:nvPr/>
         </p:nvPicPr>
         <p:blipFill>
-          <a:blip r:embed="rId3">
-            <a:extLst/>
-          </a:blip>
+          <a:blip r:embed="rId3"/>
           <a:stretch>
             <a:fillRect/>
           </a:stretch>
@@ -2548,7 +2575,9 @@
       <p:sp>
         <p:nvSpPr>
           <p:cNvPr id="270" name="Title Text"/>
-          <p:cNvSpPr txBox="1"/>
+          <p:cNvSpPr txBox="1">
+            <a:spLocks noGrp="1"/>
+          </p:cNvSpPr>
           <p:nvPr>
             <p:ph type="title"/>
           </p:nvPr>
@@ -2564,11 +2593,10 @@
         </p:spPr>
         <p:txBody>
           <a:bodyPr lIns="0" tIns="0" rIns="0" bIns="0">
-            <a:normAutofit fontScale="100000" lnSpcReduction="0"/>
+            <a:normAutofit/>
           </a:bodyPr>
           <a:lstStyle/>
           <a:p>
-            <a:pPr/>
             <a:r>
               <a:t>Title Text</a:t>
             </a:r>
@@ -2578,7 +2606,9 @@
       <p:sp>
         <p:nvSpPr>
           <p:cNvPr id="271" name="Body Level One…"/>
-          <p:cNvSpPr txBox="1"/>
+          <p:cNvSpPr txBox="1">
+            <a:spLocks noGrp="1"/>
+          </p:cNvSpPr>
           <p:nvPr>
             <p:ph type="body" sz="quarter" idx="1"/>
           </p:nvPr>
@@ -2594,11 +2624,10 @@
         </p:spPr>
         <p:txBody>
           <a:bodyPr lIns="0" tIns="0" rIns="0" bIns="0">
-            <a:normAutofit fontScale="100000" lnSpcReduction="0"/>
+            <a:normAutofit/>
           </a:bodyPr>
           <a:lstStyle/>
           <a:p>
-            <a:pPr/>
             <a:r>
               <a:t>Body Level One</a:t>
             </a:r>
@@ -2649,7 +2678,7 @@
         </p:spPr>
         <p:txBody>
           <a:bodyPr lIns="0" tIns="0" rIns="0" bIns="0">
-            <a:normAutofit fontScale="100000" lnSpcReduction="0"/>
+            <a:normAutofit/>
           </a:bodyPr>
           <a:lstStyle/>
           <a:p>
@@ -2663,13 +2692,14 @@
               <a:buSzPct val="100000"/>
               <a:buFont typeface="Arial"/>
               <a:buChar char="•"/>
-              <a:defRPr spc="-100" sz="3200">
+              <a:defRPr sz="3200" spc="-100">
                 <a:latin typeface="+mn-lt"/>
                 <a:ea typeface="+mn-ea"/>
                 <a:cs typeface="+mn-cs"/>
                 <a:sym typeface="Calibri"/>
               </a:defRPr>
             </a:pPr>
+            <a:endParaRPr/>
           </a:p>
         </p:txBody>
       </p:sp>
@@ -2693,7 +2723,7 @@
         </p:spPr>
         <p:txBody>
           <a:bodyPr lIns="0" tIns="0" rIns="0" bIns="0">
-            <a:normAutofit fontScale="100000" lnSpcReduction="0"/>
+            <a:normAutofit/>
           </a:bodyPr>
           <a:lstStyle/>
           <a:p>
@@ -2707,20 +2737,23 @@
               <a:buSzPct val="100000"/>
               <a:buFont typeface="Arial"/>
               <a:buChar char="•"/>
-              <a:defRPr spc="-100" sz="3200">
+              <a:defRPr sz="3200" spc="-100">
                 <a:latin typeface="+mn-lt"/>
                 <a:ea typeface="+mn-ea"/>
                 <a:cs typeface="+mn-cs"/>
                 <a:sym typeface="Calibri"/>
               </a:defRPr>
             </a:pPr>
+            <a:endParaRPr/>
           </a:p>
         </p:txBody>
       </p:sp>
       <p:sp>
         <p:nvSpPr>
           <p:cNvPr id="274" name="PlaceHolder 5"/>
-          <p:cNvSpPr/>
+          <p:cNvSpPr>
+            <a:spLocks noGrp="1"/>
+          </p:cNvSpPr>
           <p:nvPr>
             <p:ph type="body" sz="quarter" idx="21"/>
           </p:nvPr>
@@ -2736,20 +2769,23 @@
         </p:spPr>
         <p:txBody>
           <a:bodyPr lIns="0" tIns="0" rIns="0" bIns="0">
-            <a:normAutofit fontScale="100000" lnSpcReduction="0"/>
+            <a:normAutofit/>
           </a:bodyPr>
           <a:lstStyle/>
           <a:p>
             <a:pPr>
               <a:defRPr spc="-100"/>
             </a:pPr>
+            <a:endParaRPr/>
           </a:p>
         </p:txBody>
       </p:sp>
       <p:sp>
         <p:nvSpPr>
           <p:cNvPr id="275" name="Slide Number"/>
-          <p:cNvSpPr txBox="1"/>
+          <p:cNvSpPr txBox="1">
+            <a:spLocks noGrp="1"/>
+          </p:cNvSpPr>
           <p:nvPr>
             <p:ph type="sldNum" sz="quarter" idx="2"/>
           </p:nvPr>
@@ -2763,8 +2799,10 @@
           <a:bodyPr/>
           <a:lstStyle/>
           <a:p>
-            <a:pPr/>
-            <a:fld id="{86CB4B4D-7CA3-9044-876B-883B54F8677D}" type="slidenum"/>
+            <a:fld id="{86CB4B4D-7CA3-9044-876B-883B54F8677D}" type="slidenum">
+              <a:t>‹#›</a:t>
+            </a:fld>
+            <a:endParaRPr/>
           </a:p>
         </p:txBody>
       </p:sp>
@@ -2773,12 +2811,12 @@
   <p:clrMapOvr>
     <a:masterClrMapping/>
   </p:clrMapOvr>
-  <p:transition xmlns:p14="http://schemas.microsoft.com/office/powerpoint/2010/main" spd="med" advClick="1"/>
+  <p:transition spd="med"/>
 </p:sldLayout>
 </file>
 
 <file path=ppt/slideLayouts/slideLayout12.xml><?xml version="1.0" encoding="utf-8"?>
-<p:sldLayout xmlns:a="http://schemas.openxmlformats.org/drawingml/2006/main" xmlns:r="http://schemas.openxmlformats.org/officeDocument/2006/relationships" xmlns:p="http://schemas.openxmlformats.org/presentationml/2006/main" xmlns:m="http://schemas.openxmlformats.org/officeDocument/2006/math" xmlns:a14="http://schemas.microsoft.com/office/drawing/2010/main" type="tx" showMasterSp="0" showMasterPhAnim="1">
+<p:sldLayout xmlns:a="http://schemas.openxmlformats.org/drawingml/2006/main" xmlns:r="http://schemas.openxmlformats.org/officeDocument/2006/relationships" xmlns:p="http://schemas.openxmlformats.org/presentationml/2006/main" showMasterSp="0" type="tx">
   <p:cSld name="Title, 6 Content">
     <p:spTree>
       <p:nvGrpSpPr>
@@ -2819,7 +2857,7 @@
           <a:bodyPr lIns="45719" rIns="45719"/>
           <a:lstStyle/>
           <a:p>
-            <a:pPr/>
+            <a:endParaRPr/>
           </a:p>
         </p:txBody>
       </p:sp>
@@ -2848,7 +2886,7 @@
           <a:bodyPr lIns="45719" rIns="45719"/>
           <a:lstStyle/>
           <a:p>
-            <a:pPr/>
+            <a:endParaRPr/>
           </a:p>
         </p:txBody>
       </p:sp>
@@ -2861,10 +2899,8 @@
           <p:nvPr/>
         </p:nvPicPr>
         <p:blipFill>
-          <a:blip r:embed="rId2">
-            <a:extLst/>
-          </a:blip>
-          <a:srcRect l="0" t="0" r="0" b="10718"/>
+          <a:blip r:embed="rId2"/>
+          <a:srcRect b="10718"/>
           <a:stretch>
             <a:fillRect/>
           </a:stretch>
@@ -2891,10 +2927,8 @@
           <p:nvPr/>
         </p:nvPicPr>
         <p:blipFill>
-          <a:blip r:embed="rId2">
-            <a:extLst/>
-          </a:blip>
-          <a:srcRect l="0" t="0" r="0" b="10718"/>
+          <a:blip r:embed="rId2"/>
+          <a:srcRect b="10718"/>
           <a:stretch>
             <a:fillRect/>
           </a:stretch>
@@ -2955,7 +2989,7 @@
             </a:bodyPr>
             <a:lstStyle/>
             <a:p>
-              <a:pPr/>
+              <a:endParaRPr/>
             </a:p>
           </p:txBody>
         </p:sp>
@@ -2968,10 +3002,8 @@
             <p:nvPr/>
           </p:nvPicPr>
           <p:blipFill>
-            <a:blip r:embed="rId2">
-              <a:extLst/>
-            </a:blip>
-            <a:srcRect l="0" t="0" r="0" b="10718"/>
+            <a:blip r:embed="rId2"/>
+            <a:srcRect b="10718"/>
             <a:stretch>
               <a:fillRect/>
             </a:stretch>
@@ -3020,7 +3052,7 @@
             </a:bodyPr>
             <a:lstStyle/>
             <a:p>
-              <a:pPr/>
+              <a:endParaRPr/>
             </a:p>
           </p:txBody>
         </p:sp>
@@ -3034,9 +3066,7 @@
           <p:nvPr/>
         </p:nvPicPr>
         <p:blipFill>
-          <a:blip r:embed="rId3">
-            <a:extLst/>
-          </a:blip>
+          <a:blip r:embed="rId3"/>
           <a:stretch>
             <a:fillRect/>
           </a:stretch>
@@ -3063,10 +3093,8 @@
           <p:nvPr/>
         </p:nvPicPr>
         <p:blipFill>
-          <a:blip r:embed="rId2">
-            <a:extLst/>
-          </a:blip>
-          <a:srcRect l="0" t="0" r="0" b="10718"/>
+          <a:blip r:embed="rId2"/>
+          <a:srcRect b="10718"/>
           <a:stretch>
             <a:fillRect/>
           </a:stretch>
@@ -3127,7 +3155,7 @@
             </a:bodyPr>
             <a:lstStyle/>
             <a:p>
-              <a:pPr/>
+              <a:endParaRPr/>
             </a:p>
           </p:txBody>
         </p:sp>
@@ -3140,10 +3168,8 @@
             <p:nvPr/>
           </p:nvPicPr>
           <p:blipFill>
-            <a:blip r:embed="rId2">
-              <a:extLst/>
-            </a:blip>
-            <a:srcRect l="0" t="0" r="0" b="10718"/>
+            <a:blip r:embed="rId2"/>
+            <a:srcRect b="10718"/>
             <a:stretch>
               <a:fillRect/>
             </a:stretch>
@@ -3192,7 +3218,7 @@
             </a:bodyPr>
             <a:lstStyle/>
             <a:p>
-              <a:pPr/>
+              <a:endParaRPr/>
             </a:p>
           </p:txBody>
         </p:sp>
@@ -3206,9 +3232,7 @@
           <p:nvPr/>
         </p:nvPicPr>
         <p:blipFill>
-          <a:blip r:embed="rId3">
-            <a:extLst/>
-          </a:blip>
+          <a:blip r:embed="rId3"/>
           <a:stretch>
             <a:fillRect/>
           </a:stretch>
@@ -3229,7 +3253,9 @@
       <p:sp>
         <p:nvSpPr>
           <p:cNvPr id="297" name="Title Text"/>
-          <p:cNvSpPr txBox="1"/>
+          <p:cNvSpPr txBox="1">
+            <a:spLocks noGrp="1"/>
+          </p:cNvSpPr>
           <p:nvPr>
             <p:ph type="title"/>
           </p:nvPr>
@@ -3245,11 +3271,10 @@
         </p:spPr>
         <p:txBody>
           <a:bodyPr lIns="0" tIns="0" rIns="0" bIns="0">
-            <a:normAutofit fontScale="100000" lnSpcReduction="0"/>
+            <a:normAutofit/>
           </a:bodyPr>
           <a:lstStyle/>
           <a:p>
-            <a:pPr/>
             <a:r>
               <a:t>Title Text</a:t>
             </a:r>
@@ -3259,7 +3284,9 @@
       <p:sp>
         <p:nvSpPr>
           <p:cNvPr id="298" name="Body Level One…"/>
-          <p:cNvSpPr txBox="1"/>
+          <p:cNvSpPr txBox="1">
+            <a:spLocks noGrp="1"/>
+          </p:cNvSpPr>
           <p:nvPr>
             <p:ph type="body" sz="quarter" idx="1"/>
           </p:nvPr>
@@ -3275,11 +3302,10 @@
         </p:spPr>
         <p:txBody>
           <a:bodyPr lIns="0" tIns="0" rIns="0" bIns="0">
-            <a:normAutofit fontScale="100000" lnSpcReduction="0"/>
+            <a:normAutofit/>
           </a:bodyPr>
           <a:lstStyle/>
           <a:p>
-            <a:pPr/>
             <a:r>
               <a:t>Body Level One</a:t>
             </a:r>
@@ -3330,7 +3356,7 @@
         </p:spPr>
         <p:txBody>
           <a:bodyPr lIns="0" tIns="0" rIns="0" bIns="0">
-            <a:normAutofit fontScale="100000" lnSpcReduction="0"/>
+            <a:normAutofit/>
           </a:bodyPr>
           <a:lstStyle/>
           <a:p>
@@ -3344,13 +3370,14 @@
               <a:buSzPct val="100000"/>
               <a:buFont typeface="Arial"/>
               <a:buChar char="•"/>
-              <a:defRPr spc="-100" sz="3200">
+              <a:defRPr sz="3200" spc="-100">
                 <a:latin typeface="+mn-lt"/>
                 <a:ea typeface="+mn-ea"/>
                 <a:cs typeface="+mn-cs"/>
                 <a:sym typeface="Calibri"/>
               </a:defRPr>
             </a:pPr>
+            <a:endParaRPr/>
           </a:p>
         </p:txBody>
       </p:sp>
@@ -3374,7 +3401,7 @@
         </p:spPr>
         <p:txBody>
           <a:bodyPr lIns="0" tIns="0" rIns="0" bIns="0">
-            <a:normAutofit fontScale="100000" lnSpcReduction="0"/>
+            <a:normAutofit/>
           </a:bodyPr>
           <a:lstStyle/>
           <a:p>
@@ -3388,13 +3415,14 @@
               <a:buSzPct val="100000"/>
               <a:buFont typeface="Arial"/>
               <a:buChar char="•"/>
-              <a:defRPr spc="-100" sz="3200">
+              <a:defRPr sz="3200" spc="-100">
                 <a:latin typeface="+mn-lt"/>
                 <a:ea typeface="+mn-ea"/>
                 <a:cs typeface="+mn-cs"/>
                 <a:sym typeface="Calibri"/>
               </a:defRPr>
             </a:pPr>
+            <a:endParaRPr/>
           </a:p>
         </p:txBody>
       </p:sp>
@@ -3418,7 +3446,7 @@
         </p:spPr>
         <p:txBody>
           <a:bodyPr lIns="0" tIns="0" rIns="0" bIns="0">
-            <a:normAutofit fontScale="100000" lnSpcReduction="0"/>
+            <a:normAutofit/>
           </a:bodyPr>
           <a:lstStyle/>
           <a:p>
@@ -3432,13 +3460,14 @@
               <a:buSzPct val="100000"/>
               <a:buFont typeface="Arial"/>
               <a:buChar char="•"/>
-              <a:defRPr spc="-100" sz="3200">
+              <a:defRPr sz="3200" spc="-100">
                 <a:latin typeface="+mn-lt"/>
                 <a:ea typeface="+mn-ea"/>
                 <a:cs typeface="+mn-cs"/>
                 <a:sym typeface="Calibri"/>
               </a:defRPr>
             </a:pPr>
+            <a:endParaRPr/>
           </a:p>
         </p:txBody>
       </p:sp>
@@ -3462,7 +3491,7 @@
         </p:spPr>
         <p:txBody>
           <a:bodyPr lIns="0" tIns="0" rIns="0" bIns="0">
-            <a:normAutofit fontScale="100000" lnSpcReduction="0"/>
+            <a:normAutofit/>
           </a:bodyPr>
           <a:lstStyle/>
           <a:p>
@@ -3476,20 +3505,23 @@
               <a:buSzPct val="100000"/>
               <a:buFont typeface="Arial"/>
               <a:buChar char="•"/>
-              <a:defRPr spc="-100" sz="3200">
+              <a:defRPr sz="3200" spc="-100">
                 <a:latin typeface="+mn-lt"/>
                 <a:ea typeface="+mn-ea"/>
                 <a:cs typeface="+mn-cs"/>
                 <a:sym typeface="Calibri"/>
               </a:defRPr>
             </a:pPr>
+            <a:endParaRPr/>
           </a:p>
         </p:txBody>
       </p:sp>
       <p:sp>
         <p:nvSpPr>
           <p:cNvPr id="303" name="PlaceHolder 7"/>
-          <p:cNvSpPr/>
+          <p:cNvSpPr>
+            <a:spLocks noGrp="1"/>
+          </p:cNvSpPr>
           <p:nvPr>
             <p:ph type="body" sz="quarter" idx="21"/>
           </p:nvPr>
@@ -3505,20 +3537,23 @@
         </p:spPr>
         <p:txBody>
           <a:bodyPr lIns="0" tIns="0" rIns="0" bIns="0">
-            <a:normAutofit fontScale="100000" lnSpcReduction="0"/>
+            <a:normAutofit/>
           </a:bodyPr>
           <a:lstStyle/>
           <a:p>
             <a:pPr>
               <a:defRPr spc="-100"/>
             </a:pPr>
+            <a:endParaRPr/>
           </a:p>
         </p:txBody>
       </p:sp>
       <p:sp>
         <p:nvSpPr>
           <p:cNvPr id="304" name="Slide Number"/>
-          <p:cNvSpPr txBox="1"/>
+          <p:cNvSpPr txBox="1">
+            <a:spLocks noGrp="1"/>
+          </p:cNvSpPr>
           <p:nvPr>
             <p:ph type="sldNum" sz="quarter" idx="2"/>
           </p:nvPr>
@@ -3532,8 +3567,10 @@
           <a:bodyPr/>
           <a:lstStyle/>
           <a:p>
-            <a:pPr/>
-            <a:fld id="{86CB4B4D-7CA3-9044-876B-883B54F8677D}" type="slidenum"/>
+            <a:fld id="{86CB4B4D-7CA3-9044-876B-883B54F8677D}" type="slidenum">
+              <a:t>‹#›</a:t>
+            </a:fld>
+            <a:endParaRPr/>
           </a:p>
         </p:txBody>
       </p:sp>
@@ -3542,12 +3579,12 @@
   <p:clrMapOvr>
     <a:masterClrMapping/>
   </p:clrMapOvr>
-  <p:transition xmlns:p14="http://schemas.microsoft.com/office/powerpoint/2010/main" spd="med" advClick="1"/>
+  <p:transition spd="med"/>
 </p:sldLayout>
 </file>
 
 <file path=ppt/slideLayouts/slideLayout2.xml><?xml version="1.0" encoding="utf-8"?>
-<p:sldLayout xmlns:a="http://schemas.openxmlformats.org/drawingml/2006/main" xmlns:r="http://schemas.openxmlformats.org/officeDocument/2006/relationships" xmlns:p="http://schemas.openxmlformats.org/presentationml/2006/main" xmlns:m="http://schemas.openxmlformats.org/officeDocument/2006/math" xmlns:a14="http://schemas.microsoft.com/office/drawing/2010/main" type="tx" showMasterSp="0" showMasterPhAnim="1">
+<p:sldLayout xmlns:a="http://schemas.openxmlformats.org/drawingml/2006/main" xmlns:r="http://schemas.openxmlformats.org/officeDocument/2006/relationships" xmlns:p="http://schemas.openxmlformats.org/presentationml/2006/main" showMasterSp="0" type="tx">
   <p:cSld name="Title Slide">
     <p:spTree>
       <p:nvGrpSpPr>
@@ -3588,7 +3625,7 @@
           <a:bodyPr lIns="45719" rIns="45719"/>
           <a:lstStyle/>
           <a:p>
-            <a:pPr/>
+            <a:endParaRPr/>
           </a:p>
         </p:txBody>
       </p:sp>
@@ -3617,7 +3654,7 @@
           <a:bodyPr lIns="45719" rIns="45719"/>
           <a:lstStyle/>
           <a:p>
-            <a:pPr/>
+            <a:endParaRPr/>
           </a:p>
         </p:txBody>
       </p:sp>
@@ -3630,10 +3667,8 @@
           <p:nvPr/>
         </p:nvPicPr>
         <p:blipFill>
-          <a:blip r:embed="rId2">
-            <a:extLst/>
-          </a:blip>
-          <a:srcRect l="0" t="0" r="0" b="10718"/>
+          <a:blip r:embed="rId2"/>
+          <a:srcRect b="10718"/>
           <a:stretch>
             <a:fillRect/>
           </a:stretch>
@@ -3660,10 +3695,8 @@
           <p:nvPr/>
         </p:nvPicPr>
         <p:blipFill>
-          <a:blip r:embed="rId2">
-            <a:extLst/>
-          </a:blip>
-          <a:srcRect l="0" t="0" r="0" b="10718"/>
+          <a:blip r:embed="rId2"/>
+          <a:srcRect b="10718"/>
           <a:stretch>
             <a:fillRect/>
           </a:stretch>
@@ -3724,7 +3757,7 @@
             </a:bodyPr>
             <a:lstStyle/>
             <a:p>
-              <a:pPr/>
+              <a:endParaRPr/>
             </a:p>
           </p:txBody>
         </p:sp>
@@ -3737,10 +3770,8 @@
             <p:nvPr/>
           </p:nvPicPr>
           <p:blipFill>
-            <a:blip r:embed="rId2">
-              <a:extLst/>
-            </a:blip>
-            <a:srcRect l="0" t="0" r="0" b="10718"/>
+            <a:blip r:embed="rId2"/>
+            <a:srcRect b="10718"/>
             <a:stretch>
               <a:fillRect/>
             </a:stretch>
@@ -3789,7 +3820,7 @@
             </a:bodyPr>
             <a:lstStyle/>
             <a:p>
-              <a:pPr/>
+              <a:endParaRPr/>
             </a:p>
           </p:txBody>
         </p:sp>
@@ -3803,9 +3834,7 @@
           <p:nvPr/>
         </p:nvPicPr>
         <p:blipFill>
-          <a:blip r:embed="rId3">
-            <a:extLst/>
-          </a:blip>
+          <a:blip r:embed="rId3"/>
           <a:stretch>
             <a:fillRect/>
           </a:stretch>
@@ -3832,10 +3861,8 @@
           <p:nvPr/>
         </p:nvPicPr>
         <p:blipFill>
-          <a:blip r:embed="rId2">
-            <a:extLst/>
-          </a:blip>
-          <a:srcRect l="0" t="0" r="0" b="10718"/>
+          <a:blip r:embed="rId2"/>
+          <a:srcRect b="10718"/>
           <a:stretch>
             <a:fillRect/>
           </a:stretch>
@@ -3896,7 +3923,7 @@
             </a:bodyPr>
             <a:lstStyle/>
             <a:p>
-              <a:pPr/>
+              <a:endParaRPr/>
             </a:p>
           </p:txBody>
         </p:sp>
@@ -3909,10 +3936,8 @@
             <p:nvPr/>
           </p:nvPicPr>
           <p:blipFill>
-            <a:blip r:embed="rId2">
-              <a:extLst/>
-            </a:blip>
-            <a:srcRect l="0" t="0" r="0" b="10718"/>
+            <a:blip r:embed="rId2"/>
+            <a:srcRect b="10718"/>
             <a:stretch>
               <a:fillRect/>
             </a:stretch>
@@ -3961,7 +3986,7 @@
             </a:bodyPr>
             <a:lstStyle/>
             <a:p>
-              <a:pPr/>
+              <a:endParaRPr/>
             </a:p>
           </p:txBody>
         </p:sp>
@@ -3975,9 +4000,7 @@
           <p:nvPr/>
         </p:nvPicPr>
         <p:blipFill>
-          <a:blip r:embed="rId3">
-            <a:extLst/>
-          </a:blip>
+          <a:blip r:embed="rId3"/>
           <a:stretch>
             <a:fillRect/>
           </a:stretch>
@@ -3998,7 +4021,9 @@
       <p:sp>
         <p:nvSpPr>
           <p:cNvPr id="48" name="Title Text"/>
-          <p:cNvSpPr txBox="1"/>
+          <p:cNvSpPr txBox="1">
+            <a:spLocks noGrp="1"/>
+          </p:cNvSpPr>
           <p:nvPr>
             <p:ph type="title"/>
           </p:nvPr>
@@ -4014,11 +4039,10 @@
         </p:spPr>
         <p:txBody>
           <a:bodyPr lIns="0" tIns="0" rIns="0" bIns="0">
-            <a:normAutofit fontScale="100000" lnSpcReduction="0"/>
+            <a:normAutofit/>
           </a:bodyPr>
           <a:lstStyle/>
           <a:p>
-            <a:pPr/>
             <a:r>
               <a:t>Title Text</a:t>
             </a:r>
@@ -4028,7 +4052,9 @@
       <p:sp>
         <p:nvSpPr>
           <p:cNvPr id="49" name="Body Level One…"/>
-          <p:cNvSpPr txBox="1"/>
+          <p:cNvSpPr txBox="1">
+            <a:spLocks noGrp="1"/>
+          </p:cNvSpPr>
           <p:nvPr>
             <p:ph type="body" idx="1"/>
           </p:nvPr>
@@ -4044,11 +4070,10 @@
         </p:spPr>
         <p:txBody>
           <a:bodyPr lIns="0" tIns="0" rIns="0" bIns="0" anchor="ctr">
-            <a:normAutofit fontScale="100000" lnSpcReduction="0"/>
+            <a:normAutofit/>
           </a:bodyPr>
           <a:lstStyle/>
           <a:p>
-            <a:pPr/>
             <a:r>
               <a:t>Body Level One</a:t>
             </a:r>
@@ -4082,7 +4107,9 @@
       <p:sp>
         <p:nvSpPr>
           <p:cNvPr id="50" name="Slide Number"/>
-          <p:cNvSpPr txBox="1"/>
+          <p:cNvSpPr txBox="1">
+            <a:spLocks noGrp="1"/>
+          </p:cNvSpPr>
           <p:nvPr>
             <p:ph type="sldNum" sz="quarter" idx="2"/>
           </p:nvPr>
@@ -4096,8 +4123,10 @@
           <a:bodyPr/>
           <a:lstStyle/>
           <a:p>
-            <a:pPr/>
-            <a:fld id="{86CB4B4D-7CA3-9044-876B-883B54F8677D}" type="slidenum"/>
+            <a:fld id="{86CB4B4D-7CA3-9044-876B-883B54F8677D}" type="slidenum">
+              <a:t>‹#›</a:t>
+            </a:fld>
+            <a:endParaRPr/>
           </a:p>
         </p:txBody>
       </p:sp>
@@ -4106,12 +4135,12 @@
   <p:clrMapOvr>
     <a:masterClrMapping/>
   </p:clrMapOvr>
-  <p:transition xmlns:p14="http://schemas.microsoft.com/office/powerpoint/2010/main" spd="med" advClick="1"/>
+  <p:transition spd="med"/>
 </p:sldLayout>
 </file>
 
 <file path=ppt/slideLayouts/slideLayout3.xml><?xml version="1.0" encoding="utf-8"?>
-<p:sldLayout xmlns:a="http://schemas.openxmlformats.org/drawingml/2006/main" xmlns:r="http://schemas.openxmlformats.org/officeDocument/2006/relationships" xmlns:p="http://schemas.openxmlformats.org/presentationml/2006/main" xmlns:m="http://schemas.openxmlformats.org/officeDocument/2006/math" xmlns:a14="http://schemas.microsoft.com/office/drawing/2010/main" type="tx" showMasterSp="0" showMasterPhAnim="1">
+<p:sldLayout xmlns:a="http://schemas.openxmlformats.org/drawingml/2006/main" xmlns:r="http://schemas.openxmlformats.org/officeDocument/2006/relationships" xmlns:p="http://schemas.openxmlformats.org/presentationml/2006/main" showMasterSp="0" type="tx">
   <p:cSld name="Title, Content">
     <p:spTree>
       <p:nvGrpSpPr>
@@ -4152,7 +4181,7 @@
           <a:bodyPr lIns="45719" rIns="45719"/>
           <a:lstStyle/>
           <a:p>
-            <a:pPr/>
+            <a:endParaRPr/>
           </a:p>
         </p:txBody>
       </p:sp>
@@ -4181,7 +4210,7 @@
           <a:bodyPr lIns="45719" rIns="45719"/>
           <a:lstStyle/>
           <a:p>
-            <a:pPr/>
+            <a:endParaRPr/>
           </a:p>
         </p:txBody>
       </p:sp>
@@ -4194,10 +4223,8 @@
           <p:nvPr/>
         </p:nvPicPr>
         <p:blipFill>
-          <a:blip r:embed="rId2">
-            <a:extLst/>
-          </a:blip>
-          <a:srcRect l="0" t="0" r="0" b="10718"/>
+          <a:blip r:embed="rId2"/>
+          <a:srcRect b="10718"/>
           <a:stretch>
             <a:fillRect/>
           </a:stretch>
@@ -4224,10 +4251,8 @@
           <p:nvPr/>
         </p:nvPicPr>
         <p:blipFill>
-          <a:blip r:embed="rId2">
-            <a:extLst/>
-          </a:blip>
-          <a:srcRect l="0" t="0" r="0" b="10718"/>
+          <a:blip r:embed="rId2"/>
+          <a:srcRect b="10718"/>
           <a:stretch>
             <a:fillRect/>
           </a:stretch>
@@ -4288,7 +4313,7 @@
             </a:bodyPr>
             <a:lstStyle/>
             <a:p>
-              <a:pPr/>
+              <a:endParaRPr/>
             </a:p>
           </p:txBody>
         </p:sp>
@@ -4301,10 +4326,8 @@
             <p:nvPr/>
           </p:nvPicPr>
           <p:blipFill>
-            <a:blip r:embed="rId2">
-              <a:extLst/>
-            </a:blip>
-            <a:srcRect l="0" t="0" r="0" b="10718"/>
+            <a:blip r:embed="rId2"/>
+            <a:srcRect b="10718"/>
             <a:stretch>
               <a:fillRect/>
             </a:stretch>
@@ -4353,7 +4376,7 @@
             </a:bodyPr>
             <a:lstStyle/>
             <a:p>
-              <a:pPr/>
+              <a:endParaRPr/>
             </a:p>
           </p:txBody>
         </p:sp>
@@ -4367,9 +4390,7 @@
           <p:nvPr/>
         </p:nvPicPr>
         <p:blipFill>
-          <a:blip r:embed="rId3">
-            <a:extLst/>
-          </a:blip>
+          <a:blip r:embed="rId3"/>
           <a:stretch>
             <a:fillRect/>
           </a:stretch>
@@ -4396,10 +4417,8 @@
           <p:nvPr/>
         </p:nvPicPr>
         <p:blipFill>
-          <a:blip r:embed="rId2">
-            <a:extLst/>
-          </a:blip>
-          <a:srcRect l="0" t="0" r="0" b="10718"/>
+          <a:blip r:embed="rId2"/>
+          <a:srcRect b="10718"/>
           <a:stretch>
             <a:fillRect/>
           </a:stretch>
@@ -4460,7 +4479,7 @@
             </a:bodyPr>
             <a:lstStyle/>
             <a:p>
-              <a:pPr/>
+              <a:endParaRPr/>
             </a:p>
           </p:txBody>
         </p:sp>
@@ -4473,10 +4492,8 @@
             <p:nvPr/>
           </p:nvPicPr>
           <p:blipFill>
-            <a:blip r:embed="rId2">
-              <a:extLst/>
-            </a:blip>
-            <a:srcRect l="0" t="0" r="0" b="10718"/>
+            <a:blip r:embed="rId2"/>
+            <a:srcRect b="10718"/>
             <a:stretch>
               <a:fillRect/>
             </a:stretch>
@@ -4525,7 +4542,7 @@
             </a:bodyPr>
             <a:lstStyle/>
             <a:p>
-              <a:pPr/>
+              <a:endParaRPr/>
             </a:p>
           </p:txBody>
         </p:sp>
@@ -4539,9 +4556,7 @@
           <p:nvPr/>
         </p:nvPicPr>
         <p:blipFill>
-          <a:blip r:embed="rId3">
-            <a:extLst/>
-          </a:blip>
+          <a:blip r:embed="rId3"/>
           <a:stretch>
             <a:fillRect/>
           </a:stretch>
@@ -4562,7 +4577,9 @@
       <p:sp>
         <p:nvSpPr>
           <p:cNvPr id="72" name="Title Text"/>
-          <p:cNvSpPr txBox="1"/>
+          <p:cNvSpPr txBox="1">
+            <a:spLocks noGrp="1"/>
+          </p:cNvSpPr>
           <p:nvPr>
             <p:ph type="title"/>
           </p:nvPr>
@@ -4578,11 +4595,10 @@
         </p:spPr>
         <p:txBody>
           <a:bodyPr lIns="0" tIns="0" rIns="0" bIns="0">
-            <a:normAutofit fontScale="100000" lnSpcReduction="0"/>
+            <a:normAutofit/>
           </a:bodyPr>
           <a:lstStyle/>
           <a:p>
-            <a:pPr/>
             <a:r>
               <a:t>Title Text</a:t>
             </a:r>
@@ -4592,7 +4608,9 @@
       <p:sp>
         <p:nvSpPr>
           <p:cNvPr id="73" name="Body Level One…"/>
-          <p:cNvSpPr txBox="1"/>
+          <p:cNvSpPr txBox="1">
+            <a:spLocks noGrp="1"/>
+          </p:cNvSpPr>
           <p:nvPr>
             <p:ph type="body" idx="1"/>
           </p:nvPr>
@@ -4608,11 +4626,10 @@
         </p:spPr>
         <p:txBody>
           <a:bodyPr lIns="0" tIns="0" rIns="0" bIns="0">
-            <a:normAutofit fontScale="100000" lnSpcReduction="0"/>
+            <a:normAutofit/>
           </a:bodyPr>
           <a:lstStyle/>
           <a:p>
-            <a:pPr/>
             <a:r>
               <a:t>Body Level One</a:t>
             </a:r>
@@ -4646,7 +4663,9 @@
       <p:sp>
         <p:nvSpPr>
           <p:cNvPr id="74" name="Slide Number"/>
-          <p:cNvSpPr txBox="1"/>
+          <p:cNvSpPr txBox="1">
+            <a:spLocks noGrp="1"/>
+          </p:cNvSpPr>
           <p:nvPr>
             <p:ph type="sldNum" sz="quarter" idx="2"/>
           </p:nvPr>
@@ -4660,8 +4679,10 @@
           <a:bodyPr/>
           <a:lstStyle/>
           <a:p>
-            <a:pPr/>
-            <a:fld id="{86CB4B4D-7CA3-9044-876B-883B54F8677D}" type="slidenum"/>
+            <a:fld id="{86CB4B4D-7CA3-9044-876B-883B54F8677D}" type="slidenum">
+              <a:t>‹#›</a:t>
+            </a:fld>
+            <a:endParaRPr/>
           </a:p>
         </p:txBody>
       </p:sp>
@@ -4670,12 +4691,12 @@
   <p:clrMapOvr>
     <a:masterClrMapping/>
   </p:clrMapOvr>
-  <p:transition xmlns:p14="http://schemas.microsoft.com/office/powerpoint/2010/main" spd="med" advClick="1"/>
+  <p:transition spd="med"/>
 </p:sldLayout>
 </file>
 
 <file path=ppt/slideLayouts/slideLayout4.xml><?xml version="1.0" encoding="utf-8"?>
-<p:sldLayout xmlns:a="http://schemas.openxmlformats.org/drawingml/2006/main" xmlns:r="http://schemas.openxmlformats.org/officeDocument/2006/relationships" xmlns:p="http://schemas.openxmlformats.org/presentationml/2006/main" xmlns:m="http://schemas.openxmlformats.org/officeDocument/2006/math" xmlns:a14="http://schemas.microsoft.com/office/drawing/2010/main" type="tx" showMasterSp="0" showMasterPhAnim="1">
+<p:sldLayout xmlns:a="http://schemas.openxmlformats.org/drawingml/2006/main" xmlns:r="http://schemas.openxmlformats.org/officeDocument/2006/relationships" xmlns:p="http://schemas.openxmlformats.org/presentationml/2006/main" showMasterSp="0" type="tx">
   <p:cSld name="Title, 2 Content">
     <p:spTree>
       <p:nvGrpSpPr>
@@ -4716,7 +4737,7 @@
           <a:bodyPr lIns="45719" rIns="45719"/>
           <a:lstStyle/>
           <a:p>
-            <a:pPr/>
+            <a:endParaRPr/>
           </a:p>
         </p:txBody>
       </p:sp>
@@ -4745,7 +4766,7 @@
           <a:bodyPr lIns="45719" rIns="45719"/>
           <a:lstStyle/>
           <a:p>
-            <a:pPr/>
+            <a:endParaRPr/>
           </a:p>
         </p:txBody>
       </p:sp>
@@ -4758,10 +4779,8 @@
           <p:nvPr/>
         </p:nvPicPr>
         <p:blipFill>
-          <a:blip r:embed="rId2">
-            <a:extLst/>
-          </a:blip>
-          <a:srcRect l="0" t="0" r="0" b="10718"/>
+          <a:blip r:embed="rId2"/>
+          <a:srcRect b="10718"/>
           <a:stretch>
             <a:fillRect/>
           </a:stretch>
@@ -4788,10 +4807,8 @@
           <p:nvPr/>
         </p:nvPicPr>
         <p:blipFill>
-          <a:blip r:embed="rId2">
-            <a:extLst/>
-          </a:blip>
-          <a:srcRect l="0" t="0" r="0" b="10718"/>
+          <a:blip r:embed="rId2"/>
+          <a:srcRect b="10718"/>
           <a:stretch>
             <a:fillRect/>
           </a:stretch>
@@ -4852,7 +4869,7 @@
             </a:bodyPr>
             <a:lstStyle/>
             <a:p>
-              <a:pPr/>
+              <a:endParaRPr/>
             </a:p>
           </p:txBody>
         </p:sp>
@@ -4865,10 +4882,8 @@
             <p:nvPr/>
           </p:nvPicPr>
           <p:blipFill>
-            <a:blip r:embed="rId2">
-              <a:extLst/>
-            </a:blip>
-            <a:srcRect l="0" t="0" r="0" b="10718"/>
+            <a:blip r:embed="rId2"/>
+            <a:srcRect b="10718"/>
             <a:stretch>
               <a:fillRect/>
             </a:stretch>
@@ -4917,7 +4932,7 @@
             </a:bodyPr>
             <a:lstStyle/>
             <a:p>
-              <a:pPr/>
+              <a:endParaRPr/>
             </a:p>
           </p:txBody>
         </p:sp>
@@ -4931,9 +4946,7 @@
           <p:nvPr/>
         </p:nvPicPr>
         <p:blipFill>
-          <a:blip r:embed="rId3">
-            <a:extLst/>
-          </a:blip>
+          <a:blip r:embed="rId3"/>
           <a:stretch>
             <a:fillRect/>
           </a:stretch>
@@ -4960,10 +4973,8 @@
           <p:nvPr/>
         </p:nvPicPr>
         <p:blipFill>
-          <a:blip r:embed="rId2">
-            <a:extLst/>
-          </a:blip>
-          <a:srcRect l="0" t="0" r="0" b="10718"/>
+          <a:blip r:embed="rId2"/>
+          <a:srcRect b="10718"/>
           <a:stretch>
             <a:fillRect/>
           </a:stretch>
@@ -5024,7 +5035,7 @@
             </a:bodyPr>
             <a:lstStyle/>
             <a:p>
-              <a:pPr/>
+              <a:endParaRPr/>
             </a:p>
           </p:txBody>
         </p:sp>
@@ -5037,10 +5048,8 @@
             <p:nvPr/>
           </p:nvPicPr>
           <p:blipFill>
-            <a:blip r:embed="rId2">
-              <a:extLst/>
-            </a:blip>
-            <a:srcRect l="0" t="0" r="0" b="10718"/>
+            <a:blip r:embed="rId2"/>
+            <a:srcRect b="10718"/>
             <a:stretch>
               <a:fillRect/>
             </a:stretch>
@@ -5089,7 +5098,7 @@
             </a:bodyPr>
             <a:lstStyle/>
             <a:p>
-              <a:pPr/>
+              <a:endParaRPr/>
             </a:p>
           </p:txBody>
         </p:sp>
@@ -5103,9 +5112,7 @@
           <p:nvPr/>
         </p:nvPicPr>
         <p:blipFill>
-          <a:blip r:embed="rId3">
-            <a:extLst/>
-          </a:blip>
+          <a:blip r:embed="rId3"/>
           <a:stretch>
             <a:fillRect/>
           </a:stretch>
@@ -5126,7 +5133,9 @@
       <p:sp>
         <p:nvSpPr>
           <p:cNvPr id="96" name="Title Text"/>
-          <p:cNvSpPr txBox="1"/>
+          <p:cNvSpPr txBox="1">
+            <a:spLocks noGrp="1"/>
+          </p:cNvSpPr>
           <p:nvPr>
             <p:ph type="title"/>
           </p:nvPr>
@@ -5142,11 +5151,10 @@
         </p:spPr>
         <p:txBody>
           <a:bodyPr lIns="0" tIns="0" rIns="0" bIns="0">
-            <a:normAutofit fontScale="100000" lnSpcReduction="0"/>
+            <a:normAutofit/>
           </a:bodyPr>
           <a:lstStyle/>
           <a:p>
-            <a:pPr/>
             <a:r>
               <a:t>Title Text</a:t>
             </a:r>
@@ -5156,7 +5164,9 @@
       <p:sp>
         <p:nvSpPr>
           <p:cNvPr id="97" name="Body Level One…"/>
-          <p:cNvSpPr txBox="1"/>
+          <p:cNvSpPr txBox="1">
+            <a:spLocks noGrp="1"/>
+          </p:cNvSpPr>
           <p:nvPr>
             <p:ph type="body" sz="half" idx="1"/>
           </p:nvPr>
@@ -5172,11 +5182,10 @@
         </p:spPr>
         <p:txBody>
           <a:bodyPr lIns="0" tIns="0" rIns="0" bIns="0">
-            <a:normAutofit fontScale="100000" lnSpcReduction="0"/>
+            <a:normAutofit/>
           </a:bodyPr>
           <a:lstStyle/>
           <a:p>
-            <a:pPr/>
             <a:r>
               <a:t>Body Level One</a:t>
             </a:r>
@@ -5210,7 +5219,9 @@
       <p:sp>
         <p:nvSpPr>
           <p:cNvPr id="98" name="PlaceHolder 3"/>
-          <p:cNvSpPr/>
+          <p:cNvSpPr>
+            <a:spLocks noGrp="1"/>
+          </p:cNvSpPr>
           <p:nvPr>
             <p:ph type="body" sz="half" idx="21"/>
           </p:nvPr>
@@ -5226,20 +5237,23 @@
         </p:spPr>
         <p:txBody>
           <a:bodyPr lIns="0" tIns="0" rIns="0" bIns="0">
-            <a:normAutofit fontScale="100000" lnSpcReduction="0"/>
+            <a:normAutofit/>
           </a:bodyPr>
           <a:lstStyle/>
           <a:p>
             <a:pPr>
               <a:defRPr spc="-100"/>
             </a:pPr>
+            <a:endParaRPr/>
           </a:p>
         </p:txBody>
       </p:sp>
       <p:sp>
         <p:nvSpPr>
           <p:cNvPr id="99" name="Slide Number"/>
-          <p:cNvSpPr txBox="1"/>
+          <p:cNvSpPr txBox="1">
+            <a:spLocks noGrp="1"/>
+          </p:cNvSpPr>
           <p:nvPr>
             <p:ph type="sldNum" sz="quarter" idx="2"/>
           </p:nvPr>
@@ -5253,8 +5267,10 @@
           <a:bodyPr/>
           <a:lstStyle/>
           <a:p>
-            <a:pPr/>
-            <a:fld id="{86CB4B4D-7CA3-9044-876B-883B54F8677D}" type="slidenum"/>
+            <a:fld id="{86CB4B4D-7CA3-9044-876B-883B54F8677D}" type="slidenum">
+              <a:t>‹#›</a:t>
+            </a:fld>
+            <a:endParaRPr/>
           </a:p>
         </p:txBody>
       </p:sp>
@@ -5263,12 +5279,12 @@
   <p:clrMapOvr>
     <a:masterClrMapping/>
   </p:clrMapOvr>
-  <p:transition xmlns:p14="http://schemas.microsoft.com/office/powerpoint/2010/main" spd="med" advClick="1"/>
+  <p:transition spd="med"/>
 </p:sldLayout>
 </file>
 
 <file path=ppt/slideLayouts/slideLayout5.xml><?xml version="1.0" encoding="utf-8"?>
-<p:sldLayout xmlns:a="http://schemas.openxmlformats.org/drawingml/2006/main" xmlns:r="http://schemas.openxmlformats.org/officeDocument/2006/relationships" xmlns:p="http://schemas.openxmlformats.org/presentationml/2006/main" xmlns:m="http://schemas.openxmlformats.org/officeDocument/2006/math" xmlns:a14="http://schemas.microsoft.com/office/drawing/2010/main" type="tx" showMasterSp="0" showMasterPhAnim="1">
+<p:sldLayout xmlns:a="http://schemas.openxmlformats.org/drawingml/2006/main" xmlns:r="http://schemas.openxmlformats.org/officeDocument/2006/relationships" xmlns:p="http://schemas.openxmlformats.org/presentationml/2006/main" showMasterSp="0" type="tx">
   <p:cSld name="Title Only">
     <p:spTree>
       <p:nvGrpSpPr>
@@ -5309,7 +5325,7 @@
           <a:bodyPr lIns="45719" rIns="45719"/>
           <a:lstStyle/>
           <a:p>
-            <a:pPr/>
+            <a:endParaRPr/>
           </a:p>
         </p:txBody>
       </p:sp>
@@ -5338,7 +5354,7 @@
           <a:bodyPr lIns="45719" rIns="45719"/>
           <a:lstStyle/>
           <a:p>
-            <a:pPr/>
+            <a:endParaRPr/>
           </a:p>
         </p:txBody>
       </p:sp>
@@ -5351,10 +5367,8 @@
           <p:nvPr/>
         </p:nvPicPr>
         <p:blipFill>
-          <a:blip r:embed="rId2">
-            <a:extLst/>
-          </a:blip>
-          <a:srcRect l="0" t="0" r="0" b="10718"/>
+          <a:blip r:embed="rId2"/>
+          <a:srcRect b="10718"/>
           <a:stretch>
             <a:fillRect/>
           </a:stretch>
@@ -5381,10 +5395,8 @@
           <p:nvPr/>
         </p:nvPicPr>
         <p:blipFill>
-          <a:blip r:embed="rId2">
-            <a:extLst/>
-          </a:blip>
-          <a:srcRect l="0" t="0" r="0" b="10718"/>
+          <a:blip r:embed="rId2"/>
+          <a:srcRect b="10718"/>
           <a:stretch>
             <a:fillRect/>
           </a:stretch>
@@ -5445,7 +5457,7 @@
             </a:bodyPr>
             <a:lstStyle/>
             <a:p>
-              <a:pPr/>
+              <a:endParaRPr/>
             </a:p>
           </p:txBody>
         </p:sp>
@@ -5458,10 +5470,8 @@
             <p:nvPr/>
           </p:nvPicPr>
           <p:blipFill>
-            <a:blip r:embed="rId2">
-              <a:extLst/>
-            </a:blip>
-            <a:srcRect l="0" t="0" r="0" b="10718"/>
+            <a:blip r:embed="rId2"/>
+            <a:srcRect b="10718"/>
             <a:stretch>
               <a:fillRect/>
             </a:stretch>
@@ -5510,7 +5520,7 @@
             </a:bodyPr>
             <a:lstStyle/>
             <a:p>
-              <a:pPr/>
+              <a:endParaRPr/>
             </a:p>
           </p:txBody>
         </p:sp>
@@ -5524,9 +5534,7 @@
           <p:nvPr/>
         </p:nvPicPr>
         <p:blipFill>
-          <a:blip r:embed="rId3">
-            <a:extLst/>
-          </a:blip>
+          <a:blip r:embed="rId3"/>
           <a:stretch>
             <a:fillRect/>
           </a:stretch>
@@ -5553,10 +5561,8 @@
           <p:nvPr/>
         </p:nvPicPr>
         <p:blipFill>
-          <a:blip r:embed="rId2">
-            <a:extLst/>
-          </a:blip>
-          <a:srcRect l="0" t="0" r="0" b="10718"/>
+          <a:blip r:embed="rId2"/>
+          <a:srcRect b="10718"/>
           <a:stretch>
             <a:fillRect/>
           </a:stretch>
@@ -5617,7 +5623,7 @@
             </a:bodyPr>
             <a:lstStyle/>
             <a:p>
-              <a:pPr/>
+              <a:endParaRPr/>
             </a:p>
           </p:txBody>
         </p:sp>
@@ -5630,10 +5636,8 @@
             <p:nvPr/>
           </p:nvPicPr>
           <p:blipFill>
-            <a:blip r:embed="rId2">
-              <a:extLst/>
-            </a:blip>
-            <a:srcRect l="0" t="0" r="0" b="10718"/>
+            <a:blip r:embed="rId2"/>
+            <a:srcRect b="10718"/>
             <a:stretch>
               <a:fillRect/>
             </a:stretch>
@@ -5682,7 +5686,7 @@
             </a:bodyPr>
             <a:lstStyle/>
             <a:p>
-              <a:pPr/>
+              <a:endParaRPr/>
             </a:p>
           </p:txBody>
         </p:sp>
@@ -5696,9 +5700,7 @@
           <p:nvPr/>
         </p:nvPicPr>
         <p:blipFill>
-          <a:blip r:embed="rId3">
-            <a:extLst/>
-          </a:blip>
+          <a:blip r:embed="rId3"/>
           <a:stretch>
             <a:fillRect/>
           </a:stretch>
@@ -5719,7 +5721,9 @@
       <p:sp>
         <p:nvSpPr>
           <p:cNvPr id="121" name="Title Text"/>
-          <p:cNvSpPr txBox="1"/>
+          <p:cNvSpPr txBox="1">
+            <a:spLocks noGrp="1"/>
+          </p:cNvSpPr>
           <p:nvPr>
             <p:ph type="title"/>
           </p:nvPr>
@@ -5735,11 +5739,10 @@
         </p:spPr>
         <p:txBody>
           <a:bodyPr lIns="0" tIns="0" rIns="0" bIns="0">
-            <a:normAutofit fontScale="100000" lnSpcReduction="0"/>
+            <a:normAutofit/>
           </a:bodyPr>
           <a:lstStyle/>
           <a:p>
-            <a:pPr/>
             <a:r>
               <a:t>Title Text</a:t>
             </a:r>
@@ -5749,7 +5752,9 @@
       <p:sp>
         <p:nvSpPr>
           <p:cNvPr id="122" name="Slide Number"/>
-          <p:cNvSpPr txBox="1"/>
+          <p:cNvSpPr txBox="1">
+            <a:spLocks noGrp="1"/>
+          </p:cNvSpPr>
           <p:nvPr>
             <p:ph type="sldNum" sz="quarter" idx="2"/>
           </p:nvPr>
@@ -5763,8 +5768,10 @@
           <a:bodyPr/>
           <a:lstStyle/>
           <a:p>
-            <a:pPr/>
-            <a:fld id="{86CB4B4D-7CA3-9044-876B-883B54F8677D}" type="slidenum"/>
+            <a:fld id="{86CB4B4D-7CA3-9044-876B-883B54F8677D}" type="slidenum">
+              <a:t>‹#›</a:t>
+            </a:fld>
+            <a:endParaRPr/>
           </a:p>
         </p:txBody>
       </p:sp>
@@ -5773,12 +5780,12 @@
   <p:clrMapOvr>
     <a:masterClrMapping/>
   </p:clrMapOvr>
-  <p:transition xmlns:p14="http://schemas.microsoft.com/office/powerpoint/2010/main" spd="med" advClick="1"/>
+  <p:transition spd="med"/>
 </p:sldLayout>
 </file>
 
 <file path=ppt/slideLayouts/slideLayout6.xml><?xml version="1.0" encoding="utf-8"?>
-<p:sldLayout xmlns:a="http://schemas.openxmlformats.org/drawingml/2006/main" xmlns:r="http://schemas.openxmlformats.org/officeDocument/2006/relationships" xmlns:p="http://schemas.openxmlformats.org/presentationml/2006/main" xmlns:m="http://schemas.openxmlformats.org/officeDocument/2006/math" xmlns:a14="http://schemas.microsoft.com/office/drawing/2010/main" type="tx" showMasterSp="0" showMasterPhAnim="1">
+<p:sldLayout xmlns:a="http://schemas.openxmlformats.org/drawingml/2006/main" xmlns:r="http://schemas.openxmlformats.org/officeDocument/2006/relationships" xmlns:p="http://schemas.openxmlformats.org/presentationml/2006/main" showMasterSp="0" type="tx">
   <p:cSld name="Centered Text">
     <p:spTree>
       <p:nvGrpSpPr>
@@ -5819,7 +5826,7 @@
           <a:bodyPr lIns="45719" rIns="45719"/>
           <a:lstStyle/>
           <a:p>
-            <a:pPr/>
+            <a:endParaRPr/>
           </a:p>
         </p:txBody>
       </p:sp>
@@ -5848,7 +5855,7 @@
           <a:bodyPr lIns="45719" rIns="45719"/>
           <a:lstStyle/>
           <a:p>
-            <a:pPr/>
+            <a:endParaRPr/>
           </a:p>
         </p:txBody>
       </p:sp>
@@ -5861,10 +5868,8 @@
           <p:nvPr/>
         </p:nvPicPr>
         <p:blipFill>
-          <a:blip r:embed="rId2">
-            <a:extLst/>
-          </a:blip>
-          <a:srcRect l="0" t="0" r="0" b="10718"/>
+          <a:blip r:embed="rId2"/>
+          <a:srcRect b="10718"/>
           <a:stretch>
             <a:fillRect/>
           </a:stretch>
@@ -5891,10 +5896,8 @@
           <p:nvPr/>
         </p:nvPicPr>
         <p:blipFill>
-          <a:blip r:embed="rId2">
-            <a:extLst/>
-          </a:blip>
-          <a:srcRect l="0" t="0" r="0" b="10718"/>
+          <a:blip r:embed="rId2"/>
+          <a:srcRect b="10718"/>
           <a:stretch>
             <a:fillRect/>
           </a:stretch>
@@ -5955,7 +5958,7 @@
             </a:bodyPr>
             <a:lstStyle/>
             <a:p>
-              <a:pPr/>
+              <a:endParaRPr/>
             </a:p>
           </p:txBody>
         </p:sp>
@@ -5968,10 +5971,8 @@
             <p:nvPr/>
           </p:nvPicPr>
           <p:blipFill>
-            <a:blip r:embed="rId2">
-              <a:extLst/>
-            </a:blip>
-            <a:srcRect l="0" t="0" r="0" b="10718"/>
+            <a:blip r:embed="rId2"/>
+            <a:srcRect b="10718"/>
             <a:stretch>
               <a:fillRect/>
             </a:stretch>
@@ -6020,7 +6021,7 @@
             </a:bodyPr>
             <a:lstStyle/>
             <a:p>
-              <a:pPr/>
+              <a:endParaRPr/>
             </a:p>
           </p:txBody>
         </p:sp>
@@ -6034,9 +6035,7 @@
           <p:nvPr/>
         </p:nvPicPr>
         <p:blipFill>
-          <a:blip r:embed="rId3">
-            <a:extLst/>
-          </a:blip>
+          <a:blip r:embed="rId3"/>
           <a:stretch>
             <a:fillRect/>
           </a:stretch>
@@ -6063,10 +6062,8 @@
           <p:nvPr/>
         </p:nvPicPr>
         <p:blipFill>
-          <a:blip r:embed="rId2">
-            <a:extLst/>
-          </a:blip>
-          <a:srcRect l="0" t="0" r="0" b="10718"/>
+          <a:blip r:embed="rId2"/>
+          <a:srcRect b="10718"/>
           <a:stretch>
             <a:fillRect/>
           </a:stretch>
@@ -6127,7 +6124,7 @@
             </a:bodyPr>
             <a:lstStyle/>
             <a:p>
-              <a:pPr/>
+              <a:endParaRPr/>
             </a:p>
           </p:txBody>
         </p:sp>
@@ -6140,10 +6137,8 @@
             <p:nvPr/>
           </p:nvPicPr>
           <p:blipFill>
-            <a:blip r:embed="rId2">
-              <a:extLst/>
-            </a:blip>
-            <a:srcRect l="0" t="0" r="0" b="10718"/>
+            <a:blip r:embed="rId2"/>
+            <a:srcRect b="10718"/>
             <a:stretch>
               <a:fillRect/>
             </a:stretch>
@@ -6192,7 +6187,7 @@
             </a:bodyPr>
             <a:lstStyle/>
             <a:p>
-              <a:pPr/>
+              <a:endParaRPr/>
             </a:p>
           </p:txBody>
         </p:sp>
@@ -6206,9 +6201,7 @@
           <p:nvPr/>
         </p:nvPicPr>
         <p:blipFill>
-          <a:blip r:embed="rId3">
-            <a:extLst/>
-          </a:blip>
+          <a:blip r:embed="rId3"/>
           <a:stretch>
             <a:fillRect/>
           </a:stretch>
@@ -6229,7 +6222,9 @@
       <p:sp>
         <p:nvSpPr>
           <p:cNvPr id="144" name="Body Level One…"/>
-          <p:cNvSpPr txBox="1"/>
+          <p:cNvSpPr txBox="1">
+            <a:spLocks noGrp="1"/>
+          </p:cNvSpPr>
           <p:nvPr>
             <p:ph type="body" sz="half" idx="1"/>
           </p:nvPr>
@@ -6245,11 +6240,10 @@
         </p:spPr>
         <p:txBody>
           <a:bodyPr lIns="0" tIns="0" rIns="0" bIns="0" anchor="ctr">
-            <a:normAutofit fontScale="100000" lnSpcReduction="0"/>
+            <a:normAutofit/>
           </a:bodyPr>
           <a:lstStyle/>
           <a:p>
-            <a:pPr/>
             <a:r>
               <a:t>Body Level One</a:t>
             </a:r>
@@ -6283,7 +6277,9 @@
       <p:sp>
         <p:nvSpPr>
           <p:cNvPr id="145" name="Slide Number"/>
-          <p:cNvSpPr txBox="1"/>
+          <p:cNvSpPr txBox="1">
+            <a:spLocks noGrp="1"/>
+          </p:cNvSpPr>
           <p:nvPr>
             <p:ph type="sldNum" sz="quarter" idx="2"/>
           </p:nvPr>
@@ -6297,8 +6293,10 @@
           <a:bodyPr/>
           <a:lstStyle/>
           <a:p>
-            <a:pPr/>
-            <a:fld id="{86CB4B4D-7CA3-9044-876B-883B54F8677D}" type="slidenum"/>
+            <a:fld id="{86CB4B4D-7CA3-9044-876B-883B54F8677D}" type="slidenum">
+              <a:t>‹#›</a:t>
+            </a:fld>
+            <a:endParaRPr/>
           </a:p>
         </p:txBody>
       </p:sp>
@@ -6307,12 +6305,12 @@
   <p:clrMapOvr>
     <a:masterClrMapping/>
   </p:clrMapOvr>
-  <p:transition xmlns:p14="http://schemas.microsoft.com/office/powerpoint/2010/main" spd="med" advClick="1"/>
+  <p:transition spd="med"/>
 </p:sldLayout>
 </file>
 
 <file path=ppt/slideLayouts/slideLayout7.xml><?xml version="1.0" encoding="utf-8"?>
-<p:sldLayout xmlns:a="http://schemas.openxmlformats.org/drawingml/2006/main" xmlns:r="http://schemas.openxmlformats.org/officeDocument/2006/relationships" xmlns:p="http://schemas.openxmlformats.org/presentationml/2006/main" xmlns:m="http://schemas.openxmlformats.org/officeDocument/2006/math" xmlns:a14="http://schemas.microsoft.com/office/drawing/2010/main" type="tx" showMasterSp="0" showMasterPhAnim="1">
+<p:sldLayout xmlns:a="http://schemas.openxmlformats.org/drawingml/2006/main" xmlns:r="http://schemas.openxmlformats.org/officeDocument/2006/relationships" xmlns:p="http://schemas.openxmlformats.org/presentationml/2006/main" showMasterSp="0" type="tx">
   <p:cSld name="Title, 2 Content and Content">
     <p:spTree>
       <p:nvGrpSpPr>
@@ -6353,7 +6351,7 @@
           <a:bodyPr lIns="45719" rIns="45719"/>
           <a:lstStyle/>
           <a:p>
-            <a:pPr/>
+            <a:endParaRPr/>
           </a:p>
         </p:txBody>
       </p:sp>
@@ -6382,7 +6380,7 @@
           <a:bodyPr lIns="45719" rIns="45719"/>
           <a:lstStyle/>
           <a:p>
-            <a:pPr/>
+            <a:endParaRPr/>
           </a:p>
         </p:txBody>
       </p:sp>
@@ -6395,10 +6393,8 @@
           <p:nvPr/>
         </p:nvPicPr>
         <p:blipFill>
-          <a:blip r:embed="rId2">
-            <a:extLst/>
-          </a:blip>
-          <a:srcRect l="0" t="0" r="0" b="10718"/>
+          <a:blip r:embed="rId2"/>
+          <a:srcRect b="10718"/>
           <a:stretch>
             <a:fillRect/>
           </a:stretch>
@@ -6425,10 +6421,8 @@
           <p:nvPr/>
         </p:nvPicPr>
         <p:blipFill>
-          <a:blip r:embed="rId2">
-            <a:extLst/>
-          </a:blip>
-          <a:srcRect l="0" t="0" r="0" b="10718"/>
+          <a:blip r:embed="rId2"/>
+          <a:srcRect b="10718"/>
           <a:stretch>
             <a:fillRect/>
           </a:stretch>
@@ -6489,7 +6483,7 @@
             </a:bodyPr>
             <a:lstStyle/>
             <a:p>
-              <a:pPr/>
+              <a:endParaRPr/>
             </a:p>
           </p:txBody>
         </p:sp>
@@ -6502,10 +6496,8 @@
             <p:nvPr/>
           </p:nvPicPr>
           <p:blipFill>
-            <a:blip r:embed="rId2">
-              <a:extLst/>
-            </a:blip>
-            <a:srcRect l="0" t="0" r="0" b="10718"/>
+            <a:blip r:embed="rId2"/>
+            <a:srcRect b="10718"/>
             <a:stretch>
               <a:fillRect/>
             </a:stretch>
@@ -6554,7 +6546,7 @@
             </a:bodyPr>
             <a:lstStyle/>
             <a:p>
-              <a:pPr/>
+              <a:endParaRPr/>
             </a:p>
           </p:txBody>
         </p:sp>
@@ -6568,9 +6560,7 @@
           <p:nvPr/>
         </p:nvPicPr>
         <p:blipFill>
-          <a:blip r:embed="rId3">
-            <a:extLst/>
-          </a:blip>
+          <a:blip r:embed="rId3"/>
           <a:stretch>
             <a:fillRect/>
           </a:stretch>
@@ -6597,10 +6587,8 @@
           <p:nvPr/>
         </p:nvPicPr>
         <p:blipFill>
-          <a:blip r:embed="rId2">
-            <a:extLst/>
-          </a:blip>
-          <a:srcRect l="0" t="0" r="0" b="10718"/>
+          <a:blip r:embed="rId2"/>
+          <a:srcRect b="10718"/>
           <a:stretch>
             <a:fillRect/>
           </a:stretch>
@@ -6661,7 +6649,7 @@
             </a:bodyPr>
             <a:lstStyle/>
             <a:p>
-              <a:pPr/>
+              <a:endParaRPr/>
             </a:p>
           </p:txBody>
         </p:sp>
@@ -6674,10 +6662,8 @@
             <p:nvPr/>
           </p:nvPicPr>
           <p:blipFill>
-            <a:blip r:embed="rId2">
-              <a:extLst/>
-            </a:blip>
-            <a:srcRect l="0" t="0" r="0" b="10718"/>
+            <a:blip r:embed="rId2"/>
+            <a:srcRect b="10718"/>
             <a:stretch>
               <a:fillRect/>
             </a:stretch>
@@ -6726,7 +6712,7 @@
             </a:bodyPr>
             <a:lstStyle/>
             <a:p>
-              <a:pPr/>
+              <a:endParaRPr/>
             </a:p>
           </p:txBody>
         </p:sp>
@@ -6740,9 +6726,7 @@
           <p:nvPr/>
         </p:nvPicPr>
         <p:blipFill>
-          <a:blip r:embed="rId3">
-            <a:extLst/>
-          </a:blip>
+          <a:blip r:embed="rId3"/>
           <a:stretch>
             <a:fillRect/>
           </a:stretch>
@@ -6763,7 +6747,9 @@
       <p:sp>
         <p:nvSpPr>
           <p:cNvPr id="167" name="Title Text"/>
-          <p:cNvSpPr txBox="1"/>
+          <p:cNvSpPr txBox="1">
+            <a:spLocks noGrp="1"/>
+          </p:cNvSpPr>
           <p:nvPr>
             <p:ph type="title"/>
           </p:nvPr>
@@ -6779,11 +6765,10 @@
         </p:spPr>
         <p:txBody>
           <a:bodyPr lIns="0" tIns="0" rIns="0" bIns="0">
-            <a:normAutofit fontScale="100000" lnSpcReduction="0"/>
+            <a:normAutofit/>
           </a:bodyPr>
           <a:lstStyle/>
           <a:p>
-            <a:pPr/>
             <a:r>
               <a:t>Title Text</a:t>
             </a:r>
@@ -6793,7 +6778,9 @@
       <p:sp>
         <p:nvSpPr>
           <p:cNvPr id="168" name="Body Level One…"/>
-          <p:cNvSpPr txBox="1"/>
+          <p:cNvSpPr txBox="1">
+            <a:spLocks noGrp="1"/>
+          </p:cNvSpPr>
           <p:nvPr>
             <p:ph type="body" sz="quarter" idx="1"/>
           </p:nvPr>
@@ -6809,11 +6796,10 @@
         </p:spPr>
         <p:txBody>
           <a:bodyPr lIns="0" tIns="0" rIns="0" bIns="0">
-            <a:normAutofit fontScale="100000" lnSpcReduction="0"/>
+            <a:normAutofit/>
           </a:bodyPr>
           <a:lstStyle/>
           <a:p>
-            <a:pPr/>
             <a:r>
               <a:t>Body Level One</a:t>
             </a:r>
@@ -6864,7 +6850,7 @@
         </p:spPr>
         <p:txBody>
           <a:bodyPr lIns="0" tIns="0" rIns="0" bIns="0">
-            <a:normAutofit fontScale="100000" lnSpcReduction="0"/>
+            <a:normAutofit/>
           </a:bodyPr>
           <a:lstStyle/>
           <a:p>
@@ -6878,20 +6864,23 @@
               <a:buSzPct val="100000"/>
               <a:buFont typeface="Arial"/>
               <a:buChar char="•"/>
-              <a:defRPr spc="-100" sz="3200">
+              <a:defRPr sz="3200" spc="-100">
                 <a:latin typeface="+mn-lt"/>
                 <a:ea typeface="+mn-ea"/>
                 <a:cs typeface="+mn-cs"/>
                 <a:sym typeface="Calibri"/>
               </a:defRPr>
             </a:pPr>
+            <a:endParaRPr/>
           </a:p>
         </p:txBody>
       </p:sp>
       <p:sp>
         <p:nvSpPr>
           <p:cNvPr id="170" name="PlaceHolder 4"/>
-          <p:cNvSpPr/>
+          <p:cNvSpPr>
+            <a:spLocks noGrp="1"/>
+          </p:cNvSpPr>
           <p:nvPr>
             <p:ph type="body" sz="quarter" idx="21"/>
           </p:nvPr>
@@ -6907,20 +6896,23 @@
         </p:spPr>
         <p:txBody>
           <a:bodyPr lIns="0" tIns="0" rIns="0" bIns="0">
-            <a:normAutofit fontScale="100000" lnSpcReduction="0"/>
+            <a:normAutofit/>
           </a:bodyPr>
           <a:lstStyle/>
           <a:p>
             <a:pPr>
               <a:defRPr spc="-100"/>
             </a:pPr>
+            <a:endParaRPr/>
           </a:p>
         </p:txBody>
       </p:sp>
       <p:sp>
         <p:nvSpPr>
           <p:cNvPr id="171" name="Slide Number"/>
-          <p:cNvSpPr txBox="1"/>
+          <p:cNvSpPr txBox="1">
+            <a:spLocks noGrp="1"/>
+          </p:cNvSpPr>
           <p:nvPr>
             <p:ph type="sldNum" sz="quarter" idx="2"/>
           </p:nvPr>
@@ -6934,8 +6926,10 @@
           <a:bodyPr/>
           <a:lstStyle/>
           <a:p>
-            <a:pPr/>
-            <a:fld id="{86CB4B4D-7CA3-9044-876B-883B54F8677D}" type="slidenum"/>
+            <a:fld id="{86CB4B4D-7CA3-9044-876B-883B54F8677D}" type="slidenum">
+              <a:t>‹#›</a:t>
+            </a:fld>
+            <a:endParaRPr/>
           </a:p>
         </p:txBody>
       </p:sp>
@@ -6944,12 +6938,12 @@
   <p:clrMapOvr>
     <a:masterClrMapping/>
   </p:clrMapOvr>
-  <p:transition xmlns:p14="http://schemas.microsoft.com/office/powerpoint/2010/main" spd="med" advClick="1"/>
+  <p:transition spd="med"/>
 </p:sldLayout>
 </file>
 
 <file path=ppt/slideLayouts/slideLayout8.xml><?xml version="1.0" encoding="utf-8"?>
-<p:sldLayout xmlns:a="http://schemas.openxmlformats.org/drawingml/2006/main" xmlns:r="http://schemas.openxmlformats.org/officeDocument/2006/relationships" xmlns:p="http://schemas.openxmlformats.org/presentationml/2006/main" xmlns:m="http://schemas.openxmlformats.org/officeDocument/2006/math" xmlns:a14="http://schemas.microsoft.com/office/drawing/2010/main" type="tx" showMasterSp="0" showMasterPhAnim="1">
+<p:sldLayout xmlns:a="http://schemas.openxmlformats.org/drawingml/2006/main" xmlns:r="http://schemas.openxmlformats.org/officeDocument/2006/relationships" xmlns:p="http://schemas.openxmlformats.org/presentationml/2006/main" showMasterSp="0" type="tx">
   <p:cSld name="Title Content and 2 Content">
     <p:spTree>
       <p:nvGrpSpPr>
@@ -6990,7 +6984,7 @@
           <a:bodyPr lIns="45719" rIns="45719"/>
           <a:lstStyle/>
           <a:p>
-            <a:pPr/>
+            <a:endParaRPr/>
           </a:p>
         </p:txBody>
       </p:sp>
@@ -7019,7 +7013,7 @@
           <a:bodyPr lIns="45719" rIns="45719"/>
           <a:lstStyle/>
           <a:p>
-            <a:pPr/>
+            <a:endParaRPr/>
           </a:p>
         </p:txBody>
       </p:sp>
@@ -7032,10 +7026,8 @@
           <p:nvPr/>
         </p:nvPicPr>
         <p:blipFill>
-          <a:blip r:embed="rId2">
-            <a:extLst/>
-          </a:blip>
-          <a:srcRect l="0" t="0" r="0" b="10718"/>
+          <a:blip r:embed="rId2"/>
+          <a:srcRect b="10718"/>
           <a:stretch>
             <a:fillRect/>
           </a:stretch>
@@ -7062,10 +7054,8 @@
           <p:nvPr/>
         </p:nvPicPr>
         <p:blipFill>
-          <a:blip r:embed="rId2">
-            <a:extLst/>
-          </a:blip>
-          <a:srcRect l="0" t="0" r="0" b="10718"/>
+          <a:blip r:embed="rId2"/>
+          <a:srcRect b="10718"/>
           <a:stretch>
             <a:fillRect/>
           </a:stretch>
@@ -7126,7 +7116,7 @@
             </a:bodyPr>
             <a:lstStyle/>
             <a:p>
-              <a:pPr/>
+              <a:endParaRPr/>
             </a:p>
           </p:txBody>
         </p:sp>
@@ -7139,10 +7129,8 @@
             <p:nvPr/>
           </p:nvPicPr>
           <p:blipFill>
-            <a:blip r:embed="rId2">
-              <a:extLst/>
-            </a:blip>
-            <a:srcRect l="0" t="0" r="0" b="10718"/>
+            <a:blip r:embed="rId2"/>
+            <a:srcRect b="10718"/>
             <a:stretch>
               <a:fillRect/>
             </a:stretch>
@@ -7191,7 +7179,7 @@
             </a:bodyPr>
             <a:lstStyle/>
             <a:p>
-              <a:pPr/>
+              <a:endParaRPr/>
             </a:p>
           </p:txBody>
         </p:sp>
@@ -7205,9 +7193,7 @@
           <p:nvPr/>
         </p:nvPicPr>
         <p:blipFill>
-          <a:blip r:embed="rId3">
-            <a:extLst/>
-          </a:blip>
+          <a:blip r:embed="rId3"/>
           <a:stretch>
             <a:fillRect/>
           </a:stretch>
@@ -7234,10 +7220,8 @@
           <p:nvPr/>
         </p:nvPicPr>
         <p:blipFill>
-          <a:blip r:embed="rId2">
-            <a:extLst/>
-          </a:blip>
-          <a:srcRect l="0" t="0" r="0" b="10718"/>
+          <a:blip r:embed="rId2"/>
+          <a:srcRect b="10718"/>
           <a:stretch>
             <a:fillRect/>
           </a:stretch>
@@ -7298,7 +7282,7 @@
             </a:bodyPr>
             <a:lstStyle/>
             <a:p>
-              <a:pPr/>
+              <a:endParaRPr/>
             </a:p>
           </p:txBody>
         </p:sp>
@@ -7311,10 +7295,8 @@
             <p:nvPr/>
           </p:nvPicPr>
           <p:blipFill>
-            <a:blip r:embed="rId2">
-              <a:extLst/>
-            </a:blip>
-            <a:srcRect l="0" t="0" r="0" b="10718"/>
+            <a:blip r:embed="rId2"/>
+            <a:srcRect b="10718"/>
             <a:stretch>
               <a:fillRect/>
             </a:stretch>
@@ -7363,7 +7345,7 @@
             </a:bodyPr>
             <a:lstStyle/>
             <a:p>
-              <a:pPr/>
+              <a:endParaRPr/>
             </a:p>
           </p:txBody>
         </p:sp>
@@ -7377,9 +7359,7 @@
           <p:nvPr/>
         </p:nvPicPr>
         <p:blipFill>
-          <a:blip r:embed="rId3">
-            <a:extLst/>
-          </a:blip>
+          <a:blip r:embed="rId3"/>
           <a:stretch>
             <a:fillRect/>
           </a:stretch>
@@ -7400,7 +7380,9 @@
       <p:sp>
         <p:nvSpPr>
           <p:cNvPr id="193" name="Title Text"/>
-          <p:cNvSpPr txBox="1"/>
+          <p:cNvSpPr txBox="1">
+            <a:spLocks noGrp="1"/>
+          </p:cNvSpPr>
           <p:nvPr>
             <p:ph type="title"/>
           </p:nvPr>
@@ -7416,11 +7398,10 @@
         </p:spPr>
         <p:txBody>
           <a:bodyPr lIns="0" tIns="0" rIns="0" bIns="0">
-            <a:normAutofit fontScale="100000" lnSpcReduction="0"/>
+            <a:normAutofit/>
           </a:bodyPr>
           <a:lstStyle/>
           <a:p>
-            <a:pPr/>
             <a:r>
               <a:t>Title Text</a:t>
             </a:r>
@@ -7430,7 +7411,9 @@
       <p:sp>
         <p:nvSpPr>
           <p:cNvPr id="194" name="Body Level One…"/>
-          <p:cNvSpPr txBox="1"/>
+          <p:cNvSpPr txBox="1">
+            <a:spLocks noGrp="1"/>
+          </p:cNvSpPr>
           <p:nvPr>
             <p:ph type="body" sz="half" idx="1"/>
           </p:nvPr>
@@ -7446,11 +7429,10 @@
         </p:spPr>
         <p:txBody>
           <a:bodyPr lIns="0" tIns="0" rIns="0" bIns="0">
-            <a:normAutofit fontScale="100000" lnSpcReduction="0"/>
+            <a:normAutofit/>
           </a:bodyPr>
           <a:lstStyle/>
           <a:p>
-            <a:pPr/>
             <a:r>
               <a:t>Body Level One</a:t>
             </a:r>
@@ -7501,7 +7483,7 @@
         </p:spPr>
         <p:txBody>
           <a:bodyPr lIns="0" tIns="0" rIns="0" bIns="0">
-            <a:normAutofit fontScale="100000" lnSpcReduction="0"/>
+            <a:normAutofit/>
           </a:bodyPr>
           <a:lstStyle/>
           <a:p>
@@ -7515,20 +7497,23 @@
               <a:buSzPct val="100000"/>
               <a:buFont typeface="Arial"/>
               <a:buChar char="•"/>
-              <a:defRPr spc="-100" sz="3200">
+              <a:defRPr sz="3200" spc="-100">
                 <a:latin typeface="+mn-lt"/>
                 <a:ea typeface="+mn-ea"/>
                 <a:cs typeface="+mn-cs"/>
                 <a:sym typeface="Calibri"/>
               </a:defRPr>
             </a:pPr>
+            <a:endParaRPr/>
           </a:p>
         </p:txBody>
       </p:sp>
       <p:sp>
         <p:nvSpPr>
           <p:cNvPr id="196" name="PlaceHolder 4"/>
-          <p:cNvSpPr/>
+          <p:cNvSpPr>
+            <a:spLocks noGrp="1"/>
+          </p:cNvSpPr>
           <p:nvPr>
             <p:ph type="body" sz="quarter" idx="21"/>
           </p:nvPr>
@@ -7544,20 +7529,23 @@
         </p:spPr>
         <p:txBody>
           <a:bodyPr lIns="0" tIns="0" rIns="0" bIns="0">
-            <a:normAutofit fontScale="100000" lnSpcReduction="0"/>
+            <a:normAutofit/>
           </a:bodyPr>
           <a:lstStyle/>
           <a:p>
             <a:pPr>
               <a:defRPr spc="-100"/>
             </a:pPr>
+            <a:endParaRPr/>
           </a:p>
         </p:txBody>
       </p:sp>
       <p:sp>
         <p:nvSpPr>
           <p:cNvPr id="197" name="Slide Number"/>
-          <p:cNvSpPr txBox="1"/>
+          <p:cNvSpPr txBox="1">
+            <a:spLocks noGrp="1"/>
+          </p:cNvSpPr>
           <p:nvPr>
             <p:ph type="sldNum" sz="quarter" idx="2"/>
           </p:nvPr>
@@ -7571,8 +7559,10 @@
           <a:bodyPr/>
           <a:lstStyle/>
           <a:p>
-            <a:pPr/>
-            <a:fld id="{86CB4B4D-7CA3-9044-876B-883B54F8677D}" type="slidenum"/>
+            <a:fld id="{86CB4B4D-7CA3-9044-876B-883B54F8677D}" type="slidenum">
+              <a:t>‹#›</a:t>
+            </a:fld>
+            <a:endParaRPr/>
           </a:p>
         </p:txBody>
       </p:sp>
@@ -7581,12 +7571,12 @@
   <p:clrMapOvr>
     <a:masterClrMapping/>
   </p:clrMapOvr>
-  <p:transition xmlns:p14="http://schemas.microsoft.com/office/powerpoint/2010/main" spd="med" advClick="1"/>
+  <p:transition spd="med"/>
 </p:sldLayout>
 </file>
 
 <file path=ppt/slideLayouts/slideLayout9.xml><?xml version="1.0" encoding="utf-8"?>
-<p:sldLayout xmlns:a="http://schemas.openxmlformats.org/drawingml/2006/main" xmlns:r="http://schemas.openxmlformats.org/officeDocument/2006/relationships" xmlns:p="http://schemas.openxmlformats.org/presentationml/2006/main" xmlns:m="http://schemas.openxmlformats.org/officeDocument/2006/math" xmlns:a14="http://schemas.microsoft.com/office/drawing/2010/main" type="tx" showMasterSp="0" showMasterPhAnim="1">
+<p:sldLayout xmlns:a="http://schemas.openxmlformats.org/drawingml/2006/main" xmlns:r="http://schemas.openxmlformats.org/officeDocument/2006/relationships" xmlns:p="http://schemas.openxmlformats.org/presentationml/2006/main" showMasterSp="0" type="tx">
   <p:cSld name="Title, 2 Content over Content">
     <p:spTree>
       <p:nvGrpSpPr>
@@ -7627,7 +7617,7 @@
           <a:bodyPr lIns="45719" rIns="45719"/>
           <a:lstStyle/>
           <a:p>
-            <a:pPr/>
+            <a:endParaRPr/>
           </a:p>
         </p:txBody>
       </p:sp>
@@ -7656,7 +7646,7 @@
           <a:bodyPr lIns="45719" rIns="45719"/>
           <a:lstStyle/>
           <a:p>
-            <a:pPr/>
+            <a:endParaRPr/>
           </a:p>
         </p:txBody>
       </p:sp>
@@ -7669,10 +7659,8 @@
           <p:nvPr/>
         </p:nvPicPr>
         <p:blipFill>
-          <a:blip r:embed="rId2">
-            <a:extLst/>
-          </a:blip>
-          <a:srcRect l="0" t="0" r="0" b="10718"/>
+          <a:blip r:embed="rId2"/>
+          <a:srcRect b="10718"/>
           <a:stretch>
             <a:fillRect/>
           </a:stretch>
@@ -7699,10 +7687,8 @@
           <p:nvPr/>
         </p:nvPicPr>
         <p:blipFill>
-          <a:blip r:embed="rId2">
-            <a:extLst/>
-          </a:blip>
-          <a:srcRect l="0" t="0" r="0" b="10718"/>
+          <a:blip r:embed="rId2"/>
+          <a:srcRect b="10718"/>
           <a:stretch>
             <a:fillRect/>
           </a:stretch>
@@ -7763,7 +7749,7 @@
             </a:bodyPr>
             <a:lstStyle/>
             <a:p>
-              <a:pPr/>
+              <a:endParaRPr/>
             </a:p>
           </p:txBody>
         </p:sp>
@@ -7776,10 +7762,8 @@
             <p:nvPr/>
           </p:nvPicPr>
           <p:blipFill>
-            <a:blip r:embed="rId2">
-              <a:extLst/>
-            </a:blip>
-            <a:srcRect l="0" t="0" r="0" b="10718"/>
+            <a:blip r:embed="rId2"/>
+            <a:srcRect b="10718"/>
             <a:stretch>
               <a:fillRect/>
             </a:stretch>
@@ -7828,7 +7812,7 @@
             </a:bodyPr>
             <a:lstStyle/>
             <a:p>
-              <a:pPr/>
+              <a:endParaRPr/>
             </a:p>
           </p:txBody>
         </p:sp>
@@ -7842,9 +7826,7 @@
           <p:nvPr/>
         </p:nvPicPr>
         <p:blipFill>
-          <a:blip r:embed="rId3">
-            <a:extLst/>
-          </a:blip>
+          <a:blip r:embed="rId3"/>
           <a:stretch>
             <a:fillRect/>
           </a:stretch>
@@ -7871,10 +7853,8 @@
           <p:nvPr/>
         </p:nvPicPr>
         <p:blipFill>
-          <a:blip r:embed="rId2">
-            <a:extLst/>
-          </a:blip>
-          <a:srcRect l="0" t="0" r="0" b="10718"/>
+          <a:blip r:embed="rId2"/>
+          <a:srcRect b="10718"/>
           <a:stretch>
             <a:fillRect/>
           </a:stretch>
@@ -7935,7 +7915,7 @@
             </a:bodyPr>
             <a:lstStyle/>
             <a:p>
-              <a:pPr/>
+              <a:endParaRPr/>
             </a:p>
           </p:txBody>
         </p:sp>
@@ -7948,10 +7928,8 @@
             <p:nvPr/>
           </p:nvPicPr>
           <p:blipFill>
-            <a:blip r:embed="rId2">
-              <a:extLst/>
-            </a:blip>
-            <a:srcRect l="0" t="0" r="0" b="10718"/>
+            <a:blip r:embed="rId2"/>
+            <a:srcRect b="10718"/>
             <a:stretch>
               <a:fillRect/>
             </a:stretch>
@@ -8000,7 +7978,7 @@
             </a:bodyPr>
             <a:lstStyle/>
             <a:p>
-              <a:pPr/>
+              <a:endParaRPr/>
             </a:p>
           </p:txBody>
         </p:sp>
@@ -8014,9 +7992,7 @@
           <p:nvPr/>
         </p:nvPicPr>
         <p:blipFill>
-          <a:blip r:embed="rId3">
-            <a:extLst/>
-          </a:blip>
+          <a:blip r:embed="rId3"/>
           <a:stretch>
             <a:fillRect/>
           </a:stretch>
@@ -8037,7 +8013,9 @@
       <p:sp>
         <p:nvSpPr>
           <p:cNvPr id="219" name="Title Text"/>
-          <p:cNvSpPr txBox="1"/>
+          <p:cNvSpPr txBox="1">
+            <a:spLocks noGrp="1"/>
+          </p:cNvSpPr>
           <p:nvPr>
             <p:ph type="title"/>
           </p:nvPr>
@@ -8053,11 +8031,10 @@
         </p:spPr>
         <p:txBody>
           <a:bodyPr lIns="0" tIns="0" rIns="0" bIns="0">
-            <a:normAutofit fontScale="100000" lnSpcReduction="0"/>
+            <a:normAutofit/>
           </a:bodyPr>
           <a:lstStyle/>
           <a:p>
-            <a:pPr/>
             <a:r>
               <a:t>Title Text</a:t>
             </a:r>
@@ -8067,7 +8044,9 @@
       <p:sp>
         <p:nvSpPr>
           <p:cNvPr id="220" name="Body Level One…"/>
-          <p:cNvSpPr txBox="1"/>
+          <p:cNvSpPr txBox="1">
+            <a:spLocks noGrp="1"/>
+          </p:cNvSpPr>
           <p:nvPr>
             <p:ph type="body" sz="quarter" idx="1"/>
           </p:nvPr>
@@ -8083,11 +8062,10 @@
         </p:spPr>
         <p:txBody>
           <a:bodyPr lIns="0" tIns="0" rIns="0" bIns="0">
-            <a:normAutofit fontScale="100000" lnSpcReduction="0"/>
+            <a:normAutofit/>
           </a:bodyPr>
           <a:lstStyle/>
           <a:p>
-            <a:pPr/>
             <a:r>
               <a:t>Body Level One</a:t>
             </a:r>
@@ -8138,7 +8116,7 @@
         </p:spPr>
         <p:txBody>
           <a:bodyPr lIns="0" tIns="0" rIns="0" bIns="0">
-            <a:normAutofit fontScale="100000" lnSpcReduction="0"/>
+            <a:normAutofit/>
           </a:bodyPr>
           <a:lstStyle/>
           <a:p>
@@ -8152,20 +8130,23 @@
               <a:buSzPct val="100000"/>
               <a:buFont typeface="Arial"/>
               <a:buChar char="•"/>
-              <a:defRPr spc="-100" sz="3200">
+              <a:defRPr sz="3200" spc="-100">
                 <a:latin typeface="+mn-lt"/>
                 <a:ea typeface="+mn-ea"/>
                 <a:cs typeface="+mn-cs"/>
                 <a:sym typeface="Calibri"/>
               </a:defRPr>
             </a:pPr>
+            <a:endParaRPr/>
           </a:p>
         </p:txBody>
       </p:sp>
       <p:sp>
         <p:nvSpPr>
           <p:cNvPr id="222" name="PlaceHolder 4"/>
-          <p:cNvSpPr/>
+          <p:cNvSpPr>
+            <a:spLocks noGrp="1"/>
+          </p:cNvSpPr>
           <p:nvPr>
             <p:ph type="body" sz="half" idx="21"/>
           </p:nvPr>
@@ -8181,20 +8162,23 @@
         </p:spPr>
         <p:txBody>
           <a:bodyPr lIns="0" tIns="0" rIns="0" bIns="0">
-            <a:normAutofit fontScale="100000" lnSpcReduction="0"/>
+            <a:normAutofit/>
           </a:bodyPr>
           <a:lstStyle/>
           <a:p>
             <a:pPr>
               <a:defRPr spc="-100"/>
             </a:pPr>
+            <a:endParaRPr/>
           </a:p>
         </p:txBody>
       </p:sp>
       <p:sp>
         <p:nvSpPr>
           <p:cNvPr id="223" name="Slide Number"/>
-          <p:cNvSpPr txBox="1"/>
+          <p:cNvSpPr txBox="1">
+            <a:spLocks noGrp="1"/>
+          </p:cNvSpPr>
           <p:nvPr>
             <p:ph type="sldNum" sz="quarter" idx="2"/>
           </p:nvPr>
@@ -8208,8 +8192,10 @@
           <a:bodyPr/>
           <a:lstStyle/>
           <a:p>
-            <a:pPr/>
-            <a:fld id="{86CB4B4D-7CA3-9044-876B-883B54F8677D}" type="slidenum"/>
+            <a:fld id="{86CB4B4D-7CA3-9044-876B-883B54F8677D}" type="slidenum">
+              <a:t>‹#›</a:t>
+            </a:fld>
+            <a:endParaRPr/>
           </a:p>
         </p:txBody>
       </p:sp>
@@ -8218,18 +8204,19 @@
   <p:clrMapOvr>
     <a:masterClrMapping/>
   </p:clrMapOvr>
-  <p:transition xmlns:p14="http://schemas.microsoft.com/office/powerpoint/2010/main" spd="med" advClick="1"/>
+  <p:transition spd="med"/>
 </p:sldLayout>
 </file>
 
 <file path=ppt/slideMasters/slideMaster1.xml><?xml version="1.0" encoding="utf-8"?>
-<p:sldMaster xmlns:a="http://schemas.openxmlformats.org/drawingml/2006/main" xmlns:r="http://schemas.openxmlformats.org/officeDocument/2006/relationships" xmlns:p="http://schemas.openxmlformats.org/presentationml/2006/main" xmlns:m="http://schemas.openxmlformats.org/officeDocument/2006/math" xmlns:a14="http://schemas.microsoft.com/office/drawing/2010/main">
+<p:sldMaster xmlns:a="http://schemas.openxmlformats.org/drawingml/2006/main" xmlns:r="http://schemas.openxmlformats.org/officeDocument/2006/relationships" xmlns:p="http://schemas.openxmlformats.org/presentationml/2006/main">
   <p:cSld>
     <p:bg>
       <p:bgPr>
         <a:solidFill>
           <a:srgbClr val="FFFFFF"/>
         </a:solidFill>
+        <a:effectLst/>
       </p:bgPr>
     </p:bg>
     <p:spTree>
@@ -8271,7 +8258,7 @@
           <a:bodyPr lIns="45719" rIns="45719"/>
           <a:lstStyle/>
           <a:p>
-            <a:pPr/>
+            <a:endParaRPr/>
           </a:p>
         </p:txBody>
       </p:sp>
@@ -8300,7 +8287,7 @@
           <a:bodyPr lIns="45719" rIns="45719"/>
           <a:lstStyle/>
           <a:p>
-            <a:pPr/>
+            <a:endParaRPr/>
           </a:p>
         </p:txBody>
       </p:sp>
@@ -8313,10 +8300,8 @@
           <p:nvPr/>
         </p:nvPicPr>
         <p:blipFill>
-          <a:blip r:embed="rId2">
-            <a:extLst/>
-          </a:blip>
-          <a:srcRect l="0" t="0" r="0" b="10718"/>
+          <a:blip r:embed="rId14"/>
+          <a:srcRect b="10718"/>
           <a:stretch>
             <a:fillRect/>
           </a:stretch>
@@ -8343,10 +8328,8 @@
           <p:nvPr/>
         </p:nvPicPr>
         <p:blipFill>
-          <a:blip r:embed="rId2">
-            <a:extLst/>
-          </a:blip>
-          <a:srcRect l="0" t="0" r="0" b="10718"/>
+          <a:blip r:embed="rId14"/>
+          <a:srcRect b="10718"/>
           <a:stretch>
             <a:fillRect/>
           </a:stretch>
@@ -8407,7 +8390,7 @@
             </a:bodyPr>
             <a:lstStyle/>
             <a:p>
-              <a:pPr/>
+              <a:endParaRPr/>
             </a:p>
           </p:txBody>
         </p:sp>
@@ -8420,10 +8403,8 @@
             <p:nvPr/>
           </p:nvPicPr>
           <p:blipFill>
-            <a:blip r:embed="rId2">
-              <a:extLst/>
-            </a:blip>
-            <a:srcRect l="0" t="0" r="0" b="10718"/>
+            <a:blip r:embed="rId14"/>
+            <a:srcRect b="10718"/>
             <a:stretch>
               <a:fillRect/>
             </a:stretch>
@@ -8472,7 +8453,7 @@
             </a:bodyPr>
             <a:lstStyle/>
             <a:p>
-              <a:pPr/>
+              <a:endParaRPr/>
             </a:p>
           </p:txBody>
         </p:sp>
@@ -8486,9 +8467,7 @@
           <p:nvPr/>
         </p:nvPicPr>
         <p:blipFill>
-          <a:blip r:embed="rId3">
-            <a:extLst/>
-          </a:blip>
+          <a:blip r:embed="rId15"/>
           <a:stretch>
             <a:fillRect/>
           </a:stretch>
@@ -8515,10 +8494,8 @@
           <p:nvPr/>
         </p:nvPicPr>
         <p:blipFill>
-          <a:blip r:embed="rId2">
-            <a:extLst/>
-          </a:blip>
-          <a:srcRect l="0" t="0" r="0" b="10718"/>
+          <a:blip r:embed="rId14"/>
+          <a:srcRect b="10718"/>
           <a:stretch>
             <a:fillRect/>
           </a:stretch>
@@ -8579,7 +8556,7 @@
             </a:bodyPr>
             <a:lstStyle/>
             <a:p>
-              <a:pPr/>
+              <a:endParaRPr/>
             </a:p>
           </p:txBody>
         </p:sp>
@@ -8592,10 +8569,8 @@
             <p:nvPr/>
           </p:nvPicPr>
           <p:blipFill>
-            <a:blip r:embed="rId2">
-              <a:extLst/>
-            </a:blip>
-            <a:srcRect l="0" t="0" r="0" b="10718"/>
+            <a:blip r:embed="rId14"/>
+            <a:srcRect b="10718"/>
             <a:stretch>
               <a:fillRect/>
             </a:stretch>
@@ -8644,7 +8619,7 @@
             </a:bodyPr>
             <a:lstStyle/>
             <a:p>
-              <a:pPr/>
+              <a:endParaRPr/>
             </a:p>
           </p:txBody>
         </p:sp>
@@ -8658,9 +8633,7 @@
           <p:nvPr/>
         </p:nvPicPr>
         <p:blipFill>
-          <a:blip r:embed="rId3">
-            <a:extLst/>
-          </a:blip>
+          <a:blip r:embed="rId15"/>
           <a:stretch>
             <a:fillRect/>
           </a:stretch>
@@ -8681,7 +8654,9 @@
       <p:sp>
         <p:nvSpPr>
           <p:cNvPr id="17" name="Title Text"/>
-          <p:cNvSpPr txBox="1"/>
+          <p:cNvSpPr txBox="1">
+            <a:spLocks noGrp="1"/>
+          </p:cNvSpPr>
           <p:nvPr>
             <p:ph type="title"/>
           </p:nvPr>
@@ -8699,7 +8674,7 @@
           </a:ln>
           <a:extLst>
             <a:ext uri="{C572A759-6A51-4108-AA02-DFA0A04FC94B}">
-              <ma14:wrappingTextBoxFlag xmlns:ma14="http://schemas.microsoft.com/office/mac/drawingml/2011/main" val="1"/>
+              <ma14:wrappingTextBoxFlag xmlns:ma14="http://schemas.microsoft.com/office/mac/drawingml/2011/main" xmlns:a14="http://schemas.microsoft.com/office/drawing/2010/main" xmlns:m="http://schemas.openxmlformats.org/officeDocument/2006/math" xmlns="" val="1"/>
             </a:ext>
           </a:extLst>
         </p:spPr>
@@ -8707,7 +8682,6 @@
           <a:bodyPr lIns="45719" rIns="45719" anchor="ctr"/>
           <a:lstStyle/>
           <a:p>
-            <a:pPr/>
             <a:r>
               <a:t>Title Text</a:t>
             </a:r>
@@ -8717,7 +8691,9 @@
       <p:sp>
         <p:nvSpPr>
           <p:cNvPr id="18" name="Body Level One…"/>
-          <p:cNvSpPr txBox="1"/>
+          <p:cNvSpPr txBox="1">
+            <a:spLocks noGrp="1"/>
+          </p:cNvSpPr>
           <p:nvPr>
             <p:ph type="body" idx="1"/>
           </p:nvPr>
@@ -8735,7 +8711,7 @@
           </a:ln>
           <a:extLst>
             <a:ext uri="{C572A759-6A51-4108-AA02-DFA0A04FC94B}">
-              <ma14:wrappingTextBoxFlag xmlns:ma14="http://schemas.microsoft.com/office/mac/drawingml/2011/main" val="1"/>
+              <ma14:wrappingTextBoxFlag xmlns:ma14="http://schemas.microsoft.com/office/mac/drawingml/2011/main" xmlns:a14="http://schemas.microsoft.com/office/drawing/2010/main" xmlns:m="http://schemas.openxmlformats.org/officeDocument/2006/math" xmlns="" val="1"/>
             </a:ext>
           </a:extLst>
         </p:spPr>
@@ -8743,7 +8719,6 @@
           <a:bodyPr lIns="45719" rIns="45719"/>
           <a:lstStyle/>
           <a:p>
-            <a:pPr/>
             <a:r>
               <a:t>Body Level One</a:t>
             </a:r>
@@ -8777,7 +8752,9 @@
       <p:sp>
         <p:nvSpPr>
           <p:cNvPr id="19" name="Slide Number"/>
-          <p:cNvSpPr txBox="1"/>
+          <p:cNvSpPr txBox="1">
+            <a:spLocks noGrp="1"/>
+          </p:cNvSpPr>
           <p:nvPr>
             <p:ph type="sldNum" sz="quarter" idx="2"/>
           </p:nvPr>
@@ -8800,7 +8777,7 @@
           </a:bodyPr>
           <a:lstStyle>
             <a:lvl1pPr algn="r">
-              <a:defRPr spc="-1" sz="1200">
+              <a:defRPr sz="1200" spc="-1">
                 <a:solidFill>
                   <a:srgbClr val="898989"/>
                 </a:solidFill>
@@ -8812,8 +8789,10 @@
             </a:lvl1pPr>
           </a:lstStyle>
           <a:p>
-            <a:pPr/>
-            <a:fld id="{86CB4B4D-7CA3-9044-876B-883B54F8677D}" type="slidenum"/>
+            <a:fld id="{86CB4B4D-7CA3-9044-876B-883B54F8677D}" type="slidenum">
+              <a:t>‹#›</a:t>
+            </a:fld>
+            <a:endParaRPr/>
           </a:p>
         </p:txBody>
       </p:sp>
@@ -8821,20 +8800,20 @@
   </p:cSld>
   <p:clrMap bg1="lt1" tx1="dk1" bg2="lt2" tx2="dk2" accent1="accent1" accent2="accent2" accent3="accent3" accent4="accent4" accent5="accent5" accent6="accent6" hlink="hlink" folHlink="folHlink"/>
   <p:sldLayoutIdLst>
-    <p:sldLayoutId id="2147483649" r:id="rId4"/>
-    <p:sldLayoutId id="2147483650" r:id="rId5"/>
-    <p:sldLayoutId id="2147483651" r:id="rId6"/>
-    <p:sldLayoutId id="2147483652" r:id="rId7"/>
-    <p:sldLayoutId id="2147483653" r:id="rId8"/>
-    <p:sldLayoutId id="2147483654" r:id="rId9"/>
-    <p:sldLayoutId id="2147483655" r:id="rId10"/>
-    <p:sldLayoutId id="2147483656" r:id="rId11"/>
-    <p:sldLayoutId id="2147483657" r:id="rId12"/>
-    <p:sldLayoutId id="2147483658" r:id="rId13"/>
-    <p:sldLayoutId id="2147483659" r:id="rId14"/>
-    <p:sldLayoutId id="2147483660" r:id="rId15"/>
+    <p:sldLayoutId id="2147483649" r:id="rId1"/>
+    <p:sldLayoutId id="2147483650" r:id="rId2"/>
+    <p:sldLayoutId id="2147483651" r:id="rId3"/>
+    <p:sldLayoutId id="2147483652" r:id="rId4"/>
+    <p:sldLayoutId id="2147483653" r:id="rId5"/>
+    <p:sldLayoutId id="2147483654" r:id="rId6"/>
+    <p:sldLayoutId id="2147483655" r:id="rId7"/>
+    <p:sldLayoutId id="2147483656" r:id="rId8"/>
+    <p:sldLayoutId id="2147483657" r:id="rId9"/>
+    <p:sldLayoutId id="2147483658" r:id="rId10"/>
+    <p:sldLayoutId id="2147483659" r:id="rId11"/>
+    <p:sldLayoutId id="2147483660" r:id="rId12"/>
   </p:sldLayoutIdLst>
-  <p:transition xmlns:p14="http://schemas.microsoft.com/office/powerpoint/2010/main" spd="med" advClick="1"/>
+  <p:transition spd="med"/>
   <p:txStyles>
     <p:titleStyle>
       <a:lvl1pPr marL="0" marR="0" indent="0" algn="ctr" defTabSz="914400" rtl="0" latinLnBrk="0">
@@ -8852,7 +8831,7 @@
         <a:buFontTx/>
         <a:buNone/>
         <a:tabLst/>
-        <a:defRPr b="0" baseline="0" cap="none" i="0" spc="-1" strike="noStrike" sz="3000" u="none">
+        <a:defRPr sz="3000" b="0" i="0" u="none" strike="noStrike" cap="none" spc="-1" baseline="0">
           <a:solidFill>
             <a:srgbClr val="000000"/>
           </a:solidFill>
@@ -8878,7 +8857,7 @@
         <a:buFontTx/>
         <a:buNone/>
         <a:tabLst/>
-        <a:defRPr b="0" baseline="0" cap="none" i="0" spc="-1" strike="noStrike" sz="3000" u="none">
+        <a:defRPr sz="3000" b="0" i="0" u="none" strike="noStrike" cap="none" spc="-1" baseline="0">
           <a:solidFill>
             <a:srgbClr val="000000"/>
           </a:solidFill>
@@ -8904,7 +8883,7 @@
         <a:buFontTx/>
         <a:buNone/>
         <a:tabLst/>
-        <a:defRPr b="0" baseline="0" cap="none" i="0" spc="-1" strike="noStrike" sz="3000" u="none">
+        <a:defRPr sz="3000" b="0" i="0" u="none" strike="noStrike" cap="none" spc="-1" baseline="0">
           <a:solidFill>
             <a:srgbClr val="000000"/>
           </a:solidFill>
@@ -8930,7 +8909,7 @@
         <a:buFontTx/>
         <a:buNone/>
         <a:tabLst/>
-        <a:defRPr b="0" baseline="0" cap="none" i="0" spc="-1" strike="noStrike" sz="3000" u="none">
+        <a:defRPr sz="3000" b="0" i="0" u="none" strike="noStrike" cap="none" spc="-1" baseline="0">
           <a:solidFill>
             <a:srgbClr val="000000"/>
           </a:solidFill>
@@ -8956,7 +8935,7 @@
         <a:buFontTx/>
         <a:buNone/>
         <a:tabLst/>
-        <a:defRPr b="0" baseline="0" cap="none" i="0" spc="-1" strike="noStrike" sz="3000" u="none">
+        <a:defRPr sz="3000" b="0" i="0" u="none" strike="noStrike" cap="none" spc="-1" baseline="0">
           <a:solidFill>
             <a:srgbClr val="000000"/>
           </a:solidFill>
@@ -8982,7 +8961,7 @@
         <a:buFontTx/>
         <a:buNone/>
         <a:tabLst/>
-        <a:defRPr b="0" baseline="0" cap="none" i="0" spc="-1" strike="noStrike" sz="3000" u="none">
+        <a:defRPr sz="3000" b="0" i="0" u="none" strike="noStrike" cap="none" spc="-1" baseline="0">
           <a:solidFill>
             <a:srgbClr val="000000"/>
           </a:solidFill>
@@ -9008,7 +8987,7 @@
         <a:buFontTx/>
         <a:buNone/>
         <a:tabLst/>
-        <a:defRPr b="0" baseline="0" cap="none" i="0" spc="-1" strike="noStrike" sz="3000" u="none">
+        <a:defRPr sz="3000" b="0" i="0" u="none" strike="noStrike" cap="none" spc="-1" baseline="0">
           <a:solidFill>
             <a:srgbClr val="000000"/>
           </a:solidFill>
@@ -9034,7 +9013,7 @@
         <a:buFontTx/>
         <a:buNone/>
         <a:tabLst/>
-        <a:defRPr b="0" baseline="0" cap="none" i="0" spc="-1" strike="noStrike" sz="3000" u="none">
+        <a:defRPr sz="3000" b="0" i="0" u="none" strike="noStrike" cap="none" spc="-1" baseline="0">
           <a:solidFill>
             <a:srgbClr val="000000"/>
           </a:solidFill>
@@ -9060,7 +9039,7 @@
         <a:buFontTx/>
         <a:buNone/>
         <a:tabLst/>
-        <a:defRPr b="0" baseline="0" cap="none" i="0" spc="-1" strike="noStrike" sz="3000" u="none">
+        <a:defRPr sz="3000" b="0" i="0" u="none" strike="noStrike" cap="none" spc="-1" baseline="0">
           <a:solidFill>
             <a:srgbClr val="000000"/>
           </a:solidFill>
@@ -9090,7 +9069,7 @@
         <a:buFont typeface="Arial"/>
         <a:buChar char="•"/>
         <a:tabLst/>
-        <a:defRPr b="0" baseline="0" cap="none" i="0" spc="-1" strike="noStrike" sz="3200" u="none">
+        <a:defRPr sz="3200" b="0" i="0" u="none" strike="noStrike" cap="none" spc="-1" baseline="0">
           <a:solidFill>
             <a:srgbClr val="000000"/>
           </a:solidFill>
@@ -9118,7 +9097,7 @@
         <a:buFont typeface="Arial"/>
         <a:buChar char="–"/>
         <a:tabLst/>
-        <a:defRPr b="0" baseline="0" cap="none" i="0" spc="-1" strike="noStrike" sz="3200" u="none">
+        <a:defRPr sz="3200" b="0" i="0" u="none" strike="noStrike" cap="none" spc="-1" baseline="0">
           <a:solidFill>
             <a:srgbClr val="000000"/>
           </a:solidFill>
@@ -9146,7 +9125,7 @@
         <a:buFont typeface="Arial"/>
         <a:buChar char="•"/>
         <a:tabLst/>
-        <a:defRPr b="0" baseline="0" cap="none" i="0" spc="-1" strike="noStrike" sz="3200" u="none">
+        <a:defRPr sz="3200" b="0" i="0" u="none" strike="noStrike" cap="none" spc="-1" baseline="0">
           <a:solidFill>
             <a:srgbClr val="000000"/>
           </a:solidFill>
@@ -9174,7 +9153,7 @@
         <a:buFont typeface="Arial"/>
         <a:buChar char="–"/>
         <a:tabLst/>
-        <a:defRPr b="0" baseline="0" cap="none" i="0" spc="-1" strike="noStrike" sz="3200" u="none">
+        <a:defRPr sz="3200" b="0" i="0" u="none" strike="noStrike" cap="none" spc="-1" baseline="0">
           <a:solidFill>
             <a:srgbClr val="000000"/>
           </a:solidFill>
@@ -9202,7 +9181,7 @@
         <a:buFont typeface="Arial"/>
         <a:buChar char="»"/>
         <a:tabLst/>
-        <a:defRPr b="0" baseline="0" cap="none" i="0" spc="-1" strike="noStrike" sz="3200" u="none">
+        <a:defRPr sz="3200" b="0" i="0" u="none" strike="noStrike" cap="none" spc="-1" baseline="0">
           <a:solidFill>
             <a:srgbClr val="000000"/>
           </a:solidFill>
@@ -9230,7 +9209,7 @@
         <a:buFont typeface="Arial"/>
         <a:buChar char="•"/>
         <a:tabLst/>
-        <a:defRPr b="0" baseline="0" cap="none" i="0" spc="-1" strike="noStrike" sz="3200" u="none">
+        <a:defRPr sz="3200" b="0" i="0" u="none" strike="noStrike" cap="none" spc="-1" baseline="0">
           <a:solidFill>
             <a:srgbClr val="000000"/>
           </a:solidFill>
@@ -9258,7 +9237,7 @@
         <a:buFont typeface="Arial"/>
         <a:buChar char="•"/>
         <a:tabLst/>
-        <a:defRPr b="0" baseline="0" cap="none" i="0" spc="-1" strike="noStrike" sz="3200" u="none">
+        <a:defRPr sz="3200" b="0" i="0" u="none" strike="noStrike" cap="none" spc="-1" baseline="0">
           <a:solidFill>
             <a:srgbClr val="000000"/>
           </a:solidFill>
@@ -9286,7 +9265,7 @@
         <a:buFont typeface="Arial"/>
         <a:buChar char="•"/>
         <a:tabLst/>
-        <a:defRPr b="0" baseline="0" cap="none" i="0" spc="-1" strike="noStrike" sz="3200" u="none">
+        <a:defRPr sz="3200" b="0" i="0" u="none" strike="noStrike" cap="none" spc="-1" baseline="0">
           <a:solidFill>
             <a:srgbClr val="000000"/>
           </a:solidFill>
@@ -9314,7 +9293,7 @@
         <a:buFont typeface="Arial"/>
         <a:buChar char="•"/>
         <a:tabLst/>
-        <a:defRPr b="0" baseline="0" cap="none" i="0" spc="-1" strike="noStrike" sz="3200" u="none">
+        <a:defRPr sz="3200" b="0" i="0" u="none" strike="noStrike" cap="none" spc="-1" baseline="0">
           <a:solidFill>
             <a:srgbClr val="000000"/>
           </a:solidFill>
@@ -9342,7 +9321,7 @@
         <a:buFontTx/>
         <a:buNone/>
         <a:tabLst/>
-        <a:defRPr b="0" baseline="0" cap="none" i="0" spc="-1" strike="noStrike" sz="1200" u="none">
+        <a:defRPr sz="1200" b="0" i="0" u="none" strike="noStrike" cap="none" spc="-1" baseline="0">
           <a:solidFill>
             <a:schemeClr val="tx1"/>
           </a:solidFill>
@@ -9368,7 +9347,7 @@
         <a:buFontTx/>
         <a:buNone/>
         <a:tabLst/>
-        <a:defRPr b="0" baseline="0" cap="none" i="0" spc="-1" strike="noStrike" sz="1200" u="none">
+        <a:defRPr sz="1200" b="0" i="0" u="none" strike="noStrike" cap="none" spc="-1" baseline="0">
           <a:solidFill>
             <a:schemeClr val="tx1"/>
           </a:solidFill>
@@ -9394,7 +9373,7 @@
         <a:buFontTx/>
         <a:buNone/>
         <a:tabLst/>
-        <a:defRPr b="0" baseline="0" cap="none" i="0" spc="-1" strike="noStrike" sz="1200" u="none">
+        <a:defRPr sz="1200" b="0" i="0" u="none" strike="noStrike" cap="none" spc="-1" baseline="0">
           <a:solidFill>
             <a:schemeClr val="tx1"/>
           </a:solidFill>
@@ -9420,7 +9399,7 @@
         <a:buFontTx/>
         <a:buNone/>
         <a:tabLst/>
-        <a:defRPr b="0" baseline="0" cap="none" i="0" spc="-1" strike="noStrike" sz="1200" u="none">
+        <a:defRPr sz="1200" b="0" i="0" u="none" strike="noStrike" cap="none" spc="-1" baseline="0">
           <a:solidFill>
             <a:schemeClr val="tx1"/>
           </a:solidFill>
@@ -9446,7 +9425,7 @@
         <a:buFontTx/>
         <a:buNone/>
         <a:tabLst/>
-        <a:defRPr b="0" baseline="0" cap="none" i="0" spc="-1" strike="noStrike" sz="1200" u="none">
+        <a:defRPr sz="1200" b="0" i="0" u="none" strike="noStrike" cap="none" spc="-1" baseline="0">
           <a:solidFill>
             <a:schemeClr val="tx1"/>
           </a:solidFill>
@@ -9472,7 +9451,7 @@
         <a:buFontTx/>
         <a:buNone/>
         <a:tabLst/>
-        <a:defRPr b="0" baseline="0" cap="none" i="0" spc="-1" strike="noStrike" sz="1200" u="none">
+        <a:defRPr sz="1200" b="0" i="0" u="none" strike="noStrike" cap="none" spc="-1" baseline="0">
           <a:solidFill>
             <a:schemeClr val="tx1"/>
           </a:solidFill>
@@ -9498,7 +9477,7 @@
         <a:buFontTx/>
         <a:buNone/>
         <a:tabLst/>
-        <a:defRPr b="0" baseline="0" cap="none" i="0" spc="-1" strike="noStrike" sz="1200" u="none">
+        <a:defRPr sz="1200" b="0" i="0" u="none" strike="noStrike" cap="none" spc="-1" baseline="0">
           <a:solidFill>
             <a:schemeClr val="tx1"/>
           </a:solidFill>
@@ -9524,7 +9503,7 @@
         <a:buFontTx/>
         <a:buNone/>
         <a:tabLst/>
-        <a:defRPr b="0" baseline="0" cap="none" i="0" spc="-1" strike="noStrike" sz="1200" u="none">
+        <a:defRPr sz="1200" b="0" i="0" u="none" strike="noStrike" cap="none" spc="-1" baseline="0">
           <a:solidFill>
             <a:schemeClr val="tx1"/>
           </a:solidFill>
@@ -9550,7 +9529,7 @@
         <a:buFontTx/>
         <a:buNone/>
         <a:tabLst/>
-        <a:defRPr b="0" baseline="0" cap="none" i="0" spc="-1" strike="noStrike" sz="1200" u="none">
+        <a:defRPr sz="1200" b="0" i="0" u="none" strike="noStrike" cap="none" spc="-1" baseline="0">
           <a:solidFill>
             <a:schemeClr val="tx1"/>
           </a:solidFill>
@@ -9567,7 +9546,7 @@
 </file>
 
 <file path=ppt/slides/slide1.xml><?xml version="1.0" encoding="utf-8"?>
-<p:sld xmlns:a="http://schemas.openxmlformats.org/drawingml/2006/main" xmlns:r="http://schemas.openxmlformats.org/officeDocument/2006/relationships" xmlns:p="http://schemas.openxmlformats.org/presentationml/2006/main" xmlns:m="http://schemas.openxmlformats.org/officeDocument/2006/math" xmlns:a14="http://schemas.microsoft.com/office/drawing/2010/main" showMasterSp="1" showMasterPhAnim="1">
+<p:sld xmlns:a="http://schemas.openxmlformats.org/drawingml/2006/main" xmlns:r="http://schemas.openxmlformats.org/officeDocument/2006/relationships" xmlns:p="http://schemas.openxmlformats.org/presentationml/2006/main">
   <p:cSld>
     <p:spTree>
       <p:nvGrpSpPr>
@@ -9602,7 +9581,7 @@
           </a:ln>
           <a:extLst>
             <a:ext uri="{C572A759-6A51-4108-AA02-DFA0A04FC94B}">
-              <ma14:wrappingTextBoxFlag xmlns:ma14="http://schemas.microsoft.com/office/mac/drawingml/2011/main" val="1"/>
+              <ma14:wrappingTextBoxFlag xmlns:ma14="http://schemas.microsoft.com/office/mac/drawingml/2011/main" xmlns:a14="http://schemas.microsoft.com/office/drawing/2010/main" xmlns:m="http://schemas.openxmlformats.org/officeDocument/2006/math" xmlns="" val="1"/>
             </a:ext>
           </a:extLst>
         </p:spPr>
@@ -9624,6 +9603,7 @@
               </a:defRPr>
             </a:pPr>
             <a:r>
+              <a:rPr dirty="0"/>
               <a:t>Project Presentation of COOP-2 (22CS421)</a:t>
             </a:r>
           </a:p>
@@ -9632,7 +9612,7 @@
               <a:spcBef>
                 <a:spcPts val="400"/>
               </a:spcBef>
-              <a:defRPr spc="-1" sz="2000">
+              <a:defRPr sz="2000" spc="-1">
                 <a:latin typeface="Times New Roman"/>
                 <a:ea typeface="Times New Roman"/>
                 <a:cs typeface="Times New Roman"/>
@@ -9640,6 +9620,7 @@
               </a:defRPr>
             </a:pPr>
             <a:r>
+              <a:rPr dirty="0"/>
               <a:t>On</a:t>
             </a:r>
           </a:p>
@@ -9648,7 +9629,7 @@
               <a:spcBef>
                 <a:spcPts val="400"/>
               </a:spcBef>
-              <a:defRPr b="1" spc="-1" sz="3200">
+              <a:defRPr sz="3200" b="1" spc="-1">
                 <a:latin typeface="Times New Roman"/>
                 <a:ea typeface="Times New Roman"/>
                 <a:cs typeface="Times New Roman"/>
@@ -9656,10 +9637,11 @@
               </a:defRPr>
             </a:pPr>
             <a:r>
+              <a:rPr dirty="0"/>
               <a:t>Challenges in Adopting Microservices Architecture: </a:t>
             </a:r>
             <a:r>
-              <a:rPr spc="0"/>
+              <a:rPr spc="0" dirty="0"/>
               <a:t>A Systematic Review of Data Consistency and Fault Tolerance</a:t>
             </a:r>
           </a:p>
@@ -9668,7 +9650,7 @@
               <a:spcBef>
                 <a:spcPts val="400"/>
               </a:spcBef>
-              <a:defRPr spc="-1" sz="3200">
+              <a:defRPr sz="3200" spc="-1">
                 <a:latin typeface="Times New Roman"/>
                 <a:ea typeface="Times New Roman"/>
                 <a:cs typeface="Times New Roman"/>
@@ -9676,11 +9658,19 @@
               </a:defRPr>
             </a:pPr>
             <a:br>
-              <a:rPr b="1"/>
+              <a:rPr b="1" dirty="0"/>
             </a:br>
             <a:r>
-              <a:rPr sz="2000"/>
+              <a:rPr sz="2000" dirty="0"/>
               <a:t>Devang Sethi</a:t>
+            </a:r>
+            <a:r>
+              <a:rPr lang="en-US" sz="2000" dirty="0"/>
+              <a:t> </a:t>
+            </a:r>
+            <a:r>
+              <a:rPr lang="en-US" sz="2000"/>
+              <a:t>(TEAM-7)</a:t>
             </a:r>
             <a:endParaRPr sz="2000"/>
           </a:p>
@@ -9689,7 +9679,7 @@
               <a:spcBef>
                 <a:spcPts val="400"/>
               </a:spcBef>
-              <a:defRPr spc="-1" sz="2000">
+              <a:defRPr sz="2000" spc="-1">
                 <a:latin typeface="Times New Roman"/>
                 <a:ea typeface="Times New Roman"/>
                 <a:cs typeface="Times New Roman"/>
@@ -9697,6 +9687,7 @@
               </a:defRPr>
             </a:pPr>
             <a:r>
+              <a:rPr dirty="0"/>
               <a:t>2210991489</a:t>
             </a:r>
           </a:p>
@@ -9705,20 +9696,21 @@
               <a:spcBef>
                 <a:spcPts val="400"/>
               </a:spcBef>
-              <a:defRPr spc="-1" sz="2000">
+              <a:defRPr sz="2000" spc="-1">
                 <a:latin typeface="Times New Roman"/>
                 <a:ea typeface="Times New Roman"/>
                 <a:cs typeface="Times New Roman"/>
                 <a:sym typeface="Times New Roman"/>
               </a:defRPr>
             </a:pPr>
+            <a:endParaRPr dirty="0"/>
           </a:p>
           <a:p>
             <a:pPr algn="ctr">
               <a:spcBef>
                 <a:spcPts val="400"/>
               </a:spcBef>
-              <a:defRPr spc="-1" sz="2000">
+              <a:defRPr sz="2000" spc="-1">
                 <a:latin typeface="Times New Roman"/>
                 <a:ea typeface="Times New Roman"/>
                 <a:cs typeface="Times New Roman"/>
@@ -9726,6 +9718,7 @@
               </a:defRPr>
             </a:pPr>
             <a:r>
+              <a:rPr dirty="0"/>
               <a:t>Supervised By</a:t>
             </a:r>
           </a:p>
@@ -9734,7 +9727,7 @@
               <a:spcBef>
                 <a:spcPts val="400"/>
               </a:spcBef>
-              <a:defRPr spc="-1" sz="2000">
+              <a:defRPr sz="2000" spc="-1">
                 <a:latin typeface="Times New Roman"/>
                 <a:ea typeface="Times New Roman"/>
                 <a:cs typeface="Times New Roman"/>
@@ -9742,28 +9735,35 @@
               </a:defRPr>
             </a:pPr>
             <a:r>
-              <a:t>Dr. Rajat Takkar</a:t>
-            </a:r>
+              <a:rPr dirty="0"/>
+              <a:t>Dr. Rajat </a:t>
+            </a:r>
+            <a:r>
+              <a:rPr dirty="0" err="1"/>
+              <a:t>Takkar</a:t>
+            </a:r>
+            <a:endParaRPr dirty="0"/>
           </a:p>
           <a:p>
             <a:pPr algn="ctr">
               <a:spcBef>
                 <a:spcPts val="400"/>
               </a:spcBef>
-              <a:defRPr spc="-1" sz="2000">
+              <a:defRPr sz="2000" spc="-1">
                 <a:latin typeface="Times New Roman"/>
                 <a:ea typeface="Times New Roman"/>
                 <a:cs typeface="Times New Roman"/>
                 <a:sym typeface="Times New Roman"/>
               </a:defRPr>
             </a:pPr>
+            <a:endParaRPr dirty="0"/>
           </a:p>
           <a:p>
             <a:pPr algn="ctr">
               <a:spcBef>
                 <a:spcPts val="400"/>
               </a:spcBef>
-              <a:defRPr spc="-1" sz="2400">
+              <a:defRPr sz="2400" spc="-1">
                 <a:latin typeface="Times New Roman"/>
                 <a:ea typeface="Times New Roman"/>
                 <a:cs typeface="Times New Roman"/>
@@ -9771,6 +9771,7 @@
               </a:defRPr>
             </a:pPr>
             <a:r>
+              <a:rPr dirty="0"/>
               <a:t>Department of Computer Science and Engineering, </a:t>
             </a:r>
           </a:p>
@@ -9779,7 +9780,7 @@
               <a:spcBef>
                 <a:spcPts val="400"/>
               </a:spcBef>
-              <a:defRPr spc="-1" sz="2400">
+              <a:defRPr sz="2400" spc="-1">
                 <a:latin typeface="Times New Roman"/>
                 <a:ea typeface="Times New Roman"/>
                 <a:cs typeface="Times New Roman"/>
@@ -9787,7 +9788,12 @@
               </a:defRPr>
             </a:pPr>
             <a:r>
-              <a:t>Chitkara University, Punjab</a:t>
+              <a:rPr dirty="0" err="1"/>
+              <a:t>Chitkara</a:t>
+            </a:r>
+            <a:r>
+              <a:rPr dirty="0"/>
+              <a:t> University, Punjab</a:t>
             </a:r>
           </a:p>
           <a:p>
@@ -9798,13 +9804,14 @@
               <a:spcBef>
                 <a:spcPts val="400"/>
               </a:spcBef>
-              <a:defRPr spc="-1" sz="2000">
+              <a:defRPr sz="2000" spc="-1">
                 <a:latin typeface="+mn-lt"/>
                 <a:ea typeface="+mn-ea"/>
                 <a:cs typeface="+mn-cs"/>
                 <a:sym typeface="Calibri"/>
               </a:defRPr>
             </a:pPr>
+            <a:endParaRPr dirty="0"/>
           </a:p>
         </p:txBody>
       </p:sp>
@@ -9813,12 +9820,12 @@
   <p:clrMapOvr>
     <a:masterClrMapping/>
   </p:clrMapOvr>
-  <p:transition xmlns:p14="http://schemas.microsoft.com/office/powerpoint/2010/main" spd="med" advClick="1"/>
+  <p:transition spd="med"/>
 </p:sld>
 </file>
 
 <file path=ppt/slides/slide10.xml><?xml version="1.0" encoding="utf-8"?>
-<p:sld xmlns:a="http://schemas.openxmlformats.org/drawingml/2006/main" xmlns:r="http://schemas.openxmlformats.org/officeDocument/2006/relationships" xmlns:p="http://schemas.openxmlformats.org/presentationml/2006/main" xmlns:m="http://schemas.openxmlformats.org/officeDocument/2006/math" xmlns:a14="http://schemas.microsoft.com/office/drawing/2010/main" showMasterSp="1" showMasterPhAnim="1">
+<p:sld xmlns:a="http://schemas.openxmlformats.org/drawingml/2006/main" xmlns:r="http://schemas.openxmlformats.org/officeDocument/2006/relationships" xmlns:p="http://schemas.openxmlformats.org/presentationml/2006/main">
   <p:cSld>
     <p:spTree>
       <p:nvGrpSpPr>
@@ -9837,7 +9844,9 @@
       <p:sp>
         <p:nvSpPr>
           <p:cNvPr id="355" name="Title 1"/>
-          <p:cNvSpPr txBox="1"/>
+          <p:cNvSpPr txBox="1">
+            <a:spLocks noGrp="1"/>
+          </p:cNvSpPr>
           <p:nvPr>
             <p:ph type="title"/>
           </p:nvPr>
@@ -9855,7 +9864,7 @@
           <a:bodyPr/>
           <a:lstStyle>
             <a:lvl1pPr algn="l">
-              <a:defRPr spc="-146" sz="4400">
+              <a:defRPr sz="4400" spc="-146">
                 <a:latin typeface="Times New Roman"/>
                 <a:ea typeface="Times New Roman"/>
                 <a:cs typeface="Times New Roman"/>
@@ -9864,7 +9873,6 @@
             </a:lvl1pPr>
           </a:lstStyle>
           <a:p>
-            <a:pPr/>
             <a:r>
               <a:t>Comparative Analysis</a:t>
             </a:r>
@@ -9881,16 +9889,34 @@
           <a:off x="189188" y="950962"/>
           <a:ext cx="4256689" cy="5465605"/>
         </p:xfrm>
-        <a:graphic xmlns:a="http://schemas.openxmlformats.org/drawingml/2006/main">
+        <a:graphic>
           <a:graphicData uri="http://schemas.openxmlformats.org/drawingml/2006/table">
             <a:tbl>
-              <a:tblPr firstCol="1" firstRow="1" lastCol="0" lastRow="0" bandCol="0" bandRow="1" rtl="0">
+              <a:tblPr firstRow="1" firstCol="1" bandRow="1">
                 <a:tableStyleId>{4C3C2611-4C71-4FC5-86AE-919BDF0F9419}</a:tableStyleId>
               </a:tblPr>
               <a:tblGrid>
-                <a:gridCol w="1481956"/>
-                <a:gridCol w="1355543"/>
-                <a:gridCol w="1419188"/>
+                <a:gridCol w="1481956">
+                  <a:extLst>
+                    <a:ext uri="{9D8B030D-6E8A-4147-A177-3AD203B41FA5}">
+                      <a16:colId xmlns:a16="http://schemas.microsoft.com/office/drawing/2014/main" val="20000"/>
+                    </a:ext>
+                  </a:extLst>
+                </a:gridCol>
+                <a:gridCol w="1355543">
+                  <a:extLst>
+                    <a:ext uri="{9D8B030D-6E8A-4147-A177-3AD203B41FA5}">
+                      <a16:colId xmlns:a16="http://schemas.microsoft.com/office/drawing/2014/main" val="20001"/>
+                    </a:ext>
+                  </a:extLst>
+                </a:gridCol>
+                <a:gridCol w="1419188">
+                  <a:extLst>
+                    <a:ext uri="{9D8B030D-6E8A-4147-A177-3AD203B41FA5}">
+                      <a16:colId xmlns:a16="http://schemas.microsoft.com/office/drawing/2014/main" val="20002"/>
+                    </a:ext>
+                  </a:extLst>
+                </a:gridCol>
               </a:tblGrid>
               <a:tr h="910934">
                 <a:tc>
@@ -9905,14 +9931,14 @@
                         <a:spcBef>
                           <a:spcPts val="600"/>
                         </a:spcBef>
-                        <a:defRPr b="0" spc="0" sz="1800">
+                        <a:defRPr sz="1800" b="0" spc="0">
                           <a:solidFill>
                             <a:srgbClr val="000000"/>
                           </a:solidFill>
                         </a:defRPr>
                       </a:pPr>
                       <a:r>
-                        <a:rPr b="1" sz="1500">
+                        <a:rPr sz="1500" b="1">
                           <a:solidFill>
                             <a:srgbClr val="FFFFFF"/>
                           </a:solidFill>
@@ -9925,7 +9951,7 @@
                       </a:r>
                     </a:p>
                   </a:txBody>
-                  <a:tcPr marL="0" marR="0" marT="0" marB="0" anchor="ctr" anchorCtr="0" horzOverflow="overflow"/>
+                  <a:tcPr marL="0" marR="0" marT="0" marB="0" anchor="ctr" horzOverflow="overflow"/>
                 </a:tc>
                 <a:tc>
                   <a:txBody>
@@ -9939,14 +9965,14 @@
                         <a:spcBef>
                           <a:spcPts val="600"/>
                         </a:spcBef>
-                        <a:defRPr b="0" spc="0" sz="1800">
+                        <a:defRPr sz="1800" b="0" spc="0">
                           <a:solidFill>
                             <a:srgbClr val="000000"/>
                           </a:solidFill>
                         </a:defRPr>
                       </a:pPr>
                       <a:r>
-                        <a:rPr b="1" sz="1500">
+                        <a:rPr sz="1500" b="1">
                           <a:solidFill>
                             <a:srgbClr val="FFFFFF"/>
                           </a:solidFill>
@@ -9959,7 +9985,7 @@
                       </a:r>
                     </a:p>
                   </a:txBody>
-                  <a:tcPr marL="0" marR="0" marT="0" marB="0" anchor="ctr" anchorCtr="0" horzOverflow="overflow"/>
+                  <a:tcPr marL="0" marR="0" marT="0" marB="0" anchor="ctr" horzOverflow="overflow"/>
                 </a:tc>
                 <a:tc>
                   <a:txBody>
@@ -9973,14 +9999,14 @@
                         <a:spcBef>
                           <a:spcPts val="600"/>
                         </a:spcBef>
-                        <a:defRPr b="0" spc="0" sz="1800">
+                        <a:defRPr sz="1800" b="0" spc="0">
                           <a:solidFill>
                             <a:srgbClr val="000000"/>
                           </a:solidFill>
                         </a:defRPr>
                       </a:pPr>
                       <a:r>
-                        <a:rPr b="1" sz="1500">
+                        <a:rPr sz="1500" b="1">
                           <a:solidFill>
                             <a:srgbClr val="FFFFFF"/>
                           </a:solidFill>
@@ -9993,8 +10019,13 @@
                       </a:r>
                     </a:p>
                   </a:txBody>
-                  <a:tcPr marL="0" marR="0" marT="0" marB="0" anchor="ctr" anchorCtr="0" horzOverflow="overflow"/>
+                  <a:tcPr marL="0" marR="0" marT="0" marB="0" anchor="ctr" horzOverflow="overflow"/>
                 </a:tc>
+                <a:extLst>
+                  <a:ext uri="{0D108BD9-81ED-4DB2-BD59-A6C34878D82A}">
+                    <a16:rowId xmlns:a16="http://schemas.microsoft.com/office/drawing/2014/main" val="10000"/>
+                  </a:ext>
+                </a:extLst>
               </a:tr>
               <a:tr h="910934">
                 <a:tc>
@@ -10009,14 +10040,14 @@
                         <a:spcBef>
                           <a:spcPts val="600"/>
                         </a:spcBef>
-                        <a:defRPr b="0" spc="0" sz="1800">
+                        <a:defRPr sz="1800" b="0" spc="0">
                           <a:solidFill>
                             <a:srgbClr val="000000"/>
                           </a:solidFill>
                         </a:defRPr>
                       </a:pPr>
                       <a:r>
-                        <a:rPr b="1" sz="1500">
+                        <a:rPr sz="1500" b="1">
                           <a:solidFill>
                             <a:srgbClr val="FFFFFF"/>
                           </a:solidFill>
@@ -10029,7 +10060,7 @@
                       </a:r>
                     </a:p>
                   </a:txBody>
-                  <a:tcPr marL="0" marR="0" marT="0" marB="0" anchor="ctr" anchorCtr="0" horzOverflow="overflow"/>
+                  <a:tcPr marL="0" marR="0" marT="0" marB="0" anchor="ctr" horzOverflow="overflow"/>
                 </a:tc>
                 <a:tc>
                   <a:txBody>
@@ -10043,7 +10074,7 @@
                         <a:spcBef>
                           <a:spcPts val="600"/>
                         </a:spcBef>
-                        <a:defRPr spc="0" sz="1800"/>
+                        <a:defRPr sz="1800" spc="0"/>
                       </a:pPr>
                       <a:r>
                         <a:rPr sz="1500">
@@ -10056,7 +10087,7 @@
                       </a:r>
                     </a:p>
                   </a:txBody>
-                  <a:tcPr marL="0" marR="0" marT="0" marB="0" anchor="ctr" anchorCtr="0" horzOverflow="overflow"/>
+                  <a:tcPr marL="0" marR="0" marT="0" marB="0" anchor="ctr" horzOverflow="overflow"/>
                 </a:tc>
                 <a:tc>
                   <a:txBody>
@@ -10070,7 +10101,7 @@
                         <a:spcBef>
                           <a:spcPts val="600"/>
                         </a:spcBef>
-                        <a:defRPr spc="0" sz="1800"/>
+                        <a:defRPr sz="1800" spc="0"/>
                       </a:pPr>
                       <a:r>
                         <a:rPr sz="1500">
@@ -10083,8 +10114,13 @@
                       </a:r>
                     </a:p>
                   </a:txBody>
-                  <a:tcPr marL="0" marR="0" marT="0" marB="0" anchor="ctr" anchorCtr="0" horzOverflow="overflow"/>
+                  <a:tcPr marL="0" marR="0" marT="0" marB="0" anchor="ctr" horzOverflow="overflow"/>
                 </a:tc>
+                <a:extLst>
+                  <a:ext uri="{0D108BD9-81ED-4DB2-BD59-A6C34878D82A}">
+                    <a16:rowId xmlns:a16="http://schemas.microsoft.com/office/drawing/2014/main" val="10001"/>
+                  </a:ext>
+                </a:extLst>
               </a:tr>
               <a:tr h="910934">
                 <a:tc>
@@ -10099,14 +10135,14 @@
                         <a:spcBef>
                           <a:spcPts val="600"/>
                         </a:spcBef>
-                        <a:defRPr b="0" spc="0" sz="1800">
+                        <a:defRPr sz="1800" b="0" spc="0">
                           <a:solidFill>
                             <a:srgbClr val="000000"/>
                           </a:solidFill>
                         </a:defRPr>
                       </a:pPr>
                       <a:r>
-                        <a:rPr b="1" sz="1500">
+                        <a:rPr sz="1500" b="1">
                           <a:solidFill>
                             <a:srgbClr val="FFFFFF"/>
                           </a:solidFill>
@@ -10119,7 +10155,7 @@
                       </a:r>
                     </a:p>
                   </a:txBody>
-                  <a:tcPr marL="0" marR="0" marT="0" marB="0" anchor="ctr" anchorCtr="0" horzOverflow="overflow"/>
+                  <a:tcPr marL="0" marR="0" marT="0" marB="0" anchor="ctr" horzOverflow="overflow"/>
                 </a:tc>
                 <a:tc>
                   <a:txBody>
@@ -10133,7 +10169,7 @@
                         <a:spcBef>
                           <a:spcPts val="600"/>
                         </a:spcBef>
-                        <a:defRPr spc="0" sz="1800"/>
+                        <a:defRPr sz="1800" spc="0"/>
                       </a:pPr>
                       <a:r>
                         <a:rPr sz="1500">
@@ -10146,7 +10182,7 @@
                       </a:r>
                     </a:p>
                   </a:txBody>
-                  <a:tcPr marL="0" marR="0" marT="0" marB="0" anchor="ctr" anchorCtr="0" horzOverflow="overflow"/>
+                  <a:tcPr marL="0" marR="0" marT="0" marB="0" anchor="ctr" horzOverflow="overflow"/>
                 </a:tc>
                 <a:tc>
                   <a:txBody>
@@ -10160,7 +10196,7 @@
                         <a:spcBef>
                           <a:spcPts val="600"/>
                         </a:spcBef>
-                        <a:defRPr spc="0" sz="1800"/>
+                        <a:defRPr sz="1800" spc="0"/>
                       </a:pPr>
                       <a:r>
                         <a:rPr sz="1500">
@@ -10173,8 +10209,13 @@
                       </a:r>
                     </a:p>
                   </a:txBody>
-                  <a:tcPr marL="0" marR="0" marT="0" marB="0" anchor="ctr" anchorCtr="0" horzOverflow="overflow"/>
+                  <a:tcPr marL="0" marR="0" marT="0" marB="0" anchor="ctr" horzOverflow="overflow"/>
                 </a:tc>
+                <a:extLst>
+                  <a:ext uri="{0D108BD9-81ED-4DB2-BD59-A6C34878D82A}">
+                    <a16:rowId xmlns:a16="http://schemas.microsoft.com/office/drawing/2014/main" val="10002"/>
+                  </a:ext>
+                </a:extLst>
               </a:tr>
               <a:tr h="910934">
                 <a:tc>
@@ -10189,14 +10230,14 @@
                         <a:spcBef>
                           <a:spcPts val="600"/>
                         </a:spcBef>
-                        <a:defRPr b="0" spc="0" sz="1800">
+                        <a:defRPr sz="1800" b="0" spc="0">
                           <a:solidFill>
                             <a:srgbClr val="000000"/>
                           </a:solidFill>
                         </a:defRPr>
                       </a:pPr>
                       <a:r>
-                        <a:rPr b="1" sz="1500">
+                        <a:rPr sz="1500" b="1">
                           <a:solidFill>
                             <a:srgbClr val="FFFFFF"/>
                           </a:solidFill>
@@ -10209,7 +10250,7 @@
                       </a:r>
                     </a:p>
                   </a:txBody>
-                  <a:tcPr marL="0" marR="0" marT="0" marB="0" anchor="ctr" anchorCtr="0" horzOverflow="overflow"/>
+                  <a:tcPr marL="0" marR="0" marT="0" marB="0" anchor="ctr" horzOverflow="overflow"/>
                 </a:tc>
                 <a:tc>
                   <a:txBody>
@@ -10223,7 +10264,7 @@
                         <a:spcBef>
                           <a:spcPts val="600"/>
                         </a:spcBef>
-                        <a:defRPr spc="0" sz="1800"/>
+                        <a:defRPr sz="1800" spc="0"/>
                       </a:pPr>
                       <a:r>
                         <a:rPr sz="1500">
@@ -10236,7 +10277,7 @@
                       </a:r>
                     </a:p>
                   </a:txBody>
-                  <a:tcPr marL="0" marR="0" marT="0" marB="0" anchor="ctr" anchorCtr="0" horzOverflow="overflow"/>
+                  <a:tcPr marL="0" marR="0" marT="0" marB="0" anchor="ctr" horzOverflow="overflow"/>
                 </a:tc>
                 <a:tc>
                   <a:txBody>
@@ -10250,7 +10291,7 @@
                         <a:spcBef>
                           <a:spcPts val="600"/>
                         </a:spcBef>
-                        <a:defRPr spc="0" sz="1800"/>
+                        <a:defRPr sz="1800" spc="0"/>
                       </a:pPr>
                       <a:r>
                         <a:rPr sz="1500">
@@ -10263,8 +10304,13 @@
                       </a:r>
                     </a:p>
                   </a:txBody>
-                  <a:tcPr marL="0" marR="0" marT="0" marB="0" anchor="ctr" anchorCtr="0" horzOverflow="overflow"/>
+                  <a:tcPr marL="0" marR="0" marT="0" marB="0" anchor="ctr" horzOverflow="overflow"/>
                 </a:tc>
+                <a:extLst>
+                  <a:ext uri="{0D108BD9-81ED-4DB2-BD59-A6C34878D82A}">
+                    <a16:rowId xmlns:a16="http://schemas.microsoft.com/office/drawing/2014/main" val="10003"/>
+                  </a:ext>
+                </a:extLst>
               </a:tr>
               <a:tr h="910934">
                 <a:tc>
@@ -10279,14 +10325,14 @@
                         <a:spcBef>
                           <a:spcPts val="600"/>
                         </a:spcBef>
-                        <a:defRPr b="0" spc="0" sz="1800">
+                        <a:defRPr sz="1800" b="0" spc="0">
                           <a:solidFill>
                             <a:srgbClr val="000000"/>
                           </a:solidFill>
                         </a:defRPr>
                       </a:pPr>
                       <a:r>
-                        <a:rPr b="1" sz="1500">
+                        <a:rPr sz="1500" b="1">
                           <a:solidFill>
                             <a:srgbClr val="FFFFFF"/>
                           </a:solidFill>
@@ -10299,7 +10345,7 @@
                       </a:r>
                     </a:p>
                   </a:txBody>
-                  <a:tcPr marL="0" marR="0" marT="0" marB="0" anchor="ctr" anchorCtr="0" horzOverflow="overflow"/>
+                  <a:tcPr marL="0" marR="0" marT="0" marB="0" anchor="ctr" horzOverflow="overflow"/>
                 </a:tc>
                 <a:tc>
                   <a:txBody>
@@ -10313,7 +10359,7 @@
                         <a:spcBef>
                           <a:spcPts val="600"/>
                         </a:spcBef>
-                        <a:defRPr spc="0" sz="1800"/>
+                        <a:defRPr sz="1800" spc="0"/>
                       </a:pPr>
                       <a:r>
                         <a:rPr sz="1500">
@@ -10326,7 +10372,7 @@
                       </a:r>
                     </a:p>
                   </a:txBody>
-                  <a:tcPr marL="0" marR="0" marT="0" marB="0" anchor="ctr" anchorCtr="0" horzOverflow="overflow"/>
+                  <a:tcPr marL="0" marR="0" marT="0" marB="0" anchor="ctr" horzOverflow="overflow"/>
                 </a:tc>
                 <a:tc>
                   <a:txBody>
@@ -10340,7 +10386,7 @@
                         <a:spcBef>
                           <a:spcPts val="600"/>
                         </a:spcBef>
-                        <a:defRPr spc="0" sz="1800"/>
+                        <a:defRPr sz="1800" spc="0"/>
                       </a:pPr>
                       <a:r>
                         <a:rPr sz="1500">
@@ -10353,8 +10399,13 @@
                       </a:r>
                     </a:p>
                   </a:txBody>
-                  <a:tcPr marL="0" marR="0" marT="0" marB="0" anchor="ctr" anchorCtr="0" horzOverflow="overflow"/>
+                  <a:tcPr marL="0" marR="0" marT="0" marB="0" anchor="ctr" horzOverflow="overflow"/>
                 </a:tc>
+                <a:extLst>
+                  <a:ext uri="{0D108BD9-81ED-4DB2-BD59-A6C34878D82A}">
+                    <a16:rowId xmlns:a16="http://schemas.microsoft.com/office/drawing/2014/main" val="10004"/>
+                  </a:ext>
+                </a:extLst>
               </a:tr>
               <a:tr h="910934">
                 <a:tc>
@@ -10369,14 +10420,14 @@
                         <a:spcBef>
                           <a:spcPts val="600"/>
                         </a:spcBef>
-                        <a:defRPr b="0" spc="0" sz="1800">
+                        <a:defRPr sz="1800" b="0" spc="0">
                           <a:solidFill>
                             <a:srgbClr val="000000"/>
                           </a:solidFill>
                         </a:defRPr>
                       </a:pPr>
                       <a:r>
-                        <a:rPr b="1" sz="1500">
+                        <a:rPr sz="1500" b="1">
                           <a:solidFill>
                             <a:srgbClr val="FFFFFF"/>
                           </a:solidFill>
@@ -10389,7 +10440,7 @@
                       </a:r>
                     </a:p>
                   </a:txBody>
-                  <a:tcPr marL="0" marR="0" marT="0" marB="0" anchor="ctr" anchorCtr="0" horzOverflow="overflow"/>
+                  <a:tcPr marL="0" marR="0" marT="0" marB="0" anchor="ctr" horzOverflow="overflow"/>
                 </a:tc>
                 <a:tc>
                   <a:txBody>
@@ -10403,7 +10454,7 @@
                         <a:spcBef>
                           <a:spcPts val="600"/>
                         </a:spcBef>
-                        <a:defRPr spc="0" sz="1800"/>
+                        <a:defRPr sz="1800" spc="0"/>
                       </a:pPr>
                       <a:r>
                         <a:rPr sz="1500">
@@ -10416,7 +10467,7 @@
                       </a:r>
                     </a:p>
                   </a:txBody>
-                  <a:tcPr marL="0" marR="0" marT="0" marB="0" anchor="ctr" anchorCtr="0" horzOverflow="overflow"/>
+                  <a:tcPr marL="0" marR="0" marT="0" marB="0" anchor="ctr" horzOverflow="overflow"/>
                 </a:tc>
                 <a:tc>
                   <a:txBody>
@@ -10430,7 +10481,7 @@
                         <a:spcBef>
                           <a:spcPts val="600"/>
                         </a:spcBef>
-                        <a:defRPr spc="0" sz="1800"/>
+                        <a:defRPr sz="1800" spc="0"/>
                       </a:pPr>
                       <a:r>
                         <a:rPr sz="1500">
@@ -10443,8 +10494,13 @@
                       </a:r>
                     </a:p>
                   </a:txBody>
-                  <a:tcPr marL="0" marR="0" marT="0" marB="0" anchor="ctr" anchorCtr="0" horzOverflow="overflow"/>
+                  <a:tcPr marL="0" marR="0" marT="0" marB="0" anchor="ctr" horzOverflow="overflow"/>
                 </a:tc>
+                <a:extLst>
+                  <a:ext uri="{0D108BD9-81ED-4DB2-BD59-A6C34878D82A}">
+                    <a16:rowId xmlns:a16="http://schemas.microsoft.com/office/drawing/2014/main" val="10005"/>
+                  </a:ext>
+                </a:extLst>
               </a:tr>
             </a:tbl>
           </a:graphicData>
@@ -10460,16 +10516,34 @@
           <a:off x="4572000" y="950962"/>
           <a:ext cx="4382812" cy="2478037"/>
         </p:xfrm>
-        <a:graphic xmlns:a="http://schemas.openxmlformats.org/drawingml/2006/main">
+        <a:graphic>
           <a:graphicData uri="http://schemas.openxmlformats.org/drawingml/2006/table">
             <a:tbl>
-              <a:tblPr firstCol="1" firstRow="1" lastCol="0" lastRow="0" bandCol="0" bandRow="1" rtl="0">
+              <a:tblPr firstRow="1" firstCol="1" bandRow="1">
                 <a:tableStyleId>{4C3C2611-4C71-4FC5-86AE-919BDF0F9419}</a:tableStyleId>
               </a:tblPr>
               <a:tblGrid>
-                <a:gridCol w="1460336"/>
-                <a:gridCol w="1461238"/>
-                <a:gridCol w="1461238"/>
+                <a:gridCol w="1460336">
+                  <a:extLst>
+                    <a:ext uri="{9D8B030D-6E8A-4147-A177-3AD203B41FA5}">
+                      <a16:colId xmlns:a16="http://schemas.microsoft.com/office/drawing/2014/main" val="20000"/>
+                    </a:ext>
+                  </a:extLst>
+                </a:gridCol>
+                <a:gridCol w="1461238">
+                  <a:extLst>
+                    <a:ext uri="{9D8B030D-6E8A-4147-A177-3AD203B41FA5}">
+                      <a16:colId xmlns:a16="http://schemas.microsoft.com/office/drawing/2014/main" val="20001"/>
+                    </a:ext>
+                  </a:extLst>
+                </a:gridCol>
+                <a:gridCol w="1461238">
+                  <a:extLst>
+                    <a:ext uri="{9D8B030D-6E8A-4147-A177-3AD203B41FA5}">
+                      <a16:colId xmlns:a16="http://schemas.microsoft.com/office/drawing/2014/main" val="20002"/>
+                    </a:ext>
+                  </a:extLst>
+                </a:gridCol>
               </a:tblGrid>
               <a:tr h="826012">
                 <a:tc>
@@ -10484,14 +10558,14 @@
                         <a:spcBef>
                           <a:spcPts val="600"/>
                         </a:spcBef>
-                        <a:defRPr b="0" spc="0" sz="1800">
+                        <a:defRPr sz="1800" b="0" spc="0">
                           <a:solidFill>
                             <a:srgbClr val="000000"/>
                           </a:solidFill>
                         </a:defRPr>
                       </a:pPr>
                       <a:r>
-                        <a:rPr b="1" sz="1500">
+                        <a:rPr sz="1500" b="1">
                           <a:solidFill>
                             <a:srgbClr val="FFFFFF"/>
                           </a:solidFill>
@@ -10504,7 +10578,7 @@
                       </a:r>
                     </a:p>
                   </a:txBody>
-                  <a:tcPr marL="0" marR="0" marT="0" marB="0" anchor="ctr" anchorCtr="0" horzOverflow="overflow"/>
+                  <a:tcPr marL="0" marR="0" marT="0" marB="0" anchor="ctr" horzOverflow="overflow"/>
                 </a:tc>
                 <a:tc>
                   <a:txBody>
@@ -10518,14 +10592,14 @@
                         <a:spcBef>
                           <a:spcPts val="600"/>
                         </a:spcBef>
-                        <a:defRPr b="0" spc="0" sz="1800">
+                        <a:defRPr sz="1800" b="0" spc="0">
                           <a:solidFill>
                             <a:srgbClr val="000000"/>
                           </a:solidFill>
                         </a:defRPr>
                       </a:pPr>
                       <a:r>
-                        <a:rPr b="1" sz="1500">
+                        <a:rPr sz="1500" b="1">
                           <a:solidFill>
                             <a:srgbClr val="FFFFFF"/>
                           </a:solidFill>
@@ -10538,7 +10612,7 @@
                       </a:r>
                     </a:p>
                   </a:txBody>
-                  <a:tcPr marL="0" marR="0" marT="0" marB="0" anchor="ctr" anchorCtr="0" horzOverflow="overflow"/>
+                  <a:tcPr marL="0" marR="0" marT="0" marB="0" anchor="ctr" horzOverflow="overflow"/>
                 </a:tc>
                 <a:tc>
                   <a:txBody>
@@ -10552,14 +10626,14 @@
                         <a:spcBef>
                           <a:spcPts val="600"/>
                         </a:spcBef>
-                        <a:defRPr b="0" spc="0" sz="1800">
+                        <a:defRPr sz="1800" b="0" spc="0">
                           <a:solidFill>
                             <a:srgbClr val="000000"/>
                           </a:solidFill>
                         </a:defRPr>
                       </a:pPr>
                       <a:r>
-                        <a:rPr b="1" sz="1500">
+                        <a:rPr sz="1500" b="1">
                           <a:solidFill>
                             <a:srgbClr val="FFFFFF"/>
                           </a:solidFill>
@@ -10572,8 +10646,13 @@
                       </a:r>
                     </a:p>
                   </a:txBody>
-                  <a:tcPr marL="0" marR="0" marT="0" marB="0" anchor="ctr" anchorCtr="0" horzOverflow="overflow"/>
+                  <a:tcPr marL="0" marR="0" marT="0" marB="0" anchor="ctr" horzOverflow="overflow"/>
                 </a:tc>
+                <a:extLst>
+                  <a:ext uri="{0D108BD9-81ED-4DB2-BD59-A6C34878D82A}">
+                    <a16:rowId xmlns:a16="http://schemas.microsoft.com/office/drawing/2014/main" val="10000"/>
+                  </a:ext>
+                </a:extLst>
               </a:tr>
               <a:tr h="826012">
                 <a:tc>
@@ -10588,14 +10667,14 @@
                         <a:spcBef>
                           <a:spcPts val="600"/>
                         </a:spcBef>
-                        <a:defRPr b="0" spc="0" sz="1800">
+                        <a:defRPr sz="1800" b="0" spc="0">
                           <a:solidFill>
                             <a:srgbClr val="000000"/>
                           </a:solidFill>
                         </a:defRPr>
                       </a:pPr>
                       <a:r>
-                        <a:rPr b="1" sz="1500">
+                        <a:rPr sz="1500" b="1">
                           <a:solidFill>
                             <a:srgbClr val="FFFFFF"/>
                           </a:solidFill>
@@ -10608,7 +10687,7 @@
                       </a:r>
                     </a:p>
                   </a:txBody>
-                  <a:tcPr marL="0" marR="0" marT="0" marB="0" anchor="ctr" anchorCtr="0" horzOverflow="overflow"/>
+                  <a:tcPr marL="0" marR="0" marT="0" marB="0" anchor="ctr" horzOverflow="overflow"/>
                 </a:tc>
                 <a:tc>
                   <a:txBody>
@@ -10622,7 +10701,7 @@
                         <a:spcBef>
                           <a:spcPts val="600"/>
                         </a:spcBef>
-                        <a:defRPr spc="0" sz="1800"/>
+                        <a:defRPr sz="1800" spc="0"/>
                       </a:pPr>
                       <a:r>
                         <a:rPr sz="1500">
@@ -10635,7 +10714,7 @@
                       </a:r>
                     </a:p>
                   </a:txBody>
-                  <a:tcPr marL="0" marR="0" marT="0" marB="0" anchor="ctr" anchorCtr="0" horzOverflow="overflow"/>
+                  <a:tcPr marL="0" marR="0" marT="0" marB="0" anchor="ctr" horzOverflow="overflow"/>
                 </a:tc>
                 <a:tc>
                   <a:txBody>
@@ -10649,7 +10728,7 @@
                         <a:spcBef>
                           <a:spcPts val="600"/>
                         </a:spcBef>
-                        <a:defRPr spc="0" sz="1800"/>
+                        <a:defRPr sz="1800" spc="0"/>
                       </a:pPr>
                       <a:r>
                         <a:rPr sz="1500">
@@ -10662,8 +10741,13 @@
                       </a:r>
                     </a:p>
                   </a:txBody>
-                  <a:tcPr marL="0" marR="0" marT="0" marB="0" anchor="ctr" anchorCtr="0" horzOverflow="overflow"/>
+                  <a:tcPr marL="0" marR="0" marT="0" marB="0" anchor="ctr" horzOverflow="overflow"/>
                 </a:tc>
+                <a:extLst>
+                  <a:ext uri="{0D108BD9-81ED-4DB2-BD59-A6C34878D82A}">
+                    <a16:rowId xmlns:a16="http://schemas.microsoft.com/office/drawing/2014/main" val="10001"/>
+                  </a:ext>
+                </a:extLst>
               </a:tr>
               <a:tr h="826012">
                 <a:tc>
@@ -10678,14 +10762,14 @@
                         <a:spcBef>
                           <a:spcPts val="600"/>
                         </a:spcBef>
-                        <a:defRPr b="0" spc="0" sz="1800">
+                        <a:defRPr sz="1800" b="0" spc="0">
                           <a:solidFill>
                             <a:srgbClr val="000000"/>
                           </a:solidFill>
                         </a:defRPr>
                       </a:pPr>
                       <a:r>
-                        <a:rPr b="1" sz="1500">
+                        <a:rPr sz="1500" b="1">
                           <a:solidFill>
                             <a:srgbClr val="FFFFFF"/>
                           </a:solidFill>
@@ -10698,7 +10782,7 @@
                       </a:r>
                     </a:p>
                   </a:txBody>
-                  <a:tcPr marL="0" marR="0" marT="0" marB="0" anchor="ctr" anchorCtr="0" horzOverflow="overflow"/>
+                  <a:tcPr marL="0" marR="0" marT="0" marB="0" anchor="ctr" horzOverflow="overflow"/>
                 </a:tc>
                 <a:tc>
                   <a:txBody>
@@ -10712,7 +10796,7 @@
                         <a:spcBef>
                           <a:spcPts val="600"/>
                         </a:spcBef>
-                        <a:defRPr spc="0" sz="1800"/>
+                        <a:defRPr sz="1800" spc="0"/>
                       </a:pPr>
                       <a:r>
                         <a:rPr sz="1500">
@@ -10725,7 +10809,7 @@
                       </a:r>
                     </a:p>
                   </a:txBody>
-                  <a:tcPr marL="0" marR="0" marT="0" marB="0" anchor="ctr" anchorCtr="0" horzOverflow="overflow"/>
+                  <a:tcPr marL="0" marR="0" marT="0" marB="0" anchor="ctr" horzOverflow="overflow"/>
                 </a:tc>
                 <a:tc>
                   <a:txBody>
@@ -10739,7 +10823,7 @@
                         <a:spcBef>
                           <a:spcPts val="600"/>
                         </a:spcBef>
-                        <a:defRPr spc="0" sz="1800"/>
+                        <a:defRPr sz="1800" spc="0"/>
                       </a:pPr>
                       <a:r>
                         <a:rPr sz="1500">
@@ -10752,8 +10836,13 @@
                       </a:r>
                     </a:p>
                   </a:txBody>
-                  <a:tcPr marL="0" marR="0" marT="0" marB="0" anchor="ctr" anchorCtr="0" horzOverflow="overflow"/>
+                  <a:tcPr marL="0" marR="0" marT="0" marB="0" anchor="ctr" horzOverflow="overflow"/>
                 </a:tc>
+                <a:extLst>
+                  <a:ext uri="{0D108BD9-81ED-4DB2-BD59-A6C34878D82A}">
+                    <a16:rowId xmlns:a16="http://schemas.microsoft.com/office/drawing/2014/main" val="10002"/>
+                  </a:ext>
+                </a:extLst>
               </a:tr>
             </a:tbl>
           </a:graphicData>
@@ -10769,16 +10858,34 @@
           <a:off x="4565915" y="3859698"/>
           <a:ext cx="4382812" cy="2478037"/>
         </p:xfrm>
-        <a:graphic xmlns:a="http://schemas.openxmlformats.org/drawingml/2006/main">
+        <a:graphic>
           <a:graphicData uri="http://schemas.openxmlformats.org/drawingml/2006/table">
             <a:tbl>
-              <a:tblPr firstCol="1" firstRow="1" lastCol="0" lastRow="0" bandCol="0" bandRow="1" rtl="0">
+              <a:tblPr firstRow="1" firstCol="1" bandRow="1">
                 <a:tableStyleId>{4C3C2611-4C71-4FC5-86AE-919BDF0F9419}</a:tableStyleId>
               </a:tblPr>
               <a:tblGrid>
-                <a:gridCol w="1460335"/>
-                <a:gridCol w="1461238"/>
-                <a:gridCol w="1461238"/>
+                <a:gridCol w="1460335">
+                  <a:extLst>
+                    <a:ext uri="{9D8B030D-6E8A-4147-A177-3AD203B41FA5}">
+                      <a16:colId xmlns:a16="http://schemas.microsoft.com/office/drawing/2014/main" val="20000"/>
+                    </a:ext>
+                  </a:extLst>
+                </a:gridCol>
+                <a:gridCol w="1461238">
+                  <a:extLst>
+                    <a:ext uri="{9D8B030D-6E8A-4147-A177-3AD203B41FA5}">
+                      <a16:colId xmlns:a16="http://schemas.microsoft.com/office/drawing/2014/main" val="20001"/>
+                    </a:ext>
+                  </a:extLst>
+                </a:gridCol>
+                <a:gridCol w="1461238">
+                  <a:extLst>
+                    <a:ext uri="{9D8B030D-6E8A-4147-A177-3AD203B41FA5}">
+                      <a16:colId xmlns:a16="http://schemas.microsoft.com/office/drawing/2014/main" val="20002"/>
+                    </a:ext>
+                  </a:extLst>
+                </a:gridCol>
               </a:tblGrid>
               <a:tr h="619509">
                 <a:tc>
@@ -10793,14 +10900,14 @@
                         <a:spcBef>
                           <a:spcPts val="600"/>
                         </a:spcBef>
-                        <a:defRPr b="0" spc="0" sz="1800">
+                        <a:defRPr sz="1800" b="0" spc="0">
                           <a:solidFill>
                             <a:srgbClr val="000000"/>
                           </a:solidFill>
                         </a:defRPr>
                       </a:pPr>
                       <a:r>
-                        <a:rPr b="1" sz="1500">
+                        <a:rPr sz="1500" b="1">
                           <a:solidFill>
                             <a:srgbClr val="FFFFFF"/>
                           </a:solidFill>
@@ -10813,7 +10920,7 @@
                       </a:r>
                     </a:p>
                   </a:txBody>
-                  <a:tcPr marL="0" marR="0" marT="0" marB="0" anchor="ctr" anchorCtr="0" horzOverflow="overflow"/>
+                  <a:tcPr marL="0" marR="0" marT="0" marB="0" anchor="ctr" horzOverflow="overflow"/>
                 </a:tc>
                 <a:tc>
                   <a:txBody>
@@ -10827,14 +10934,14 @@
                         <a:spcBef>
                           <a:spcPts val="600"/>
                         </a:spcBef>
-                        <a:defRPr b="0" spc="0" sz="1800">
+                        <a:defRPr sz="1800" b="0" spc="0">
                           <a:solidFill>
                             <a:srgbClr val="000000"/>
                           </a:solidFill>
                         </a:defRPr>
                       </a:pPr>
                       <a:r>
-                        <a:rPr b="1" sz="1500">
+                        <a:rPr sz="1500" b="1">
                           <a:solidFill>
                             <a:srgbClr val="FFFFFF"/>
                           </a:solidFill>
@@ -10847,7 +10954,7 @@
                       </a:r>
                     </a:p>
                   </a:txBody>
-                  <a:tcPr marL="0" marR="0" marT="0" marB="0" anchor="ctr" anchorCtr="0" horzOverflow="overflow"/>
+                  <a:tcPr marL="0" marR="0" marT="0" marB="0" anchor="ctr" horzOverflow="overflow"/>
                 </a:tc>
                 <a:tc>
                   <a:txBody>
@@ -10861,14 +10968,14 @@
                         <a:spcBef>
                           <a:spcPts val="600"/>
                         </a:spcBef>
-                        <a:defRPr b="0" spc="0" sz="1800">
+                        <a:defRPr sz="1800" b="0" spc="0">
                           <a:solidFill>
                             <a:srgbClr val="000000"/>
                           </a:solidFill>
                         </a:defRPr>
                       </a:pPr>
                       <a:r>
-                        <a:rPr b="1" sz="1500">
+                        <a:rPr sz="1500" b="1">
                           <a:solidFill>
                             <a:srgbClr val="FFFFFF"/>
                           </a:solidFill>
@@ -10881,8 +10988,13 @@
                       </a:r>
                     </a:p>
                   </a:txBody>
-                  <a:tcPr marL="0" marR="0" marT="0" marB="0" anchor="ctr" anchorCtr="0" horzOverflow="overflow"/>
+                  <a:tcPr marL="0" marR="0" marT="0" marB="0" anchor="ctr" horzOverflow="overflow"/>
                 </a:tc>
+                <a:extLst>
+                  <a:ext uri="{0D108BD9-81ED-4DB2-BD59-A6C34878D82A}">
+                    <a16:rowId xmlns:a16="http://schemas.microsoft.com/office/drawing/2014/main" val="10000"/>
+                  </a:ext>
+                </a:extLst>
               </a:tr>
               <a:tr h="619509">
                 <a:tc>
@@ -10897,14 +11009,14 @@
                         <a:spcBef>
                           <a:spcPts val="600"/>
                         </a:spcBef>
-                        <a:defRPr b="0" spc="0" sz="1800">
+                        <a:defRPr sz="1800" b="0" spc="0">
                           <a:solidFill>
                             <a:srgbClr val="000000"/>
                           </a:solidFill>
                         </a:defRPr>
                       </a:pPr>
                       <a:r>
-                        <a:rPr b="1" sz="1500">
+                        <a:rPr sz="1500" b="1">
                           <a:solidFill>
                             <a:srgbClr val="FFFFFF"/>
                           </a:solidFill>
@@ -10917,7 +11029,7 @@
                       </a:r>
                     </a:p>
                   </a:txBody>
-                  <a:tcPr marL="0" marR="0" marT="0" marB="0" anchor="ctr" anchorCtr="0" horzOverflow="overflow"/>
+                  <a:tcPr marL="0" marR="0" marT="0" marB="0" anchor="ctr" horzOverflow="overflow"/>
                 </a:tc>
                 <a:tc>
                   <a:txBody>
@@ -10931,7 +11043,7 @@
                         <a:spcBef>
                           <a:spcPts val="600"/>
                         </a:spcBef>
-                        <a:defRPr spc="0" sz="1800"/>
+                        <a:defRPr sz="1800" spc="0"/>
                       </a:pPr>
                       <a:r>
                         <a:rPr sz="1500">
@@ -10944,7 +11056,7 @@
                       </a:r>
                     </a:p>
                   </a:txBody>
-                  <a:tcPr marL="0" marR="0" marT="0" marB="0" anchor="ctr" anchorCtr="0" horzOverflow="overflow"/>
+                  <a:tcPr marL="0" marR="0" marT="0" marB="0" anchor="ctr" horzOverflow="overflow"/>
                 </a:tc>
                 <a:tc>
                   <a:txBody>
@@ -10958,7 +11070,7 @@
                         <a:spcBef>
                           <a:spcPts val="600"/>
                         </a:spcBef>
-                        <a:defRPr spc="0" sz="1800"/>
+                        <a:defRPr sz="1800" spc="0"/>
                       </a:pPr>
                       <a:r>
                         <a:rPr sz="1500">
@@ -10971,8 +11083,13 @@
                       </a:r>
                     </a:p>
                   </a:txBody>
-                  <a:tcPr marL="0" marR="0" marT="0" marB="0" anchor="ctr" anchorCtr="0" horzOverflow="overflow"/>
+                  <a:tcPr marL="0" marR="0" marT="0" marB="0" anchor="ctr" horzOverflow="overflow"/>
                 </a:tc>
+                <a:extLst>
+                  <a:ext uri="{0D108BD9-81ED-4DB2-BD59-A6C34878D82A}">
+                    <a16:rowId xmlns:a16="http://schemas.microsoft.com/office/drawing/2014/main" val="10001"/>
+                  </a:ext>
+                </a:extLst>
               </a:tr>
               <a:tr h="619509">
                 <a:tc>
@@ -10987,14 +11104,14 @@
                         <a:spcBef>
                           <a:spcPts val="600"/>
                         </a:spcBef>
-                        <a:defRPr b="0" spc="0" sz="1800">
+                        <a:defRPr sz="1800" b="0" spc="0">
                           <a:solidFill>
                             <a:srgbClr val="000000"/>
                           </a:solidFill>
                         </a:defRPr>
                       </a:pPr>
                       <a:r>
-                        <a:rPr b="1" sz="1500">
+                        <a:rPr sz="1500" b="1">
                           <a:solidFill>
                             <a:srgbClr val="FFFFFF"/>
                           </a:solidFill>
@@ -11007,7 +11124,7 @@
                       </a:r>
                     </a:p>
                   </a:txBody>
-                  <a:tcPr marL="0" marR="0" marT="0" marB="0" anchor="ctr" anchorCtr="0" horzOverflow="overflow"/>
+                  <a:tcPr marL="0" marR="0" marT="0" marB="0" anchor="ctr" horzOverflow="overflow"/>
                 </a:tc>
                 <a:tc>
                   <a:txBody>
@@ -11021,7 +11138,7 @@
                         <a:spcBef>
                           <a:spcPts val="600"/>
                         </a:spcBef>
-                        <a:defRPr spc="0" sz="1800"/>
+                        <a:defRPr sz="1800" spc="0"/>
                       </a:pPr>
                       <a:r>
                         <a:rPr sz="1500">
@@ -11034,7 +11151,7 @@
                       </a:r>
                     </a:p>
                   </a:txBody>
-                  <a:tcPr marL="0" marR="0" marT="0" marB="0" anchor="ctr" anchorCtr="0" horzOverflow="overflow"/>
+                  <a:tcPr marL="0" marR="0" marT="0" marB="0" anchor="ctr" horzOverflow="overflow"/>
                 </a:tc>
                 <a:tc>
                   <a:txBody>
@@ -11048,7 +11165,7 @@
                         <a:spcBef>
                           <a:spcPts val="600"/>
                         </a:spcBef>
-                        <a:defRPr spc="0" sz="1800"/>
+                        <a:defRPr sz="1800" spc="0"/>
                       </a:pPr>
                       <a:r>
                         <a:rPr sz="1500">
@@ -11061,8 +11178,13 @@
                       </a:r>
                     </a:p>
                   </a:txBody>
-                  <a:tcPr marL="0" marR="0" marT="0" marB="0" anchor="ctr" anchorCtr="0" horzOverflow="overflow"/>
+                  <a:tcPr marL="0" marR="0" marT="0" marB="0" anchor="ctr" horzOverflow="overflow"/>
                 </a:tc>
+                <a:extLst>
+                  <a:ext uri="{0D108BD9-81ED-4DB2-BD59-A6C34878D82A}">
+                    <a16:rowId xmlns:a16="http://schemas.microsoft.com/office/drawing/2014/main" val="10002"/>
+                  </a:ext>
+                </a:extLst>
               </a:tr>
               <a:tr h="619509">
                 <a:tc>
@@ -11077,14 +11199,14 @@
                         <a:spcBef>
                           <a:spcPts val="600"/>
                         </a:spcBef>
-                        <a:defRPr b="0" spc="0" sz="1800">
+                        <a:defRPr sz="1800" b="0" spc="0">
                           <a:solidFill>
                             <a:srgbClr val="000000"/>
                           </a:solidFill>
                         </a:defRPr>
                       </a:pPr>
                       <a:r>
-                        <a:rPr b="1" sz="1500">
+                        <a:rPr sz="1500" b="1">
                           <a:solidFill>
                             <a:srgbClr val="FFFFFF"/>
                           </a:solidFill>
@@ -11097,7 +11219,7 @@
                       </a:r>
                     </a:p>
                   </a:txBody>
-                  <a:tcPr marL="0" marR="0" marT="0" marB="0" anchor="ctr" anchorCtr="0" horzOverflow="overflow"/>
+                  <a:tcPr marL="0" marR="0" marT="0" marB="0" anchor="ctr" horzOverflow="overflow"/>
                 </a:tc>
                 <a:tc>
                   <a:txBody>
@@ -11111,7 +11233,7 @@
                         <a:spcBef>
                           <a:spcPts val="600"/>
                         </a:spcBef>
-                        <a:defRPr spc="0" sz="1800"/>
+                        <a:defRPr sz="1800" spc="0"/>
                       </a:pPr>
                       <a:r>
                         <a:rPr sz="1500">
@@ -11124,7 +11246,7 @@
                       </a:r>
                     </a:p>
                   </a:txBody>
-                  <a:tcPr marL="0" marR="0" marT="0" marB="0" anchor="ctr" anchorCtr="0" horzOverflow="overflow"/>
+                  <a:tcPr marL="0" marR="0" marT="0" marB="0" anchor="ctr" horzOverflow="overflow"/>
                 </a:tc>
                 <a:tc>
                   <a:txBody>
@@ -11138,7 +11260,7 @@
                         <a:spcBef>
                           <a:spcPts val="600"/>
                         </a:spcBef>
-                        <a:defRPr spc="0" sz="1800"/>
+                        <a:defRPr sz="1800" spc="0"/>
                       </a:pPr>
                       <a:r>
                         <a:rPr sz="1500">
@@ -11151,8 +11273,13 @@
                       </a:r>
                     </a:p>
                   </a:txBody>
-                  <a:tcPr marL="0" marR="0" marT="0" marB="0" anchor="ctr" anchorCtr="0" horzOverflow="overflow"/>
+                  <a:tcPr marL="0" marR="0" marT="0" marB="0" anchor="ctr" horzOverflow="overflow"/>
                 </a:tc>
+                <a:extLst>
+                  <a:ext uri="{0D108BD9-81ED-4DB2-BD59-A6C34878D82A}">
+                    <a16:rowId xmlns:a16="http://schemas.microsoft.com/office/drawing/2014/main" val="10003"/>
+                  </a:ext>
+                </a:extLst>
               </a:tr>
             </a:tbl>
           </a:graphicData>
@@ -11163,12 +11290,12 @@
   <p:clrMapOvr>
     <a:masterClrMapping/>
   </p:clrMapOvr>
-  <p:transition xmlns:p14="http://schemas.microsoft.com/office/powerpoint/2010/main" spd="med" advClick="1"/>
+  <p:transition spd="med"/>
 </p:sld>
 </file>
 
 <file path=ppt/slides/slide11.xml><?xml version="1.0" encoding="utf-8"?>
-<p:sld xmlns:a="http://schemas.openxmlformats.org/drawingml/2006/main" xmlns:r="http://schemas.openxmlformats.org/officeDocument/2006/relationships" xmlns:p="http://schemas.openxmlformats.org/presentationml/2006/main" xmlns:m="http://schemas.openxmlformats.org/officeDocument/2006/math" xmlns:a14="http://schemas.microsoft.com/office/drawing/2010/main" showMasterSp="1" showMasterPhAnim="1">
+<p:sld xmlns:a="http://schemas.openxmlformats.org/drawingml/2006/main" xmlns:r="http://schemas.openxmlformats.org/officeDocument/2006/relationships" xmlns:p="http://schemas.openxmlformats.org/presentationml/2006/main">
   <p:cSld>
     <p:spTree>
       <p:nvGrpSpPr>
@@ -11187,7 +11314,9 @@
       <p:sp>
         <p:nvSpPr>
           <p:cNvPr id="362" name="Title 1"/>
-          <p:cNvSpPr txBox="1"/>
+          <p:cNvSpPr txBox="1">
+            <a:spLocks noGrp="1"/>
+          </p:cNvSpPr>
           <p:nvPr>
             <p:ph type="title"/>
           </p:nvPr>
@@ -11205,7 +11334,7 @@
           <a:bodyPr/>
           <a:lstStyle>
             <a:lvl1pPr algn="l">
-              <a:defRPr spc="-146" sz="4400">
+              <a:defRPr sz="4400" spc="-146">
                 <a:latin typeface="Times New Roman"/>
                 <a:ea typeface="Times New Roman"/>
                 <a:cs typeface="Times New Roman"/>
@@ -11214,7 +11343,6 @@
             </a:lvl1pPr>
           </a:lstStyle>
           <a:p>
-            <a:pPr/>
             <a:r>
               <a:t>Key Findings</a:t>
             </a:r>
@@ -11224,7 +11352,9 @@
       <p:sp>
         <p:nvSpPr>
           <p:cNvPr id="363" name="Subtitle 2"/>
-          <p:cNvSpPr txBox="1"/>
+          <p:cNvSpPr txBox="1">
+            <a:spLocks noGrp="1"/>
+          </p:cNvSpPr>
           <p:nvPr>
             <p:ph type="body" idx="1"/>
           </p:nvPr>
@@ -11243,7 +11373,7 @@
           <a:lstStyle/>
           <a:p>
             <a:pPr>
-              <a:defRPr spc="-100" sz="2400">
+              <a:defRPr sz="2400" spc="-100">
                 <a:latin typeface="Times New Roman"/>
                 <a:ea typeface="Times New Roman"/>
                 <a:cs typeface="Times New Roman"/>
@@ -11256,7 +11386,7 @@
           </a:p>
           <a:p>
             <a:pPr>
-              <a:defRPr spc="-100" sz="2400">
+              <a:defRPr sz="2400" spc="-100">
                 <a:latin typeface="Times New Roman"/>
                 <a:ea typeface="Times New Roman"/>
                 <a:cs typeface="Times New Roman"/>
@@ -11269,7 +11399,7 @@
           </a:p>
           <a:p>
             <a:pPr>
-              <a:defRPr spc="-100" sz="2400">
+              <a:defRPr sz="2400" spc="-100">
                 <a:latin typeface="Times New Roman"/>
                 <a:ea typeface="Times New Roman"/>
                 <a:cs typeface="Times New Roman"/>
@@ -11282,7 +11412,7 @@
           </a:p>
           <a:p>
             <a:pPr>
-              <a:defRPr spc="-100" sz="2400">
+              <a:defRPr sz="2400" spc="-100">
                 <a:latin typeface="Times New Roman"/>
                 <a:ea typeface="Times New Roman"/>
                 <a:cs typeface="Times New Roman"/>
@@ -11295,7 +11425,7 @@
           </a:p>
           <a:p>
             <a:pPr>
-              <a:defRPr spc="-100" sz="2400">
+              <a:defRPr sz="2400" spc="-100">
                 <a:latin typeface="Times New Roman"/>
                 <a:ea typeface="Times New Roman"/>
                 <a:cs typeface="Times New Roman"/>
@@ -11308,7 +11438,7 @@
           </a:p>
           <a:p>
             <a:pPr>
-              <a:defRPr spc="-100" sz="2400">
+              <a:defRPr sz="2400" spc="-100">
                 <a:latin typeface="Times New Roman"/>
                 <a:ea typeface="Times New Roman"/>
                 <a:cs typeface="Times New Roman"/>
@@ -11326,12 +11456,12 @@
   <p:clrMapOvr>
     <a:masterClrMapping/>
   </p:clrMapOvr>
-  <p:transition xmlns:p14="http://schemas.microsoft.com/office/powerpoint/2010/main" spd="med" advClick="1"/>
+  <p:transition spd="med"/>
 </p:sld>
 </file>
 
 <file path=ppt/slides/slide12.xml><?xml version="1.0" encoding="utf-8"?>
-<p:sld xmlns:a="http://schemas.openxmlformats.org/drawingml/2006/main" xmlns:r="http://schemas.openxmlformats.org/officeDocument/2006/relationships" xmlns:p="http://schemas.openxmlformats.org/presentationml/2006/main" xmlns:m="http://schemas.openxmlformats.org/officeDocument/2006/math" xmlns:a14="http://schemas.microsoft.com/office/drawing/2010/main" showMasterSp="1" showMasterPhAnim="1">
+<p:sld xmlns:a="http://schemas.openxmlformats.org/drawingml/2006/main" xmlns:r="http://schemas.openxmlformats.org/officeDocument/2006/relationships" xmlns:p="http://schemas.openxmlformats.org/presentationml/2006/main">
   <p:cSld>
     <p:spTree>
       <p:nvGrpSpPr>
@@ -11350,7 +11480,9 @@
       <p:sp>
         <p:nvSpPr>
           <p:cNvPr id="367" name="Title 1"/>
-          <p:cNvSpPr txBox="1"/>
+          <p:cNvSpPr txBox="1">
+            <a:spLocks noGrp="1"/>
+          </p:cNvSpPr>
           <p:nvPr>
             <p:ph type="title"/>
           </p:nvPr>
@@ -11368,7 +11500,7 @@
           <a:bodyPr/>
           <a:lstStyle>
             <a:lvl1pPr algn="l">
-              <a:defRPr spc="-146" sz="4400">
+              <a:defRPr sz="4400" spc="-146">
                 <a:latin typeface="Times New Roman"/>
                 <a:ea typeface="Times New Roman"/>
                 <a:cs typeface="Times New Roman"/>
@@ -11377,7 +11509,6 @@
             </a:lvl1pPr>
           </a:lstStyle>
           <a:p>
-            <a:pPr/>
             <a:r>
               <a:t>Conclusion</a:t>
             </a:r>
@@ -11387,7 +11518,9 @@
       <p:sp>
         <p:nvSpPr>
           <p:cNvPr id="368" name="Subtitle 2"/>
-          <p:cNvSpPr txBox="1"/>
+          <p:cNvSpPr txBox="1">
+            <a:spLocks noGrp="1"/>
+          </p:cNvSpPr>
           <p:nvPr>
             <p:ph type="body" idx="1"/>
           </p:nvPr>
@@ -11406,7 +11539,7 @@
           <a:lstStyle/>
           <a:p>
             <a:pPr>
-              <a:defRPr spc="-100" sz="2400">
+              <a:defRPr sz="2400" spc="-100">
                 <a:latin typeface="Times New Roman"/>
                 <a:ea typeface="Times New Roman"/>
                 <a:cs typeface="Times New Roman"/>
@@ -11419,7 +11552,7 @@
           </a:p>
           <a:p>
             <a:pPr>
-              <a:defRPr spc="-100" sz="2400">
+              <a:defRPr sz="2400" spc="-100">
                 <a:latin typeface="Times New Roman"/>
                 <a:ea typeface="Times New Roman"/>
                 <a:cs typeface="Times New Roman"/>
@@ -11432,7 +11565,7 @@
           </a:p>
           <a:p>
             <a:pPr>
-              <a:defRPr spc="-100" sz="2400">
+              <a:defRPr sz="2400" spc="-100">
                 <a:latin typeface="Times New Roman"/>
                 <a:ea typeface="Times New Roman"/>
                 <a:cs typeface="Times New Roman"/>
@@ -11445,7 +11578,7 @@
           </a:p>
           <a:p>
             <a:pPr>
-              <a:defRPr spc="-100" sz="2400">
+              <a:defRPr sz="2400" spc="-100">
                 <a:latin typeface="Times New Roman"/>
                 <a:ea typeface="Times New Roman"/>
                 <a:cs typeface="Times New Roman"/>
@@ -11458,7 +11591,7 @@
           </a:p>
           <a:p>
             <a:pPr>
-              <a:defRPr spc="-100" sz="2400">
+              <a:defRPr sz="2400" spc="-100">
                 <a:latin typeface="Times New Roman"/>
                 <a:ea typeface="Times New Roman"/>
                 <a:cs typeface="Times New Roman"/>
@@ -11471,7 +11604,7 @@
           </a:p>
           <a:p>
             <a:pPr>
-              <a:defRPr spc="-100" sz="2400">
+              <a:defRPr sz="2400" spc="-100">
                 <a:latin typeface="Times New Roman"/>
                 <a:ea typeface="Times New Roman"/>
                 <a:cs typeface="Times New Roman"/>
@@ -11489,12 +11622,12 @@
   <p:clrMapOvr>
     <a:masterClrMapping/>
   </p:clrMapOvr>
-  <p:transition xmlns:p14="http://schemas.microsoft.com/office/powerpoint/2010/main" spd="med" advClick="1"/>
+  <p:transition spd="med"/>
 </p:sld>
 </file>
 
 <file path=ppt/slides/slide13.xml><?xml version="1.0" encoding="utf-8"?>
-<p:sld xmlns:a="http://schemas.openxmlformats.org/drawingml/2006/main" xmlns:r="http://schemas.openxmlformats.org/officeDocument/2006/relationships" xmlns:p="http://schemas.openxmlformats.org/presentationml/2006/main" xmlns:m="http://schemas.openxmlformats.org/officeDocument/2006/math" xmlns:a14="http://schemas.microsoft.com/office/drawing/2010/main" showMasterSp="1" showMasterPhAnim="1">
+<p:sld xmlns:a="http://schemas.openxmlformats.org/drawingml/2006/main" xmlns:r="http://schemas.openxmlformats.org/officeDocument/2006/relationships" xmlns:p="http://schemas.openxmlformats.org/presentationml/2006/main">
   <p:cSld>
     <p:spTree>
       <p:nvGrpSpPr>
@@ -11513,7 +11646,9 @@
       <p:sp>
         <p:nvSpPr>
           <p:cNvPr id="372" name="Title 1"/>
-          <p:cNvSpPr txBox="1"/>
+          <p:cNvSpPr txBox="1">
+            <a:spLocks noGrp="1"/>
+          </p:cNvSpPr>
           <p:nvPr>
             <p:ph type="title"/>
           </p:nvPr>
@@ -11531,7 +11666,7 @@
           <a:bodyPr/>
           <a:lstStyle>
             <a:lvl1pPr algn="l">
-              <a:defRPr spc="-146" sz="4400">
+              <a:defRPr sz="4400" spc="-146">
                 <a:latin typeface="Times New Roman"/>
                 <a:ea typeface="Times New Roman"/>
                 <a:cs typeface="Times New Roman"/>
@@ -11540,7 +11675,6 @@
             </a:lvl1pPr>
           </a:lstStyle>
           <a:p>
-            <a:pPr/>
             <a:r>
               <a:t>Future Scope</a:t>
             </a:r>
@@ -11550,7 +11684,9 @@
       <p:sp>
         <p:nvSpPr>
           <p:cNvPr id="373" name="Subtitle 2"/>
-          <p:cNvSpPr txBox="1"/>
+          <p:cNvSpPr txBox="1">
+            <a:spLocks noGrp="1"/>
+          </p:cNvSpPr>
           <p:nvPr>
             <p:ph type="body" idx="1"/>
           </p:nvPr>
@@ -11569,7 +11705,7 @@
           <a:lstStyle/>
           <a:p>
             <a:pPr>
-              <a:defRPr spc="-100" sz="2400">
+              <a:defRPr sz="2400" spc="-100">
                 <a:latin typeface="Times New Roman"/>
                 <a:ea typeface="Times New Roman"/>
                 <a:cs typeface="Times New Roman"/>
@@ -11582,7 +11718,7 @@
           </a:p>
           <a:p>
             <a:pPr>
-              <a:defRPr spc="-100" sz="2400">
+              <a:defRPr sz="2400" spc="-100">
                 <a:latin typeface="Times New Roman"/>
                 <a:ea typeface="Times New Roman"/>
                 <a:cs typeface="Times New Roman"/>
@@ -11595,7 +11731,7 @@
           </a:p>
           <a:p>
             <a:pPr>
-              <a:defRPr spc="-100" sz="2400">
+              <a:defRPr sz="2400" spc="-100">
                 <a:latin typeface="Times New Roman"/>
                 <a:ea typeface="Times New Roman"/>
                 <a:cs typeface="Times New Roman"/>
@@ -11608,7 +11744,7 @@
           </a:p>
           <a:p>
             <a:pPr>
-              <a:defRPr spc="-100" sz="2400">
+              <a:defRPr sz="2400" spc="-100">
                 <a:latin typeface="Times New Roman"/>
                 <a:ea typeface="Times New Roman"/>
                 <a:cs typeface="Times New Roman"/>
@@ -11621,7 +11757,7 @@
           </a:p>
           <a:p>
             <a:pPr>
-              <a:defRPr spc="-100" sz="2400">
+              <a:defRPr sz="2400" spc="-100">
                 <a:latin typeface="Times New Roman"/>
                 <a:ea typeface="Times New Roman"/>
                 <a:cs typeface="Times New Roman"/>
@@ -11639,12 +11775,12 @@
   <p:clrMapOvr>
     <a:masterClrMapping/>
   </p:clrMapOvr>
-  <p:transition xmlns:p14="http://schemas.microsoft.com/office/powerpoint/2010/main" spd="med" advClick="1"/>
+  <p:transition spd="med"/>
 </p:sld>
 </file>
 
 <file path=ppt/slides/slide14.xml><?xml version="1.0" encoding="utf-8"?>
-<p:sld xmlns:a="http://schemas.openxmlformats.org/drawingml/2006/main" xmlns:r="http://schemas.openxmlformats.org/officeDocument/2006/relationships" xmlns:p="http://schemas.openxmlformats.org/presentationml/2006/main" xmlns:m="http://schemas.openxmlformats.org/officeDocument/2006/math" xmlns:a14="http://schemas.microsoft.com/office/drawing/2010/main" showMasterSp="1" showMasterPhAnim="1">
+<p:sld xmlns:a="http://schemas.openxmlformats.org/drawingml/2006/main" xmlns:r="http://schemas.openxmlformats.org/officeDocument/2006/relationships" xmlns:p="http://schemas.openxmlformats.org/presentationml/2006/main">
   <p:cSld>
     <p:spTree>
       <p:nvGrpSpPr>
@@ -11679,7 +11815,7 @@
           </a:ln>
           <a:extLst>
             <a:ext uri="{C572A759-6A51-4108-AA02-DFA0A04FC94B}">
-              <ma14:wrappingTextBoxFlag xmlns:ma14="http://schemas.microsoft.com/office/mac/drawingml/2011/main" val="1"/>
+              <ma14:wrappingTextBoxFlag xmlns:ma14="http://schemas.microsoft.com/office/mac/drawingml/2011/main" xmlns:a14="http://schemas.microsoft.com/office/drawing/2010/main" xmlns:m="http://schemas.openxmlformats.org/officeDocument/2006/math" xmlns="" val="1"/>
             </a:ext>
           </a:extLst>
         </p:spPr>
@@ -11698,7 +11834,6 @@
             </a:lvl1pPr>
           </a:lstStyle>
           <a:p>
-            <a:pPr/>
             <a:r>
               <a:t>Thank You</a:t>
             </a:r>
@@ -11708,7 +11843,9 @@
       <p:sp>
         <p:nvSpPr>
           <p:cNvPr id="378" name="TextShape 3"/>
-          <p:cNvSpPr txBox="1"/>
+          <p:cNvSpPr txBox="1">
+            <a:spLocks noGrp="1"/>
+          </p:cNvSpPr>
           <p:nvPr>
             <p:ph type="sldNum" sz="quarter" idx="4294967295"/>
           </p:nvPr>
@@ -11723,7 +11860,7 @@
           </a:prstGeom>
           <a:extLst>
             <a:ext uri="{C572A759-6A51-4108-AA02-DFA0A04FC94B}">
-              <ma14:wrappingTextBoxFlag xmlns:ma14="http://schemas.microsoft.com/office/mac/drawingml/2011/main" val="1"/>
+              <ma14:wrappingTextBoxFlag xmlns:ma14="http://schemas.microsoft.com/office/mac/drawingml/2011/main" xmlns:a14="http://schemas.microsoft.com/office/drawing/2010/main" xmlns:m="http://schemas.openxmlformats.org/officeDocument/2006/math" xmlns="" val="1"/>
             </a:ext>
           </a:extLst>
         </p:spPr>
@@ -11739,8 +11876,10 @@
             </a:lvl1pPr>
           </a:lstStyle>
           <a:p>
-            <a:pPr/>
-            <a:fld id="{86CB4B4D-7CA3-9044-876B-883B54F8677D}" type="slidenum"/>
+            <a:fld id="{86CB4B4D-7CA3-9044-876B-883B54F8677D}" type="slidenum">
+              <a:t>14</a:t>
+            </a:fld>
+            <a:endParaRPr/>
           </a:p>
         </p:txBody>
       </p:sp>
@@ -11763,7 +11902,7 @@
           </a:ln>
           <a:extLst>
             <a:ext uri="{C572A759-6A51-4108-AA02-DFA0A04FC94B}">
-              <ma14:wrappingTextBoxFlag xmlns:ma14="http://schemas.microsoft.com/office/mac/drawingml/2011/main" val="1"/>
+              <ma14:wrappingTextBoxFlag xmlns:ma14="http://schemas.microsoft.com/office/mac/drawingml/2011/main" xmlns:a14="http://schemas.microsoft.com/office/drawing/2010/main" xmlns:m="http://schemas.openxmlformats.org/officeDocument/2006/math" xmlns="" val="1"/>
             </a:ext>
           </a:extLst>
         </p:spPr>
@@ -11782,7 +11921,6 @@
             </a:lvl1pPr>
           </a:lstStyle>
           <a:p>
-            <a:pPr/>
             <a:r>
               <a:t>References available in the submitted paper.</a:t>
             </a:r>
@@ -11794,12 +11932,12 @@
   <p:clrMapOvr>
     <a:masterClrMapping/>
   </p:clrMapOvr>
-  <p:transition xmlns:p14="http://schemas.microsoft.com/office/powerpoint/2010/main" spd="med" advClick="1"/>
+  <p:transition spd="med"/>
 </p:sld>
 </file>
 
 <file path=ppt/slides/slide2.xml><?xml version="1.0" encoding="utf-8"?>
-<p:sld xmlns:a="http://schemas.openxmlformats.org/drawingml/2006/main" xmlns:r="http://schemas.openxmlformats.org/officeDocument/2006/relationships" xmlns:p="http://schemas.openxmlformats.org/presentationml/2006/main" xmlns:m="http://schemas.openxmlformats.org/officeDocument/2006/math" xmlns:a14="http://schemas.microsoft.com/office/drawing/2010/main" showMasterSp="1" showMasterPhAnim="1">
+<p:sld xmlns:a="http://schemas.openxmlformats.org/drawingml/2006/main" xmlns:r="http://schemas.openxmlformats.org/officeDocument/2006/relationships" xmlns:p="http://schemas.openxmlformats.org/presentationml/2006/main">
   <p:cSld>
     <p:spTree>
       <p:nvGrpSpPr>
@@ -11818,7 +11956,9 @@
       <p:sp>
         <p:nvSpPr>
           <p:cNvPr id="315" name="Title 1"/>
-          <p:cNvSpPr txBox="1"/>
+          <p:cNvSpPr txBox="1">
+            <a:spLocks noGrp="1"/>
+          </p:cNvSpPr>
           <p:nvPr>
             <p:ph type="title"/>
           </p:nvPr>
@@ -11836,7 +11976,7 @@
           <a:bodyPr/>
           <a:lstStyle>
             <a:lvl1pPr algn="l">
-              <a:defRPr spc="-146" sz="4400">
+              <a:defRPr sz="4400" spc="-146">
                 <a:latin typeface="Times New Roman"/>
                 <a:ea typeface="Times New Roman"/>
                 <a:cs typeface="Times New Roman"/>
@@ -11845,7 +11985,6 @@
             </a:lvl1pPr>
           </a:lstStyle>
           <a:p>
-            <a:pPr/>
             <a:r>
               <a:t>Objective</a:t>
             </a:r>
@@ -11855,7 +11994,9 @@
       <p:sp>
         <p:nvSpPr>
           <p:cNvPr id="316" name="Subtitle 2"/>
-          <p:cNvSpPr txBox="1"/>
+          <p:cNvSpPr txBox="1">
+            <a:spLocks noGrp="1"/>
+          </p:cNvSpPr>
           <p:nvPr>
             <p:ph type="body" idx="1"/>
           </p:nvPr>
@@ -11874,7 +12015,7 @@
           <a:lstStyle/>
           <a:p>
             <a:pPr>
-              <a:defRPr spc="-100" sz="2400">
+              <a:defRPr sz="2400" spc="-100">
                 <a:latin typeface="Times New Roman"/>
                 <a:ea typeface="Times New Roman"/>
                 <a:cs typeface="Times New Roman"/>
@@ -11887,7 +12028,7 @@
           </a:p>
           <a:p>
             <a:pPr>
-              <a:defRPr spc="-100" sz="2400">
+              <a:defRPr sz="2400" spc="-100">
                 <a:latin typeface="Times New Roman"/>
                 <a:ea typeface="Times New Roman"/>
                 <a:cs typeface="Times New Roman"/>
@@ -11900,7 +12041,7 @@
           </a:p>
           <a:p>
             <a:pPr>
-              <a:defRPr spc="-100" sz="2400">
+              <a:defRPr sz="2400" spc="-100">
                 <a:latin typeface="Times New Roman"/>
                 <a:ea typeface="Times New Roman"/>
                 <a:cs typeface="Times New Roman"/>
@@ -11913,7 +12054,7 @@
           </a:p>
           <a:p>
             <a:pPr>
-              <a:defRPr spc="-100" sz="2400">
+              <a:defRPr sz="2400" spc="-100">
                 <a:latin typeface="Times New Roman"/>
                 <a:ea typeface="Times New Roman"/>
                 <a:cs typeface="Times New Roman"/>
@@ -11926,7 +12067,7 @@
           </a:p>
           <a:p>
             <a:pPr>
-              <a:defRPr spc="-100" sz="2400">
+              <a:defRPr sz="2400" spc="-100">
                 <a:latin typeface="Times New Roman"/>
                 <a:ea typeface="Times New Roman"/>
                 <a:cs typeface="Times New Roman"/>
@@ -11944,12 +12085,12 @@
   <p:clrMapOvr>
     <a:masterClrMapping/>
   </p:clrMapOvr>
-  <p:transition xmlns:p14="http://schemas.microsoft.com/office/powerpoint/2010/main" spd="med" advClick="1"/>
+  <p:transition spd="med"/>
 </p:sld>
 </file>
 
 <file path=ppt/slides/slide3.xml><?xml version="1.0" encoding="utf-8"?>
-<p:sld xmlns:a="http://schemas.openxmlformats.org/drawingml/2006/main" xmlns:r="http://schemas.openxmlformats.org/officeDocument/2006/relationships" xmlns:p="http://schemas.openxmlformats.org/presentationml/2006/main" xmlns:m="http://schemas.openxmlformats.org/officeDocument/2006/math" xmlns:a14="http://schemas.microsoft.com/office/drawing/2010/main" showMasterSp="1" showMasterPhAnim="1">
+<p:sld xmlns:a="http://schemas.openxmlformats.org/drawingml/2006/main" xmlns:r="http://schemas.openxmlformats.org/officeDocument/2006/relationships" xmlns:p="http://schemas.openxmlformats.org/presentationml/2006/main">
   <p:cSld>
     <p:spTree>
       <p:nvGrpSpPr>
@@ -11968,7 +12109,9 @@
       <p:sp>
         <p:nvSpPr>
           <p:cNvPr id="320" name="Title 1"/>
-          <p:cNvSpPr txBox="1"/>
+          <p:cNvSpPr txBox="1">
+            <a:spLocks noGrp="1"/>
+          </p:cNvSpPr>
           <p:nvPr>
             <p:ph type="title"/>
           </p:nvPr>
@@ -11986,7 +12129,7 @@
           <a:bodyPr/>
           <a:lstStyle>
             <a:lvl1pPr algn="l">
-              <a:defRPr spc="-146" sz="4400">
+              <a:defRPr sz="4400" spc="-146">
                 <a:latin typeface="Times New Roman"/>
                 <a:ea typeface="Times New Roman"/>
                 <a:cs typeface="Times New Roman"/>
@@ -11995,7 +12138,6 @@
             </a:lvl1pPr>
           </a:lstStyle>
           <a:p>
-            <a:pPr/>
             <a:r>
               <a:t>Background</a:t>
             </a:r>
@@ -12005,7 +12147,9 @@
       <p:sp>
         <p:nvSpPr>
           <p:cNvPr id="321" name="Subtitle 3"/>
-          <p:cNvSpPr txBox="1"/>
+          <p:cNvSpPr txBox="1">
+            <a:spLocks noGrp="1"/>
+          </p:cNvSpPr>
           <p:nvPr>
             <p:ph type="body" idx="1"/>
           </p:nvPr>
@@ -12024,7 +12168,7 @@
           <a:lstStyle/>
           <a:p>
             <a:pPr>
-              <a:defRPr spc="-100" sz="2400">
+              <a:defRPr sz="2400" spc="-100">
                 <a:latin typeface="Times New Roman"/>
                 <a:ea typeface="Times New Roman"/>
                 <a:cs typeface="Times New Roman"/>
@@ -12037,7 +12181,7 @@
           </a:p>
           <a:p>
             <a:pPr>
-              <a:defRPr spc="-100" sz="2400">
+              <a:defRPr sz="2400" spc="-100">
                 <a:latin typeface="Times New Roman"/>
                 <a:ea typeface="Times New Roman"/>
                 <a:cs typeface="Times New Roman"/>
@@ -12050,7 +12194,7 @@
           </a:p>
           <a:p>
             <a:pPr>
-              <a:defRPr spc="-100" sz="2400">
+              <a:defRPr sz="2400" spc="-100">
                 <a:latin typeface="Times New Roman"/>
                 <a:ea typeface="Times New Roman"/>
                 <a:cs typeface="Times New Roman"/>
@@ -12063,7 +12207,7 @@
           </a:p>
           <a:p>
             <a:pPr>
-              <a:defRPr spc="-100" sz="2400">
+              <a:defRPr sz="2400" spc="-100">
                 <a:latin typeface="Times New Roman"/>
                 <a:ea typeface="Times New Roman"/>
                 <a:cs typeface="Times New Roman"/>
@@ -12076,7 +12220,7 @@
           </a:p>
           <a:p>
             <a:pPr>
-              <a:defRPr spc="-100" sz="2400">
+              <a:defRPr sz="2400" spc="-100">
                 <a:latin typeface="Times New Roman"/>
                 <a:ea typeface="Times New Roman"/>
                 <a:cs typeface="Times New Roman"/>
@@ -12089,7 +12233,7 @@
           </a:p>
           <a:p>
             <a:pPr>
-              <a:defRPr spc="-100" sz="2400">
+              <a:defRPr sz="2400" spc="-100">
                 <a:latin typeface="Times New Roman"/>
                 <a:ea typeface="Times New Roman"/>
                 <a:cs typeface="Times New Roman"/>
@@ -12107,12 +12251,12 @@
   <p:clrMapOvr>
     <a:masterClrMapping/>
   </p:clrMapOvr>
-  <p:transition xmlns:p14="http://schemas.microsoft.com/office/powerpoint/2010/main" spd="med" advClick="1"/>
+  <p:transition spd="med"/>
 </p:sld>
 </file>
 
 <file path=ppt/slides/slide4.xml><?xml version="1.0" encoding="utf-8"?>
-<p:sld xmlns:a="http://schemas.openxmlformats.org/drawingml/2006/main" xmlns:r="http://schemas.openxmlformats.org/officeDocument/2006/relationships" xmlns:p="http://schemas.openxmlformats.org/presentationml/2006/main" xmlns:m="http://schemas.openxmlformats.org/officeDocument/2006/math" xmlns:a14="http://schemas.microsoft.com/office/drawing/2010/main" showMasterSp="1" showMasterPhAnim="1">
+<p:sld xmlns:a="http://schemas.openxmlformats.org/drawingml/2006/main" xmlns:r="http://schemas.openxmlformats.org/officeDocument/2006/relationships" xmlns:p="http://schemas.openxmlformats.org/presentationml/2006/main">
   <p:cSld>
     <p:spTree>
       <p:nvGrpSpPr>
@@ -12131,7 +12275,9 @@
       <p:sp>
         <p:nvSpPr>
           <p:cNvPr id="325" name="Title 1"/>
-          <p:cNvSpPr txBox="1"/>
+          <p:cNvSpPr txBox="1">
+            <a:spLocks noGrp="1"/>
+          </p:cNvSpPr>
           <p:nvPr>
             <p:ph type="title"/>
           </p:nvPr>
@@ -12149,7 +12295,7 @@
           <a:bodyPr/>
           <a:lstStyle>
             <a:lvl1pPr algn="l">
-              <a:defRPr spc="-146" sz="4400">
+              <a:defRPr sz="4400" spc="-146">
                 <a:latin typeface="Times New Roman"/>
                 <a:ea typeface="Times New Roman"/>
                 <a:cs typeface="Times New Roman"/>
@@ -12158,7 +12304,6 @@
             </a:lvl1pPr>
           </a:lstStyle>
           <a:p>
-            <a:pPr/>
             <a:r>
               <a:t>Problem Statement</a:t>
             </a:r>
@@ -12168,7 +12313,9 @@
       <p:sp>
         <p:nvSpPr>
           <p:cNvPr id="326" name="Subtitle 3"/>
-          <p:cNvSpPr txBox="1"/>
+          <p:cNvSpPr txBox="1">
+            <a:spLocks noGrp="1"/>
+          </p:cNvSpPr>
           <p:nvPr>
             <p:ph type="body" idx="1"/>
           </p:nvPr>
@@ -12190,7 +12337,7 @@
               <a:spcBef>
                 <a:spcPts val="500"/>
               </a:spcBef>
-              <a:defRPr spc="-97" sz="2328">
+              <a:defRPr sz="2328" spc="-97">
                 <a:latin typeface="Times New Roman"/>
                 <a:ea typeface="Times New Roman"/>
                 <a:cs typeface="Times New Roman"/>
@@ -12206,7 +12353,7 @@
               <a:spcBef>
                 <a:spcPts val="500"/>
               </a:spcBef>
-              <a:defRPr spc="-97" sz="2328">
+              <a:defRPr sz="2328" spc="-97">
                 <a:latin typeface="Times New Roman"/>
                 <a:ea typeface="Times New Roman"/>
                 <a:cs typeface="Times New Roman"/>
@@ -12222,7 +12369,7 @@
               <a:spcBef>
                 <a:spcPts val="500"/>
               </a:spcBef>
-              <a:defRPr spc="-97" sz="2328">
+              <a:defRPr sz="2328" spc="-97">
                 <a:latin typeface="Times New Roman"/>
                 <a:ea typeface="Times New Roman"/>
                 <a:cs typeface="Times New Roman"/>
@@ -12238,7 +12385,7 @@
               <a:spcBef>
                 <a:spcPts val="500"/>
               </a:spcBef>
-              <a:defRPr spc="-97" sz="2328">
+              <a:defRPr sz="2328" spc="-97">
                 <a:latin typeface="Times New Roman"/>
                 <a:ea typeface="Times New Roman"/>
                 <a:cs typeface="Times New Roman"/>
@@ -12254,7 +12401,7 @@
               <a:spcBef>
                 <a:spcPts val="500"/>
               </a:spcBef>
-              <a:defRPr spc="-97" sz="2328">
+              <a:defRPr sz="2328" spc="-97">
                 <a:latin typeface="Times New Roman"/>
                 <a:ea typeface="Times New Roman"/>
                 <a:cs typeface="Times New Roman"/>
@@ -12266,14 +12413,14 @@
             </a:r>
           </a:p>
           <a:p>
-            <a:pPr lvl="1" marL="564080" indent="-194510" defTabSz="886968">
+            <a:pPr marL="564080" lvl="1" indent="-194510" defTabSz="886968">
               <a:spcBef>
                 <a:spcPts val="400"/>
               </a:spcBef>
               <a:buClrTx/>
               <a:buFontTx/>
               <a:buChar char="•"/>
-              <a:defRPr spc="-97" sz="1940">
+              <a:defRPr sz="1940" spc="-97">
                 <a:latin typeface="Times New Roman"/>
                 <a:ea typeface="Times New Roman"/>
                 <a:cs typeface="Times New Roman"/>
@@ -12283,17 +12430,17 @@
             <a:r>
               <a:t>Strong consistency</a:t>
             </a:r>
-            <a:endParaRPr spc="0" sz="2716"/>
-          </a:p>
-          <a:p>
-            <a:pPr lvl="1" marL="564080" indent="-194510" defTabSz="886968">
+            <a:endParaRPr sz="2716" spc="0"/>
+          </a:p>
+          <a:p>
+            <a:pPr marL="564080" lvl="1" indent="-194510" defTabSz="886968">
               <a:spcBef>
                 <a:spcPts val="400"/>
               </a:spcBef>
               <a:buClrTx/>
               <a:buFontTx/>
               <a:buChar char="•"/>
-              <a:defRPr spc="-97" sz="1940">
+              <a:defRPr sz="1940" spc="-97">
                 <a:latin typeface="Times New Roman"/>
                 <a:ea typeface="Times New Roman"/>
                 <a:cs typeface="Times New Roman"/>
@@ -12303,17 +12450,17 @@
             <a:r>
               <a:t>High availability</a:t>
             </a:r>
-            <a:endParaRPr spc="0" sz="2716"/>
-          </a:p>
-          <a:p>
-            <a:pPr lvl="1" marL="564080" indent="-194510" defTabSz="886968">
+            <a:endParaRPr sz="2716" spc="0"/>
+          </a:p>
+          <a:p>
+            <a:pPr marL="564080" lvl="1" indent="-194510" defTabSz="886968">
               <a:spcBef>
                 <a:spcPts val="400"/>
               </a:spcBef>
               <a:buClrTx/>
               <a:buFontTx/>
               <a:buChar char="•"/>
-              <a:defRPr spc="-97" sz="1940">
+              <a:defRPr sz="1940" spc="-97">
                 <a:latin typeface="Times New Roman"/>
                 <a:ea typeface="Times New Roman"/>
                 <a:cs typeface="Times New Roman"/>
@@ -12323,14 +12470,14 @@
             <a:r>
               <a:t>Fault tolerance</a:t>
             </a:r>
-            <a:endParaRPr spc="0" sz="2716"/>
+            <a:endParaRPr sz="2716" spc="0"/>
           </a:p>
           <a:p>
             <a:pPr marL="332787" indent="-332438" defTabSz="886968">
               <a:spcBef>
                 <a:spcPts val="500"/>
               </a:spcBef>
-              <a:defRPr spc="-97" sz="2328">
+              <a:defRPr sz="2328" spc="-97">
                 <a:latin typeface="Times New Roman"/>
                 <a:ea typeface="Times New Roman"/>
                 <a:cs typeface="Times New Roman"/>
@@ -12348,12 +12495,12 @@
   <p:clrMapOvr>
     <a:masterClrMapping/>
   </p:clrMapOvr>
-  <p:transition xmlns:p14="http://schemas.microsoft.com/office/powerpoint/2010/main" spd="med" advClick="1"/>
+  <p:transition spd="med"/>
 </p:sld>
 </file>
 
 <file path=ppt/slides/slide5.xml><?xml version="1.0" encoding="utf-8"?>
-<p:sld xmlns:a="http://schemas.openxmlformats.org/drawingml/2006/main" xmlns:r="http://schemas.openxmlformats.org/officeDocument/2006/relationships" xmlns:p="http://schemas.openxmlformats.org/presentationml/2006/main" xmlns:m="http://schemas.openxmlformats.org/officeDocument/2006/math" xmlns:a14="http://schemas.microsoft.com/office/drawing/2010/main" showMasterSp="1" showMasterPhAnim="1">
+<p:sld xmlns:a="http://schemas.openxmlformats.org/drawingml/2006/main" xmlns:r="http://schemas.openxmlformats.org/officeDocument/2006/relationships" xmlns:p="http://schemas.openxmlformats.org/presentationml/2006/main">
   <p:cSld>
     <p:spTree>
       <p:nvGrpSpPr>
@@ -12372,7 +12519,9 @@
       <p:sp>
         <p:nvSpPr>
           <p:cNvPr id="330" name="Title 1"/>
-          <p:cNvSpPr txBox="1"/>
+          <p:cNvSpPr txBox="1">
+            <a:spLocks noGrp="1"/>
+          </p:cNvSpPr>
           <p:nvPr>
             <p:ph type="title"/>
           </p:nvPr>
@@ -12390,7 +12539,7 @@
           <a:bodyPr/>
           <a:lstStyle>
             <a:lvl1pPr algn="l">
-              <a:defRPr spc="-146" sz="4400">
+              <a:defRPr sz="4400" spc="-146">
                 <a:latin typeface="Times New Roman"/>
                 <a:ea typeface="Times New Roman"/>
                 <a:cs typeface="Times New Roman"/>
@@ -12399,7 +12548,6 @@
             </a:lvl1pPr>
           </a:lstStyle>
           <a:p>
-            <a:pPr/>
             <a:r>
               <a:t>Methodology</a:t>
             </a:r>
@@ -12409,7 +12557,9 @@
       <p:sp>
         <p:nvSpPr>
           <p:cNvPr id="331" name="Subtitle 2"/>
-          <p:cNvSpPr txBox="1"/>
+          <p:cNvSpPr txBox="1">
+            <a:spLocks noGrp="1"/>
+          </p:cNvSpPr>
           <p:nvPr>
             <p:ph type="body" idx="1"/>
           </p:nvPr>
@@ -12431,7 +12581,7 @@
               <a:spcBef>
                 <a:spcPts val="500"/>
               </a:spcBef>
-              <a:defRPr spc="-96" sz="1919">
+              <a:defRPr sz="1919" spc="-96">
                 <a:latin typeface="Times New Roman"/>
                 <a:ea typeface="Times New Roman"/>
                 <a:cs typeface="Times New Roman"/>
@@ -12447,7 +12597,7 @@
               <a:spcBef>
                 <a:spcPts val="500"/>
               </a:spcBef>
-              <a:defRPr spc="-96" sz="1919">
+              <a:defRPr sz="1919" spc="-96">
                 <a:latin typeface="Times New Roman"/>
                 <a:ea typeface="Times New Roman"/>
                 <a:cs typeface="Times New Roman"/>
@@ -12463,7 +12613,7 @@
               <a:spcBef>
                 <a:spcPts val="500"/>
               </a:spcBef>
-              <a:defRPr spc="-96" sz="1919">
+              <a:defRPr sz="1919" spc="-96">
                 <a:latin typeface="Times New Roman"/>
                 <a:ea typeface="Times New Roman"/>
                 <a:cs typeface="Times New Roman"/>
@@ -12475,14 +12625,14 @@
             </a:r>
           </a:p>
           <a:p>
-            <a:pPr lvl="1" marL="539014" indent="-173254" defTabSz="877823">
+            <a:pPr marL="539014" lvl="1" indent="-173254" defTabSz="877823">
               <a:spcBef>
                 <a:spcPts val="400"/>
               </a:spcBef>
               <a:buClrTx/>
               <a:buFontTx/>
               <a:buChar char="•"/>
-              <a:defRPr spc="-95" sz="1727">
+              <a:defRPr sz="1727" spc="-95">
                 <a:latin typeface="Times New Roman"/>
                 <a:ea typeface="Times New Roman"/>
                 <a:cs typeface="Times New Roman"/>
@@ -12492,17 +12642,17 @@
             <a:r>
               <a:t>IEEE Xplore</a:t>
             </a:r>
-            <a:endParaRPr spc="0" sz="2688"/>
-          </a:p>
-          <a:p>
-            <a:pPr lvl="1" marL="539014" indent="-173254" defTabSz="877823">
+            <a:endParaRPr sz="2688" spc="0"/>
+          </a:p>
+          <a:p>
+            <a:pPr marL="539014" lvl="1" indent="-173254" defTabSz="877823">
               <a:spcBef>
                 <a:spcPts val="400"/>
               </a:spcBef>
               <a:buClrTx/>
               <a:buFontTx/>
               <a:buChar char="•"/>
-              <a:defRPr spc="-95" sz="1727">
+              <a:defRPr sz="1727" spc="-95">
                 <a:latin typeface="Times New Roman"/>
                 <a:ea typeface="Times New Roman"/>
                 <a:cs typeface="Times New Roman"/>
@@ -12512,17 +12662,17 @@
             <a:r>
               <a:t>ACM Digital Library</a:t>
             </a:r>
-            <a:endParaRPr spc="0" sz="2688"/>
-          </a:p>
-          <a:p>
-            <a:pPr lvl="1" marL="539014" indent="-173254" defTabSz="877823">
+            <a:endParaRPr sz="2688" spc="0"/>
+          </a:p>
+          <a:p>
+            <a:pPr marL="539014" lvl="1" indent="-173254" defTabSz="877823">
               <a:spcBef>
                 <a:spcPts val="400"/>
               </a:spcBef>
               <a:buClrTx/>
               <a:buFontTx/>
               <a:buChar char="•"/>
-              <a:defRPr spc="-95" sz="1727">
+              <a:defRPr sz="1727" spc="-95">
                 <a:latin typeface="Times New Roman"/>
                 <a:ea typeface="Times New Roman"/>
                 <a:cs typeface="Times New Roman"/>
@@ -12532,17 +12682,17 @@
             <a:r>
               <a:t>SpringerLink</a:t>
             </a:r>
-            <a:endParaRPr spc="0" sz="2688"/>
-          </a:p>
-          <a:p>
-            <a:pPr lvl="1" marL="539014" indent="-173254" defTabSz="877823">
+            <a:endParaRPr sz="2688" spc="0"/>
+          </a:p>
+          <a:p>
+            <a:pPr marL="539014" lvl="1" indent="-173254" defTabSz="877823">
               <a:spcBef>
                 <a:spcPts val="400"/>
               </a:spcBef>
               <a:buClrTx/>
               <a:buFontTx/>
               <a:buChar char="•"/>
-              <a:defRPr spc="-95" sz="1727">
+              <a:defRPr sz="1727" spc="-95">
                 <a:latin typeface="Times New Roman"/>
                 <a:ea typeface="Times New Roman"/>
                 <a:cs typeface="Times New Roman"/>
@@ -12552,17 +12702,17 @@
             <a:r>
               <a:t>ScienceDirect</a:t>
             </a:r>
-            <a:endParaRPr spc="0" sz="2688"/>
-          </a:p>
-          <a:p>
-            <a:pPr lvl="1" marL="539014" indent="-173254" defTabSz="877823">
+            <a:endParaRPr sz="2688" spc="0"/>
+          </a:p>
+          <a:p>
+            <a:pPr marL="539014" lvl="1" indent="-173254" defTabSz="877823">
               <a:spcBef>
                 <a:spcPts val="400"/>
               </a:spcBef>
               <a:buClrTx/>
               <a:buFontTx/>
               <a:buChar char="•"/>
-              <a:defRPr spc="-95" sz="1727">
+              <a:defRPr sz="1727" spc="-95">
                 <a:latin typeface="Times New Roman"/>
                 <a:ea typeface="Times New Roman"/>
                 <a:cs typeface="Times New Roman"/>
@@ -12579,7 +12729,7 @@
               <a:spcBef>
                 <a:spcPts val="500"/>
               </a:spcBef>
-              <a:defRPr spc="-96" sz="1919">
+              <a:defRPr sz="1919" spc="-96">
                 <a:latin typeface="Times New Roman"/>
                 <a:ea typeface="Times New Roman"/>
                 <a:cs typeface="Times New Roman"/>
@@ -12595,7 +12745,7 @@
               <a:spcBef>
                 <a:spcPts val="500"/>
               </a:spcBef>
-              <a:defRPr spc="-96" sz="1919">
+              <a:defRPr sz="1919" spc="-96">
                 <a:latin typeface="Times New Roman"/>
                 <a:ea typeface="Times New Roman"/>
                 <a:cs typeface="Times New Roman"/>
@@ -12611,7 +12761,7 @@
               <a:spcBef>
                 <a:spcPts val="500"/>
               </a:spcBef>
-              <a:defRPr spc="-96" sz="1919">
+              <a:defRPr sz="1919" spc="-96">
                 <a:latin typeface="Times New Roman"/>
                 <a:ea typeface="Times New Roman"/>
                 <a:cs typeface="Times New Roman"/>
@@ -12627,7 +12777,7 @@
               <a:spcBef>
                 <a:spcPts val="500"/>
               </a:spcBef>
-              <a:defRPr spc="-96" sz="1919">
+              <a:defRPr sz="1919" spc="-96">
                 <a:latin typeface="Times New Roman"/>
                 <a:ea typeface="Times New Roman"/>
                 <a:cs typeface="Times New Roman"/>
@@ -12645,12 +12795,12 @@
   <p:clrMapOvr>
     <a:masterClrMapping/>
   </p:clrMapOvr>
-  <p:transition xmlns:p14="http://schemas.microsoft.com/office/powerpoint/2010/main" spd="med" advClick="1"/>
+  <p:transition spd="med"/>
 </p:sld>
 </file>
 
 <file path=ppt/slides/slide6.xml><?xml version="1.0" encoding="utf-8"?>
-<p:sld xmlns:a="http://schemas.openxmlformats.org/drawingml/2006/main" xmlns:r="http://schemas.openxmlformats.org/officeDocument/2006/relationships" xmlns:p="http://schemas.openxmlformats.org/presentationml/2006/main" xmlns:m="http://schemas.openxmlformats.org/officeDocument/2006/math" xmlns:a14="http://schemas.microsoft.com/office/drawing/2010/main" showMasterSp="1" showMasterPhAnim="1">
+<p:sld xmlns:a="http://schemas.openxmlformats.org/drawingml/2006/main" xmlns:r="http://schemas.openxmlformats.org/officeDocument/2006/relationships" xmlns:p="http://schemas.openxmlformats.org/presentationml/2006/main">
   <p:cSld>
     <p:spTree>
       <p:nvGrpSpPr>
@@ -12669,7 +12819,9 @@
       <p:sp>
         <p:nvSpPr>
           <p:cNvPr id="335" name="Title 1"/>
-          <p:cNvSpPr txBox="1"/>
+          <p:cNvSpPr txBox="1">
+            <a:spLocks noGrp="1"/>
+          </p:cNvSpPr>
           <p:nvPr>
             <p:ph type="title"/>
           </p:nvPr>
@@ -12687,7 +12839,7 @@
           <a:bodyPr/>
           <a:lstStyle>
             <a:lvl1pPr algn="l">
-              <a:defRPr spc="-146" sz="4400">
+              <a:defRPr sz="4400" spc="-146">
                 <a:latin typeface="Times New Roman"/>
                 <a:ea typeface="Times New Roman"/>
                 <a:cs typeface="Times New Roman"/>
@@ -12696,7 +12848,6 @@
             </a:lvl1pPr>
           </a:lstStyle>
           <a:p>
-            <a:pPr/>
             <a:r>
               <a:t>Data Consistency Findings</a:t>
             </a:r>
@@ -12706,7 +12857,9 @@
       <p:sp>
         <p:nvSpPr>
           <p:cNvPr id="336" name="Subtitle 2"/>
-          <p:cNvSpPr txBox="1"/>
+          <p:cNvSpPr txBox="1">
+            <a:spLocks noGrp="1"/>
+          </p:cNvSpPr>
           <p:nvPr>
             <p:ph type="body" idx="1"/>
           </p:nvPr>
@@ -12725,7 +12878,7 @@
           <a:lstStyle/>
           <a:p>
             <a:pPr>
-              <a:defRPr spc="-100" sz="2400">
+              <a:defRPr sz="2400" spc="-100">
                 <a:latin typeface="Times New Roman"/>
                 <a:ea typeface="Times New Roman"/>
                 <a:cs typeface="Times New Roman"/>
@@ -12738,7 +12891,7 @@
           </a:p>
           <a:p>
             <a:pPr>
-              <a:defRPr spc="-100" sz="2400">
+              <a:defRPr sz="2400" spc="-100">
                 <a:latin typeface="Times New Roman"/>
                 <a:ea typeface="Times New Roman"/>
                 <a:cs typeface="Times New Roman"/>
@@ -12751,7 +12904,7 @@
           </a:p>
           <a:p>
             <a:pPr>
-              <a:defRPr spc="-100" sz="2400">
+              <a:defRPr sz="2400" spc="-100">
                 <a:latin typeface="Times New Roman"/>
                 <a:ea typeface="Times New Roman"/>
                 <a:cs typeface="Times New Roman"/>
@@ -12764,7 +12917,7 @@
           </a:p>
           <a:p>
             <a:pPr>
-              <a:defRPr spc="-100" sz="2400">
+              <a:defRPr sz="2400" spc="-100">
                 <a:latin typeface="Times New Roman"/>
                 <a:ea typeface="Times New Roman"/>
                 <a:cs typeface="Times New Roman"/>
@@ -12777,7 +12930,7 @@
           </a:p>
           <a:p>
             <a:pPr>
-              <a:defRPr spc="-100" sz="2400">
+              <a:defRPr sz="2400" spc="-100">
                 <a:latin typeface="Times New Roman"/>
                 <a:ea typeface="Times New Roman"/>
                 <a:cs typeface="Times New Roman"/>
@@ -12790,7 +12943,7 @@
           </a:p>
           <a:p>
             <a:pPr>
-              <a:defRPr spc="-100" sz="2400">
+              <a:defRPr sz="2400" spc="-100">
                 <a:latin typeface="Times New Roman"/>
                 <a:ea typeface="Times New Roman"/>
                 <a:cs typeface="Times New Roman"/>
@@ -12808,12 +12961,12 @@
   <p:clrMapOvr>
     <a:masterClrMapping/>
   </p:clrMapOvr>
-  <p:transition xmlns:p14="http://schemas.microsoft.com/office/powerpoint/2010/main" spd="med" advClick="1"/>
+  <p:transition spd="med"/>
 </p:sld>
 </file>
 
 <file path=ppt/slides/slide7.xml><?xml version="1.0" encoding="utf-8"?>
-<p:sld xmlns:a="http://schemas.openxmlformats.org/drawingml/2006/main" xmlns:r="http://schemas.openxmlformats.org/officeDocument/2006/relationships" xmlns:p="http://schemas.openxmlformats.org/presentationml/2006/main" xmlns:m="http://schemas.openxmlformats.org/officeDocument/2006/math" xmlns:a14="http://schemas.microsoft.com/office/drawing/2010/main" showMasterSp="1" showMasterPhAnim="1">
+<p:sld xmlns:a="http://schemas.openxmlformats.org/drawingml/2006/main" xmlns:r="http://schemas.openxmlformats.org/officeDocument/2006/relationships" xmlns:p="http://schemas.openxmlformats.org/presentationml/2006/main">
   <p:cSld>
     <p:spTree>
       <p:nvGrpSpPr>
@@ -12832,7 +12985,9 @@
       <p:sp>
         <p:nvSpPr>
           <p:cNvPr id="340" name="Title 1"/>
-          <p:cNvSpPr txBox="1"/>
+          <p:cNvSpPr txBox="1">
+            <a:spLocks noGrp="1"/>
+          </p:cNvSpPr>
           <p:nvPr>
             <p:ph type="title"/>
           </p:nvPr>
@@ -12850,7 +13005,7 @@
           <a:bodyPr/>
           <a:lstStyle>
             <a:lvl1pPr algn="l">
-              <a:defRPr spc="-146" sz="4400">
+              <a:defRPr sz="4400" spc="-146">
                 <a:latin typeface="Times New Roman"/>
                 <a:ea typeface="Times New Roman"/>
                 <a:cs typeface="Times New Roman"/>
@@ -12859,7 +13014,6 @@
             </a:lvl1pPr>
           </a:lstStyle>
           <a:p>
-            <a:pPr/>
             <a:r>
               <a:t>Transaction Management</a:t>
             </a:r>
@@ -12869,7 +13023,9 @@
       <p:sp>
         <p:nvSpPr>
           <p:cNvPr id="341" name="Subtitle 2"/>
-          <p:cNvSpPr txBox="1"/>
+          <p:cNvSpPr txBox="1">
+            <a:spLocks noGrp="1"/>
+          </p:cNvSpPr>
           <p:nvPr>
             <p:ph type="body" idx="1"/>
           </p:nvPr>
@@ -12888,7 +13044,7 @@
           <a:lstStyle/>
           <a:p>
             <a:pPr>
-              <a:defRPr spc="-100" sz="2400">
+              <a:defRPr sz="2400" spc="-100">
                 <a:latin typeface="Times New Roman"/>
                 <a:ea typeface="Times New Roman"/>
                 <a:cs typeface="Times New Roman"/>
@@ -12900,14 +13056,14 @@
             </a:r>
           </a:p>
           <a:p>
-            <a:pPr lvl="1" marL="581526" indent="-200526">
+            <a:pPr marL="581526" lvl="1" indent="-200526">
               <a:spcBef>
                 <a:spcPts val="500"/>
               </a:spcBef>
               <a:buClrTx/>
               <a:buFontTx/>
               <a:buChar char="•"/>
-              <a:defRPr spc="-100" sz="2000">
+              <a:defRPr sz="2000" spc="-100">
                 <a:latin typeface="Times New Roman"/>
                 <a:ea typeface="Times New Roman"/>
                 <a:cs typeface="Times New Roman"/>
@@ -12917,17 +13073,17 @@
             <a:r>
               <a:t>Ensures strong consistency and atomic transactions</a:t>
             </a:r>
-            <a:endParaRPr spc="-1" sz="2800"/>
-          </a:p>
-          <a:p>
-            <a:pPr lvl="1" marL="581526" indent="-200526">
+            <a:endParaRPr sz="2800" spc="-1"/>
+          </a:p>
+          <a:p>
+            <a:pPr marL="581526" lvl="1" indent="-200526">
               <a:spcBef>
                 <a:spcPts val="500"/>
               </a:spcBef>
               <a:buClrTx/>
               <a:buFontTx/>
               <a:buChar char="•"/>
-              <a:defRPr spc="-100" sz="2000">
+              <a:defRPr sz="2000" spc="-100">
                 <a:latin typeface="Times New Roman"/>
                 <a:ea typeface="Times New Roman"/>
                 <a:cs typeface="Times New Roman"/>
@@ -12937,17 +13093,17 @@
             <a:r>
               <a:t>Blocking in nature and sensitive to failures</a:t>
             </a:r>
-            <a:endParaRPr spc="-1" sz="2800"/>
-          </a:p>
-          <a:p>
-            <a:pPr lvl="1" marL="581526" indent="-200526">
+            <a:endParaRPr sz="2800" spc="-1"/>
+          </a:p>
+          <a:p>
+            <a:pPr marL="581526" lvl="1" indent="-200526">
               <a:spcBef>
                 <a:spcPts val="500"/>
               </a:spcBef>
               <a:buClrTx/>
               <a:buFontTx/>
               <a:buChar char="•"/>
-              <a:defRPr spc="-100" sz="2000">
+              <a:defRPr sz="2000" spc="-100">
                 <a:latin typeface="Times New Roman"/>
                 <a:ea typeface="Times New Roman"/>
                 <a:cs typeface="Times New Roman"/>
@@ -12957,11 +13113,11 @@
             <a:r>
               <a:t>Reduces system availability in distributed environments</a:t>
             </a:r>
-            <a:endParaRPr spc="-1" sz="2800"/>
+            <a:endParaRPr sz="2800" spc="-1"/>
           </a:p>
           <a:p>
             <a:pPr>
-              <a:defRPr spc="-100" sz="2400">
+              <a:defRPr sz="2400" spc="-100">
                 <a:latin typeface="Times New Roman"/>
                 <a:ea typeface="Times New Roman"/>
                 <a:cs typeface="Times New Roman"/>
@@ -12973,14 +13129,14 @@
             </a:r>
           </a:p>
           <a:p>
-            <a:pPr lvl="1" marL="581526" indent="-200526">
+            <a:pPr marL="581526" lvl="1" indent="-200526">
               <a:spcBef>
                 <a:spcPts val="500"/>
               </a:spcBef>
               <a:buClrTx/>
               <a:buFontTx/>
               <a:buChar char="•"/>
-              <a:defRPr spc="-100" sz="2000">
+              <a:defRPr sz="2000" spc="-100">
                 <a:latin typeface="Times New Roman"/>
                 <a:ea typeface="Times New Roman"/>
                 <a:cs typeface="Times New Roman"/>
@@ -12990,17 +13146,17 @@
             <a:r>
               <a:t>Breaks transactions into smaller local operations</a:t>
             </a:r>
-            <a:endParaRPr spc="-1" sz="2800"/>
-          </a:p>
-          <a:p>
-            <a:pPr lvl="1" marL="581526" indent="-200526">
+            <a:endParaRPr sz="2800" spc="-1"/>
+          </a:p>
+          <a:p>
+            <a:pPr marL="581526" lvl="1" indent="-200526">
               <a:spcBef>
                 <a:spcPts val="500"/>
               </a:spcBef>
               <a:buClrTx/>
               <a:buFontTx/>
               <a:buChar char="•"/>
-              <a:defRPr spc="-100" sz="2000">
+              <a:defRPr sz="2000" spc="-100">
                 <a:latin typeface="Times New Roman"/>
                 <a:ea typeface="Times New Roman"/>
                 <a:cs typeface="Times New Roman"/>
@@ -13010,17 +13166,17 @@
             <a:r>
               <a:t>Uses compensating actions for rollback</a:t>
             </a:r>
-            <a:endParaRPr spc="-1" sz="2800"/>
-          </a:p>
-          <a:p>
-            <a:pPr lvl="1" marL="581526" indent="-200526">
+            <a:endParaRPr sz="2800" spc="-1"/>
+          </a:p>
+          <a:p>
+            <a:pPr marL="581526" lvl="1" indent="-200526">
               <a:spcBef>
                 <a:spcPts val="500"/>
               </a:spcBef>
               <a:buClrTx/>
               <a:buFontTx/>
               <a:buChar char="•"/>
-              <a:defRPr spc="-100" sz="2000">
+              <a:defRPr sz="2000" spc="-100">
                 <a:latin typeface="Times New Roman"/>
                 <a:ea typeface="Times New Roman"/>
                 <a:cs typeface="Times New Roman"/>
@@ -13030,17 +13186,17 @@
             <a:r>
               <a:t>Improves fault tolerance and scalability</a:t>
             </a:r>
-            <a:endParaRPr spc="-1" sz="2800"/>
-          </a:p>
-          <a:p>
-            <a:pPr lvl="1" marL="581526" indent="-200526">
+            <a:endParaRPr sz="2800" spc="-1"/>
+          </a:p>
+          <a:p>
+            <a:pPr marL="581526" lvl="1" indent="-200526">
               <a:spcBef>
                 <a:spcPts val="500"/>
               </a:spcBef>
               <a:buClrTx/>
               <a:buFontTx/>
               <a:buChar char="•"/>
-              <a:defRPr spc="-100" sz="2000">
+              <a:defRPr sz="2000" spc="-100">
                 <a:latin typeface="Times New Roman"/>
                 <a:ea typeface="Times New Roman"/>
                 <a:cs typeface="Times New Roman"/>
@@ -13058,12 +13214,12 @@
   <p:clrMapOvr>
     <a:masterClrMapping/>
   </p:clrMapOvr>
-  <p:transition xmlns:p14="http://schemas.microsoft.com/office/powerpoint/2010/main" spd="med" advClick="1"/>
+  <p:transition spd="med"/>
 </p:sld>
 </file>
 
 <file path=ppt/slides/slide8.xml><?xml version="1.0" encoding="utf-8"?>
-<p:sld xmlns:a="http://schemas.openxmlformats.org/drawingml/2006/main" xmlns:r="http://schemas.openxmlformats.org/officeDocument/2006/relationships" xmlns:p="http://schemas.openxmlformats.org/presentationml/2006/main" xmlns:m="http://schemas.openxmlformats.org/officeDocument/2006/math" xmlns:a14="http://schemas.microsoft.com/office/drawing/2010/main" showMasterSp="1" showMasterPhAnim="1">
+<p:sld xmlns:a="http://schemas.openxmlformats.org/drawingml/2006/main" xmlns:r="http://schemas.openxmlformats.org/officeDocument/2006/relationships" xmlns:p="http://schemas.openxmlformats.org/presentationml/2006/main">
   <p:cSld>
     <p:spTree>
       <p:nvGrpSpPr>
@@ -13082,7 +13238,9 @@
       <p:sp>
         <p:nvSpPr>
           <p:cNvPr id="345" name="Title 1"/>
-          <p:cNvSpPr txBox="1"/>
+          <p:cNvSpPr txBox="1">
+            <a:spLocks noGrp="1"/>
+          </p:cNvSpPr>
           <p:nvPr>
             <p:ph type="title"/>
           </p:nvPr>
@@ -13100,7 +13258,7 @@
           <a:bodyPr/>
           <a:lstStyle>
             <a:lvl1pPr algn="l">
-              <a:defRPr spc="-146" sz="4400">
+              <a:defRPr sz="4400" spc="-146">
                 <a:latin typeface="Times New Roman"/>
                 <a:ea typeface="Times New Roman"/>
                 <a:cs typeface="Times New Roman"/>
@@ -13109,7 +13267,6 @@
             </a:lvl1pPr>
           </a:lstStyle>
           <a:p>
-            <a:pPr/>
             <a:r>
               <a:t>Fault Tolerance Challenges</a:t>
             </a:r>
@@ -13119,7 +13276,9 @@
       <p:sp>
         <p:nvSpPr>
           <p:cNvPr id="346" name="Subtitle 2"/>
-          <p:cNvSpPr txBox="1"/>
+          <p:cNvSpPr txBox="1">
+            <a:spLocks noGrp="1"/>
+          </p:cNvSpPr>
           <p:nvPr>
             <p:ph type="body" idx="1"/>
           </p:nvPr>
@@ -13138,7 +13297,7 @@
           <a:lstStyle/>
           <a:p>
             <a:pPr>
-              <a:defRPr spc="-100" sz="2400">
+              <a:defRPr sz="2400" spc="-100">
                 <a:latin typeface="Times New Roman"/>
                 <a:ea typeface="Times New Roman"/>
                 <a:cs typeface="Times New Roman"/>
@@ -13151,7 +13310,7 @@
           </a:p>
           <a:p>
             <a:pPr>
-              <a:defRPr spc="-100" sz="2400">
+              <a:defRPr sz="2400" spc="-100">
                 <a:latin typeface="Times New Roman"/>
                 <a:ea typeface="Times New Roman"/>
                 <a:cs typeface="Times New Roman"/>
@@ -13164,7 +13323,7 @@
           </a:p>
           <a:p>
             <a:pPr>
-              <a:defRPr spc="-100" sz="2400">
+              <a:defRPr sz="2400" spc="-100">
                 <a:latin typeface="Times New Roman"/>
                 <a:ea typeface="Times New Roman"/>
                 <a:cs typeface="Times New Roman"/>
@@ -13177,7 +13336,7 @@
           </a:p>
           <a:p>
             <a:pPr>
-              <a:defRPr spc="-100" sz="2400">
+              <a:defRPr sz="2400" spc="-100">
                 <a:latin typeface="Times New Roman"/>
                 <a:ea typeface="Times New Roman"/>
                 <a:cs typeface="Times New Roman"/>
@@ -13190,7 +13349,7 @@
           </a:p>
           <a:p>
             <a:pPr>
-              <a:defRPr spc="-100" sz="2400">
+              <a:defRPr sz="2400" spc="-100">
                 <a:latin typeface="Times New Roman"/>
                 <a:ea typeface="Times New Roman"/>
                 <a:cs typeface="Times New Roman"/>
@@ -13208,12 +13367,12 @@
   <p:clrMapOvr>
     <a:masterClrMapping/>
   </p:clrMapOvr>
-  <p:transition xmlns:p14="http://schemas.microsoft.com/office/powerpoint/2010/main" spd="med" advClick="1"/>
+  <p:transition spd="med"/>
 </p:sld>
 </file>
 
 <file path=ppt/slides/slide9.xml><?xml version="1.0" encoding="utf-8"?>
-<p:sld xmlns:a="http://schemas.openxmlformats.org/drawingml/2006/main" xmlns:r="http://schemas.openxmlformats.org/officeDocument/2006/relationships" xmlns:p="http://schemas.openxmlformats.org/presentationml/2006/main" xmlns:m="http://schemas.openxmlformats.org/officeDocument/2006/math" xmlns:a14="http://schemas.microsoft.com/office/drawing/2010/main" showMasterSp="1" showMasterPhAnim="1">
+<p:sld xmlns:a="http://schemas.openxmlformats.org/drawingml/2006/main" xmlns:r="http://schemas.openxmlformats.org/officeDocument/2006/relationships" xmlns:p="http://schemas.openxmlformats.org/presentationml/2006/main">
   <p:cSld>
     <p:spTree>
       <p:nvGrpSpPr>
@@ -13232,7 +13391,9 @@
       <p:sp>
         <p:nvSpPr>
           <p:cNvPr id="350" name="Title 1"/>
-          <p:cNvSpPr txBox="1"/>
+          <p:cNvSpPr txBox="1">
+            <a:spLocks noGrp="1"/>
+          </p:cNvSpPr>
           <p:nvPr>
             <p:ph type="title"/>
           </p:nvPr>
@@ -13250,7 +13411,7 @@
           <a:bodyPr/>
           <a:lstStyle>
             <a:lvl1pPr algn="l">
-              <a:defRPr spc="-146" sz="4400">
+              <a:defRPr sz="4400" spc="-146">
                 <a:latin typeface="Times New Roman"/>
                 <a:ea typeface="Times New Roman"/>
                 <a:cs typeface="Times New Roman"/>
@@ -13259,7 +13420,6 @@
             </a:lvl1pPr>
           </a:lstStyle>
           <a:p>
-            <a:pPr/>
             <a:r>
               <a:t>Fault Tolerance Mechanisms </a:t>
             </a:r>
@@ -13269,7 +13429,9 @@
       <p:sp>
         <p:nvSpPr>
           <p:cNvPr id="351" name="Subtitle 2"/>
-          <p:cNvSpPr txBox="1"/>
+          <p:cNvSpPr txBox="1">
+            <a:spLocks noGrp="1"/>
+          </p:cNvSpPr>
           <p:nvPr>
             <p:ph type="body" idx="1"/>
           </p:nvPr>
@@ -13288,7 +13450,7 @@
           <a:lstStyle/>
           <a:p>
             <a:pPr>
-              <a:defRPr spc="-100" sz="2400">
+              <a:defRPr sz="2400" spc="-100">
                 <a:latin typeface="Times New Roman"/>
                 <a:ea typeface="Times New Roman"/>
                 <a:cs typeface="Times New Roman"/>
@@ -13301,7 +13463,7 @@
           </a:p>
           <a:p>
             <a:pPr>
-              <a:defRPr spc="-100" sz="2400">
+              <a:defRPr sz="2400" spc="-100">
                 <a:latin typeface="Times New Roman"/>
                 <a:ea typeface="Times New Roman"/>
                 <a:cs typeface="Times New Roman"/>
@@ -13314,7 +13476,7 @@
           </a:p>
           <a:p>
             <a:pPr>
-              <a:defRPr spc="-100" sz="2400">
+              <a:defRPr sz="2400" spc="-100">
                 <a:latin typeface="Times New Roman"/>
                 <a:ea typeface="Times New Roman"/>
                 <a:cs typeface="Times New Roman"/>
@@ -13327,7 +13489,7 @@
           </a:p>
           <a:p>
             <a:pPr>
-              <a:defRPr spc="-100" sz="2400">
+              <a:defRPr sz="2400" spc="-100">
                 <a:latin typeface="Times New Roman"/>
                 <a:ea typeface="Times New Roman"/>
                 <a:cs typeface="Times New Roman"/>
@@ -13340,7 +13502,7 @@
           </a:p>
           <a:p>
             <a:pPr>
-              <a:defRPr spc="-100" sz="2400">
+              <a:defRPr sz="2400" spc="-100">
                 <a:latin typeface="Times New Roman"/>
                 <a:ea typeface="Times New Roman"/>
                 <a:cs typeface="Times New Roman"/>
@@ -13353,7 +13515,7 @@
           </a:p>
           <a:p>
             <a:pPr>
-              <a:defRPr spc="-100" sz="2400">
+              <a:defRPr sz="2400" spc="-100">
                 <a:latin typeface="Times New Roman"/>
                 <a:ea typeface="Times New Roman"/>
                 <a:cs typeface="Times New Roman"/>
@@ -13371,12 +13533,12 @@
   <p:clrMapOvr>
     <a:masterClrMapping/>
   </p:clrMapOvr>
-  <p:transition xmlns:p14="http://schemas.microsoft.com/office/powerpoint/2010/main" spd="med" advClick="1"/>
+  <p:transition spd="med"/>
 </p:sld>
 </file>
 
 <file path=ppt/theme/theme1.xml><?xml version="1.0" encoding="utf-8"?>
-<a:theme xmlns:a="http://schemas.openxmlformats.org/drawingml/2006/main" xmlns:r="http://schemas.openxmlformats.org/officeDocument/2006/relationships" name="Office Theme">
+<a:theme xmlns:a="http://schemas.openxmlformats.org/drawingml/2006/main" name="Office Theme">
   <a:themeElements>
     <a:clrScheme name="Office Theme">
       <a:dk1>
@@ -13502,7 +13664,7 @@
       <a:effectStyleLst>
         <a:effectStyle>
           <a:effectLst>
-            <a:outerShdw sx="100000" sy="100000" kx="0" ky="0" algn="b" rotWithShape="0" blurRad="38100" dist="23000" dir="5400000">
+            <a:outerShdw blurRad="38100" dist="23000" dir="5400000" rotWithShape="0">
               <a:srgbClr val="000000">
                 <a:alpha val="35000"/>
               </a:srgbClr>
@@ -13511,7 +13673,7 @@
         </a:effectStyle>
         <a:effectStyle>
           <a:effectLst>
-            <a:outerShdw sx="100000" sy="100000" kx="0" ky="0" algn="b" rotWithShape="0" blurRad="38100" dist="23000" dir="5400000">
+            <a:outerShdw blurRad="38100" dist="23000" dir="5400000" rotWithShape="0">
               <a:srgbClr val="000000">
                 <a:alpha val="35000"/>
               </a:srgbClr>
@@ -13520,7 +13682,7 @@
         </a:effectStyle>
         <a:effectStyle>
           <a:effectLst>
-            <a:outerShdw sx="100000" sy="100000" kx="0" ky="0" algn="b" rotWithShape="0" blurRad="38100" dist="20000" dir="5400000">
+            <a:outerShdw blurRad="38100" dist="20000" dir="5400000" rotWithShape="0">
               <a:srgbClr val="000000">
                 <a:alpha val="38000"/>
               </a:srgbClr>
@@ -13594,7 +13756,7 @@
           <a:miter lim="800000"/>
         </a:ln>
         <a:effectLst>
-          <a:outerShdw sx="100000" sy="100000" kx="0" ky="0" algn="b" rotWithShape="0" blurRad="38100" dist="23000" dir="5400000">
+          <a:outerShdw blurRad="38100" dist="23000" dir="5400000" rotWithShape="0">
             <a:srgbClr val="000000">
               <a:alpha val="35000"/>
             </a:srgbClr>
@@ -13602,7 +13764,7 @@
         </a:effectLst>
         <a:sp3d/>
       </a:spPr>
-      <a:bodyPr rot="0" spcFirstLastPara="1" vertOverflow="overflow" horzOverflow="overflow" vert="horz" wrap="square" lIns="45719" tIns="45719" rIns="45719" bIns="45719" numCol="1" spcCol="38100" rtlCol="0" anchor="ctr" upright="0">
+      <a:bodyPr rot="0" spcFirstLastPara="1" vertOverflow="overflow" horzOverflow="overflow" vert="horz" wrap="square" lIns="45719" tIns="45719" rIns="45719" bIns="45719" numCol="1" spcCol="38100" rtlCol="0" anchor="ctr">
         <a:spAutoFit/>
       </a:bodyPr>
       <a:lstStyle>
@@ -13621,7 +13783,7 @@
           <a:buFontTx/>
           <a:buNone/>
           <a:tabLst/>
-          <a:defRPr b="0" baseline="0" cap="none" i="0" spc="0" strike="noStrike" sz="1800" u="none" kumimoji="0" normalizeH="0">
+          <a:defRPr kumimoji="0" sz="1800" b="0" i="0" u="none" strike="noStrike" cap="none" spc="0" normalizeH="0" baseline="0">
             <a:ln>
               <a:noFill/>
             </a:ln>
@@ -13651,7 +13813,7 @@
           <a:buFontTx/>
           <a:buNone/>
           <a:tabLst/>
-          <a:defRPr b="0" baseline="0" cap="none" i="0" spc="0" strike="noStrike" sz="1800" u="none" kumimoji="0" normalizeH="0">
+          <a:defRPr kumimoji="0" sz="1800" b="0" i="0" u="none" strike="noStrike" cap="none" spc="0" normalizeH="0" baseline="0">
             <a:ln>
               <a:noFill/>
             </a:ln>
@@ -13677,7 +13839,7 @@
           <a:buFontTx/>
           <a:buNone/>
           <a:tabLst/>
-          <a:defRPr b="0" baseline="0" cap="none" i="0" spc="0" strike="noStrike" sz="1800" u="none" kumimoji="0" normalizeH="0">
+          <a:defRPr kumimoji="0" sz="1800" b="0" i="0" u="none" strike="noStrike" cap="none" spc="0" normalizeH="0" baseline="0">
             <a:ln>
               <a:noFill/>
             </a:ln>
@@ -13703,7 +13865,7 @@
           <a:buFontTx/>
           <a:buNone/>
           <a:tabLst/>
-          <a:defRPr b="0" baseline="0" cap="none" i="0" spc="0" strike="noStrike" sz="1800" u="none" kumimoji="0" normalizeH="0">
+          <a:defRPr kumimoji="0" sz="1800" b="0" i="0" u="none" strike="noStrike" cap="none" spc="0" normalizeH="0" baseline="0">
             <a:ln>
               <a:noFill/>
             </a:ln>
@@ -13729,7 +13891,7 @@
           <a:buFontTx/>
           <a:buNone/>
           <a:tabLst/>
-          <a:defRPr b="0" baseline="0" cap="none" i="0" spc="0" strike="noStrike" sz="1800" u="none" kumimoji="0" normalizeH="0">
+          <a:defRPr kumimoji="0" sz="1800" b="0" i="0" u="none" strike="noStrike" cap="none" spc="0" normalizeH="0" baseline="0">
             <a:ln>
               <a:noFill/>
             </a:ln>
@@ -13755,7 +13917,7 @@
           <a:buFontTx/>
           <a:buNone/>
           <a:tabLst/>
-          <a:defRPr b="0" baseline="0" cap="none" i="0" spc="0" strike="noStrike" sz="1800" u="none" kumimoji="0" normalizeH="0">
+          <a:defRPr kumimoji="0" sz="1800" b="0" i="0" u="none" strike="noStrike" cap="none" spc="0" normalizeH="0" baseline="0">
             <a:ln>
               <a:noFill/>
             </a:ln>
@@ -13781,7 +13943,7 @@
           <a:buFontTx/>
           <a:buNone/>
           <a:tabLst/>
-          <a:defRPr b="0" baseline="0" cap="none" i="0" spc="0" strike="noStrike" sz="1800" u="none" kumimoji="0" normalizeH="0">
+          <a:defRPr kumimoji="0" sz="1800" b="0" i="0" u="none" strike="noStrike" cap="none" spc="0" normalizeH="0" baseline="0">
             <a:ln>
               <a:noFill/>
             </a:ln>
@@ -13807,7 +13969,7 @@
           <a:buFontTx/>
           <a:buNone/>
           <a:tabLst/>
-          <a:defRPr b="0" baseline="0" cap="none" i="0" spc="0" strike="noStrike" sz="1800" u="none" kumimoji="0" normalizeH="0">
+          <a:defRPr kumimoji="0" sz="1800" b="0" i="0" u="none" strike="noStrike" cap="none" spc="0" normalizeH="0" baseline="0">
             <a:ln>
               <a:noFill/>
             </a:ln>
@@ -13833,7 +13995,7 @@
           <a:buFontTx/>
           <a:buNone/>
           <a:tabLst/>
-          <a:defRPr b="0" baseline="0" cap="none" i="0" spc="0" strike="noStrike" sz="1800" u="none" kumimoji="0" normalizeH="0">
+          <a:defRPr kumimoji="0" sz="1800" b="0" i="0" u="none" strike="noStrike" cap="none" spc="0" normalizeH="0" baseline="0">
             <a:ln>
               <a:noFill/>
             </a:ln>
@@ -13859,7 +14021,7 @@
           <a:buFontTx/>
           <a:buNone/>
           <a:tabLst/>
-          <a:defRPr b="0" baseline="0" cap="none" i="0" spc="0" strike="noStrike" sz="1800" u="none" kumimoji="0" normalizeH="0">
+          <a:defRPr kumimoji="0" sz="1800" b="0" i="0" u="none" strike="noStrike" cap="none" spc="0" normalizeH="0" baseline="0">
             <a:ln>
               <a:noFill/>
             </a:ln>
@@ -13872,9 +14034,15 @@
         </a:lvl9pPr>
       </a:lstStyle>
       <a:style>
-        <a:lnRef idx="0"/>
-        <a:fillRef idx="0"/>
-        <a:effectRef idx="0"/>
+        <a:lnRef idx="0">
+          <a:scrgbClr r="0" g="0" b="0"/>
+        </a:lnRef>
+        <a:fillRef idx="0">
+          <a:scrgbClr r="0" g="0" b="0"/>
+        </a:fillRef>
+        <a:effectRef idx="0">
+          <a:scrgbClr r="0" g="0" b="0"/>
+        </a:effectRef>
         <a:fontRef idx="none"/>
       </a:style>
     </a:spDef>
@@ -13889,7 +14057,7 @@
           <a:miter lim="800000"/>
         </a:ln>
         <a:effectLst>
-          <a:outerShdw sx="100000" sy="100000" kx="0" ky="0" algn="b" rotWithShape="0" blurRad="38100" dist="20000" dir="5400000">
+          <a:outerShdw blurRad="38100" dist="20000" dir="5400000" rotWithShape="0">
             <a:srgbClr val="000000">
               <a:alpha val="38000"/>
             </a:srgbClr>
@@ -13897,7 +14065,7 @@
         </a:effectLst>
         <a:sp3d/>
       </a:spPr>
-      <a:bodyPr rot="0" spcFirstLastPara="1" vertOverflow="overflow" horzOverflow="overflow" vert="horz" wrap="square" lIns="91439" tIns="45719" rIns="91439" bIns="45719" numCol="1" spcCol="38100" rtlCol="0" anchor="t" upright="0">
+      <a:bodyPr rot="0" spcFirstLastPara="1" vertOverflow="overflow" horzOverflow="overflow" vert="horz" wrap="square" lIns="91439" tIns="45719" rIns="91439" bIns="45719" numCol="1" spcCol="38100" rtlCol="0" anchor="t">
         <a:noAutofit/>
       </a:bodyPr>
       <a:lstStyle>
@@ -13916,7 +14084,7 @@
           <a:buFontTx/>
           <a:buNone/>
           <a:tabLst/>
-          <a:defRPr b="0" baseline="0" cap="none" i="0" spc="0" strike="noStrike" sz="1800" u="none" kumimoji="0" normalizeH="0">
+          <a:defRPr kumimoji="0" sz="1800" b="0" i="0" u="none" strike="noStrike" cap="none" spc="0" normalizeH="0" baseline="0">
             <a:ln>
               <a:noFill/>
             </a:ln>
@@ -13942,7 +14110,7 @@
           <a:buFontTx/>
           <a:buNone/>
           <a:tabLst/>
-          <a:defRPr b="0" baseline="0" cap="none" i="0" spc="0" strike="noStrike" sz="1800" u="none" kumimoji="0" normalizeH="0">
+          <a:defRPr kumimoji="0" sz="1800" b="0" i="0" u="none" strike="noStrike" cap="none" spc="0" normalizeH="0" baseline="0">
             <a:ln>
               <a:noFill/>
             </a:ln>
@@ -13968,7 +14136,7 @@
           <a:buFontTx/>
           <a:buNone/>
           <a:tabLst/>
-          <a:defRPr b="0" baseline="0" cap="none" i="0" spc="0" strike="noStrike" sz="1800" u="none" kumimoji="0" normalizeH="0">
+          <a:defRPr kumimoji="0" sz="1800" b="0" i="0" u="none" strike="noStrike" cap="none" spc="0" normalizeH="0" baseline="0">
             <a:ln>
               <a:noFill/>
             </a:ln>
@@ -13994,7 +14162,7 @@
           <a:buFontTx/>
           <a:buNone/>
           <a:tabLst/>
-          <a:defRPr b="0" baseline="0" cap="none" i="0" spc="0" strike="noStrike" sz="1800" u="none" kumimoji="0" normalizeH="0">
+          <a:defRPr kumimoji="0" sz="1800" b="0" i="0" u="none" strike="noStrike" cap="none" spc="0" normalizeH="0" baseline="0">
             <a:ln>
               <a:noFill/>
             </a:ln>
@@ -14020,7 +14188,7 @@
           <a:buFontTx/>
           <a:buNone/>
           <a:tabLst/>
-          <a:defRPr b="0" baseline="0" cap="none" i="0" spc="0" strike="noStrike" sz="1800" u="none" kumimoji="0" normalizeH="0">
+          <a:defRPr kumimoji="0" sz="1800" b="0" i="0" u="none" strike="noStrike" cap="none" spc="0" normalizeH="0" baseline="0">
             <a:ln>
               <a:noFill/>
             </a:ln>
@@ -14046,7 +14214,7 @@
           <a:buFontTx/>
           <a:buNone/>
           <a:tabLst/>
-          <a:defRPr b="0" baseline="0" cap="none" i="0" spc="0" strike="noStrike" sz="1800" u="none" kumimoji="0" normalizeH="0">
+          <a:defRPr kumimoji="0" sz="1800" b="0" i="0" u="none" strike="noStrike" cap="none" spc="0" normalizeH="0" baseline="0">
             <a:ln>
               <a:noFill/>
             </a:ln>
@@ -14072,7 +14240,7 @@
           <a:buFontTx/>
           <a:buNone/>
           <a:tabLst/>
-          <a:defRPr b="0" baseline="0" cap="none" i="0" spc="0" strike="noStrike" sz="1800" u="none" kumimoji="0" normalizeH="0">
+          <a:defRPr kumimoji="0" sz="1800" b="0" i="0" u="none" strike="noStrike" cap="none" spc="0" normalizeH="0" baseline="0">
             <a:ln>
               <a:noFill/>
             </a:ln>
@@ -14098,7 +14266,7 @@
           <a:buFontTx/>
           <a:buNone/>
           <a:tabLst/>
-          <a:defRPr b="0" baseline="0" cap="none" i="0" spc="0" strike="noStrike" sz="1800" u="none" kumimoji="0" normalizeH="0">
+          <a:defRPr kumimoji="0" sz="1800" b="0" i="0" u="none" strike="noStrike" cap="none" spc="0" normalizeH="0" baseline="0">
             <a:ln>
               <a:noFill/>
             </a:ln>
@@ -14124,7 +14292,7 @@
           <a:buFontTx/>
           <a:buNone/>
           <a:tabLst/>
-          <a:defRPr b="0" baseline="0" cap="none" i="0" spc="0" strike="noStrike" sz="1800" u="none" kumimoji="0" normalizeH="0">
+          <a:defRPr kumimoji="0" sz="1800" b="0" i="0" u="none" strike="noStrike" cap="none" spc="0" normalizeH="0" baseline="0">
             <a:ln>
               <a:noFill/>
             </a:ln>
@@ -14150,7 +14318,7 @@
           <a:buFontTx/>
           <a:buNone/>
           <a:tabLst/>
-          <a:defRPr b="0" baseline="0" cap="none" i="0" spc="0" strike="noStrike" sz="1800" u="none" kumimoji="0" normalizeH="0">
+          <a:defRPr kumimoji="0" sz="1800" b="0" i="0" u="none" strike="noStrike" cap="none" spc="0" normalizeH="0" baseline="0">
             <a:ln>
               <a:noFill/>
             </a:ln>
@@ -14163,9 +14331,15 @@
         </a:lvl9pPr>
       </a:lstStyle>
       <a:style>
-        <a:lnRef idx="0"/>
-        <a:fillRef idx="0"/>
-        <a:effectRef idx="0"/>
+        <a:lnRef idx="0">
+          <a:scrgbClr r="0" g="0" b="0"/>
+        </a:lnRef>
+        <a:fillRef idx="0">
+          <a:scrgbClr r="0" g="0" b="0"/>
+        </a:fillRef>
+        <a:effectRef idx="0">
+          <a:scrgbClr r="0" g="0" b="0"/>
+        </a:effectRef>
         <a:fontRef idx="none"/>
       </a:style>
     </a:lnDef>
@@ -14179,7 +14353,7 @@
         <a:effectLst/>
         <a:sp3d/>
       </a:spPr>
-      <a:bodyPr rot="0" spcFirstLastPara="1" vertOverflow="overflow" horzOverflow="overflow" vert="horz" wrap="square" lIns="45719" tIns="45719" rIns="45719" bIns="45719" numCol="1" spcCol="38100" rtlCol="0" anchor="t" upright="0">
+      <a:bodyPr rot="0" spcFirstLastPara="1" vertOverflow="overflow" horzOverflow="overflow" vert="horz" wrap="square" lIns="45719" tIns="45719" rIns="45719" bIns="45719" numCol="1" spcCol="38100" rtlCol="0" anchor="t">
         <a:spAutoFit/>
       </a:bodyPr>
       <a:lstStyle>
@@ -14198,7 +14372,7 @@
           <a:buFontTx/>
           <a:buNone/>
           <a:tabLst/>
-          <a:defRPr b="0" baseline="0" cap="none" i="0" spc="0" strike="noStrike" sz="1800" u="none" kumimoji="0" normalizeH="0">
+          <a:defRPr kumimoji="0" sz="1800" b="0" i="0" u="none" strike="noStrike" cap="none" spc="0" normalizeH="0" baseline="0">
             <a:ln>
               <a:noFill/>
             </a:ln>
@@ -14228,7 +14402,7 @@
           <a:buFontTx/>
           <a:buNone/>
           <a:tabLst/>
-          <a:defRPr b="0" baseline="0" cap="none" i="0" spc="0" strike="noStrike" sz="1800" u="none" kumimoji="0" normalizeH="0">
+          <a:defRPr kumimoji="0" sz="1800" b="0" i="0" u="none" strike="noStrike" cap="none" spc="0" normalizeH="0" baseline="0">
             <a:ln>
               <a:noFill/>
             </a:ln>
@@ -14254,7 +14428,7 @@
           <a:buFontTx/>
           <a:buNone/>
           <a:tabLst/>
-          <a:defRPr b="0" baseline="0" cap="none" i="0" spc="0" strike="noStrike" sz="1800" u="none" kumimoji="0" normalizeH="0">
+          <a:defRPr kumimoji="0" sz="1800" b="0" i="0" u="none" strike="noStrike" cap="none" spc="0" normalizeH="0" baseline="0">
             <a:ln>
               <a:noFill/>
             </a:ln>
@@ -14280,7 +14454,7 @@
           <a:buFontTx/>
           <a:buNone/>
           <a:tabLst/>
-          <a:defRPr b="0" baseline="0" cap="none" i="0" spc="0" strike="noStrike" sz="1800" u="none" kumimoji="0" normalizeH="0">
+          <a:defRPr kumimoji="0" sz="1800" b="0" i="0" u="none" strike="noStrike" cap="none" spc="0" normalizeH="0" baseline="0">
             <a:ln>
               <a:noFill/>
             </a:ln>
@@ -14306,7 +14480,7 @@
           <a:buFontTx/>
           <a:buNone/>
           <a:tabLst/>
-          <a:defRPr b="0" baseline="0" cap="none" i="0" spc="0" strike="noStrike" sz="1800" u="none" kumimoji="0" normalizeH="0">
+          <a:defRPr kumimoji="0" sz="1800" b="0" i="0" u="none" strike="noStrike" cap="none" spc="0" normalizeH="0" baseline="0">
             <a:ln>
               <a:noFill/>
             </a:ln>
@@ -14332,7 +14506,7 @@
           <a:buFontTx/>
           <a:buNone/>
           <a:tabLst/>
-          <a:defRPr b="0" baseline="0" cap="none" i="0" spc="0" strike="noStrike" sz="1800" u="none" kumimoji="0" normalizeH="0">
+          <a:defRPr kumimoji="0" sz="1800" b="0" i="0" u="none" strike="noStrike" cap="none" spc="0" normalizeH="0" baseline="0">
             <a:ln>
               <a:noFill/>
             </a:ln>
@@ -14358,7 +14532,7 @@
           <a:buFontTx/>
           <a:buNone/>
           <a:tabLst/>
-          <a:defRPr b="0" baseline="0" cap="none" i="0" spc="0" strike="noStrike" sz="1800" u="none" kumimoji="0" normalizeH="0">
+          <a:defRPr kumimoji="0" sz="1800" b="0" i="0" u="none" strike="noStrike" cap="none" spc="0" normalizeH="0" baseline="0">
             <a:ln>
               <a:noFill/>
             </a:ln>
@@ -14384,7 +14558,7 @@
           <a:buFontTx/>
           <a:buNone/>
           <a:tabLst/>
-          <a:defRPr b="0" baseline="0" cap="none" i="0" spc="0" strike="noStrike" sz="1800" u="none" kumimoji="0" normalizeH="0">
+          <a:defRPr kumimoji="0" sz="1800" b="0" i="0" u="none" strike="noStrike" cap="none" spc="0" normalizeH="0" baseline="0">
             <a:ln>
               <a:noFill/>
             </a:ln>
@@ -14410,7 +14584,7 @@
           <a:buFontTx/>
           <a:buNone/>
           <a:tabLst/>
-          <a:defRPr b="0" baseline="0" cap="none" i="0" spc="0" strike="noStrike" sz="1800" u="none" kumimoji="0" normalizeH="0">
+          <a:defRPr kumimoji="0" sz="1800" b="0" i="0" u="none" strike="noStrike" cap="none" spc="0" normalizeH="0" baseline="0">
             <a:ln>
               <a:noFill/>
             </a:ln>
@@ -14436,7 +14610,7 @@
           <a:buFontTx/>
           <a:buNone/>
           <a:tabLst/>
-          <a:defRPr b="0" baseline="0" cap="none" i="0" spc="0" strike="noStrike" sz="1800" u="none" kumimoji="0" normalizeH="0">
+          <a:defRPr kumimoji="0" sz="1800" b="0" i="0" u="none" strike="noStrike" cap="none" spc="0" normalizeH="0" baseline="0">
             <a:ln>
               <a:noFill/>
             </a:ln>
@@ -14449,18 +14623,25 @@
         </a:lvl9pPr>
       </a:lstStyle>
       <a:style>
-        <a:lnRef idx="0"/>
-        <a:fillRef idx="0"/>
-        <a:effectRef idx="0"/>
+        <a:lnRef idx="0">
+          <a:scrgbClr r="0" g="0" b="0"/>
+        </a:lnRef>
+        <a:fillRef idx="0">
+          <a:scrgbClr r="0" g="0" b="0"/>
+        </a:fillRef>
+        <a:effectRef idx="0">
+          <a:scrgbClr r="0" g="0" b="0"/>
+        </a:effectRef>
         <a:fontRef idx="none"/>
       </a:style>
     </a:txDef>
   </a:objectDefaults>
+  <a:extraClrSchemeLst/>
 </a:theme>
 </file>
 
 <file path=ppt/theme/theme2.xml><?xml version="1.0" encoding="utf-8"?>
-<a:theme xmlns:a="http://schemas.openxmlformats.org/drawingml/2006/main" xmlns:r="http://schemas.openxmlformats.org/officeDocument/2006/relationships" name="Office Theme">
+<a:theme xmlns:a="http://schemas.openxmlformats.org/drawingml/2006/main" name="Office Theme">
   <a:themeElements>
     <a:clrScheme name="Office Theme">
       <a:dk1>
@@ -14586,7 +14767,7 @@
       <a:effectStyleLst>
         <a:effectStyle>
           <a:effectLst>
-            <a:outerShdw sx="100000" sy="100000" kx="0" ky="0" algn="b" rotWithShape="0" blurRad="38100" dist="23000" dir="5400000">
+            <a:outerShdw blurRad="38100" dist="23000" dir="5400000" rotWithShape="0">
               <a:srgbClr val="000000">
                 <a:alpha val="35000"/>
               </a:srgbClr>
@@ -14595,7 +14776,7 @@
         </a:effectStyle>
         <a:effectStyle>
           <a:effectLst>
-            <a:outerShdw sx="100000" sy="100000" kx="0" ky="0" algn="b" rotWithShape="0" blurRad="38100" dist="23000" dir="5400000">
+            <a:outerShdw blurRad="38100" dist="23000" dir="5400000" rotWithShape="0">
               <a:srgbClr val="000000">
                 <a:alpha val="35000"/>
               </a:srgbClr>
@@ -14604,7 +14785,7 @@
         </a:effectStyle>
         <a:effectStyle>
           <a:effectLst>
-            <a:outerShdw sx="100000" sy="100000" kx="0" ky="0" algn="b" rotWithShape="0" blurRad="38100" dist="20000" dir="5400000">
+            <a:outerShdw blurRad="38100" dist="20000" dir="5400000" rotWithShape="0">
               <a:srgbClr val="000000">
                 <a:alpha val="38000"/>
               </a:srgbClr>
@@ -14678,7 +14859,7 @@
           <a:miter lim="800000"/>
         </a:ln>
         <a:effectLst>
-          <a:outerShdw sx="100000" sy="100000" kx="0" ky="0" algn="b" rotWithShape="0" blurRad="38100" dist="23000" dir="5400000">
+          <a:outerShdw blurRad="38100" dist="23000" dir="5400000" rotWithShape="0">
             <a:srgbClr val="000000">
               <a:alpha val="35000"/>
             </a:srgbClr>
@@ -14686,7 +14867,7 @@
         </a:effectLst>
         <a:sp3d/>
       </a:spPr>
-      <a:bodyPr rot="0" spcFirstLastPara="1" vertOverflow="overflow" horzOverflow="overflow" vert="horz" wrap="square" lIns="45719" tIns="45719" rIns="45719" bIns="45719" numCol="1" spcCol="38100" rtlCol="0" anchor="ctr" upright="0">
+      <a:bodyPr rot="0" spcFirstLastPara="1" vertOverflow="overflow" horzOverflow="overflow" vert="horz" wrap="square" lIns="45719" tIns="45719" rIns="45719" bIns="45719" numCol="1" spcCol="38100" rtlCol="0" anchor="ctr">
         <a:spAutoFit/>
       </a:bodyPr>
       <a:lstStyle>
@@ -14705,7 +14886,7 @@
           <a:buFontTx/>
           <a:buNone/>
           <a:tabLst/>
-          <a:defRPr b="0" baseline="0" cap="none" i="0" spc="0" strike="noStrike" sz="1800" u="none" kumimoji="0" normalizeH="0">
+          <a:defRPr kumimoji="0" sz="1800" b="0" i="0" u="none" strike="noStrike" cap="none" spc="0" normalizeH="0" baseline="0">
             <a:ln>
               <a:noFill/>
             </a:ln>
@@ -14735,7 +14916,7 @@
           <a:buFontTx/>
           <a:buNone/>
           <a:tabLst/>
-          <a:defRPr b="0" baseline="0" cap="none" i="0" spc="0" strike="noStrike" sz="1800" u="none" kumimoji="0" normalizeH="0">
+          <a:defRPr kumimoji="0" sz="1800" b="0" i="0" u="none" strike="noStrike" cap="none" spc="0" normalizeH="0" baseline="0">
             <a:ln>
               <a:noFill/>
             </a:ln>
@@ -14761,7 +14942,7 @@
           <a:buFontTx/>
           <a:buNone/>
           <a:tabLst/>
-          <a:defRPr b="0" baseline="0" cap="none" i="0" spc="0" strike="noStrike" sz="1800" u="none" kumimoji="0" normalizeH="0">
+          <a:defRPr kumimoji="0" sz="1800" b="0" i="0" u="none" strike="noStrike" cap="none" spc="0" normalizeH="0" baseline="0">
             <a:ln>
               <a:noFill/>
             </a:ln>
@@ -14787,7 +14968,7 @@
           <a:buFontTx/>
           <a:buNone/>
           <a:tabLst/>
-          <a:defRPr b="0" baseline="0" cap="none" i="0" spc="0" strike="noStrike" sz="1800" u="none" kumimoji="0" normalizeH="0">
+          <a:defRPr kumimoji="0" sz="1800" b="0" i="0" u="none" strike="noStrike" cap="none" spc="0" normalizeH="0" baseline="0">
             <a:ln>
               <a:noFill/>
             </a:ln>
@@ -14813,7 +14994,7 @@
           <a:buFontTx/>
           <a:buNone/>
           <a:tabLst/>
-          <a:defRPr b="0" baseline="0" cap="none" i="0" spc="0" strike="noStrike" sz="1800" u="none" kumimoji="0" normalizeH="0">
+          <a:defRPr kumimoji="0" sz="1800" b="0" i="0" u="none" strike="noStrike" cap="none" spc="0" normalizeH="0" baseline="0">
             <a:ln>
               <a:noFill/>
             </a:ln>
@@ -14839,7 +15020,7 @@
           <a:buFontTx/>
           <a:buNone/>
           <a:tabLst/>
-          <a:defRPr b="0" baseline="0" cap="none" i="0" spc="0" strike="noStrike" sz="1800" u="none" kumimoji="0" normalizeH="0">
+          <a:defRPr kumimoji="0" sz="1800" b="0" i="0" u="none" strike="noStrike" cap="none" spc="0" normalizeH="0" baseline="0">
             <a:ln>
               <a:noFill/>
             </a:ln>
@@ -14865,7 +15046,7 @@
           <a:buFontTx/>
           <a:buNone/>
           <a:tabLst/>
-          <a:defRPr b="0" baseline="0" cap="none" i="0" spc="0" strike="noStrike" sz="1800" u="none" kumimoji="0" normalizeH="0">
+          <a:defRPr kumimoji="0" sz="1800" b="0" i="0" u="none" strike="noStrike" cap="none" spc="0" normalizeH="0" baseline="0">
             <a:ln>
               <a:noFill/>
             </a:ln>
@@ -14891,7 +15072,7 @@
           <a:buFontTx/>
           <a:buNone/>
           <a:tabLst/>
-          <a:defRPr b="0" baseline="0" cap="none" i="0" spc="0" strike="noStrike" sz="1800" u="none" kumimoji="0" normalizeH="0">
+          <a:defRPr kumimoji="0" sz="1800" b="0" i="0" u="none" strike="noStrike" cap="none" spc="0" normalizeH="0" baseline="0">
             <a:ln>
               <a:noFill/>
             </a:ln>
@@ -14917,7 +15098,7 @@
           <a:buFontTx/>
           <a:buNone/>
           <a:tabLst/>
-          <a:defRPr b="0" baseline="0" cap="none" i="0" spc="0" strike="noStrike" sz="1800" u="none" kumimoji="0" normalizeH="0">
+          <a:defRPr kumimoji="0" sz="1800" b="0" i="0" u="none" strike="noStrike" cap="none" spc="0" normalizeH="0" baseline="0">
             <a:ln>
               <a:noFill/>
             </a:ln>
@@ -14943,7 +15124,7 @@
           <a:buFontTx/>
           <a:buNone/>
           <a:tabLst/>
-          <a:defRPr b="0" baseline="0" cap="none" i="0" spc="0" strike="noStrike" sz="1800" u="none" kumimoji="0" normalizeH="0">
+          <a:defRPr kumimoji="0" sz="1800" b="0" i="0" u="none" strike="noStrike" cap="none" spc="0" normalizeH="0" baseline="0">
             <a:ln>
               <a:noFill/>
             </a:ln>
@@ -14956,9 +15137,15 @@
         </a:lvl9pPr>
       </a:lstStyle>
       <a:style>
-        <a:lnRef idx="0"/>
-        <a:fillRef idx="0"/>
-        <a:effectRef idx="0"/>
+        <a:lnRef idx="0">
+          <a:scrgbClr r="0" g="0" b="0"/>
+        </a:lnRef>
+        <a:fillRef idx="0">
+          <a:scrgbClr r="0" g="0" b="0"/>
+        </a:fillRef>
+        <a:effectRef idx="0">
+          <a:scrgbClr r="0" g="0" b="0"/>
+        </a:effectRef>
         <a:fontRef idx="none"/>
       </a:style>
     </a:spDef>
@@ -14973,7 +15160,7 @@
           <a:miter lim="800000"/>
         </a:ln>
         <a:effectLst>
-          <a:outerShdw sx="100000" sy="100000" kx="0" ky="0" algn="b" rotWithShape="0" blurRad="38100" dist="20000" dir="5400000">
+          <a:outerShdw blurRad="38100" dist="20000" dir="5400000" rotWithShape="0">
             <a:srgbClr val="000000">
               <a:alpha val="38000"/>
             </a:srgbClr>
@@ -14981,7 +15168,7 @@
         </a:effectLst>
         <a:sp3d/>
       </a:spPr>
-      <a:bodyPr rot="0" spcFirstLastPara="1" vertOverflow="overflow" horzOverflow="overflow" vert="horz" wrap="square" lIns="91439" tIns="45719" rIns="91439" bIns="45719" numCol="1" spcCol="38100" rtlCol="0" anchor="t" upright="0">
+      <a:bodyPr rot="0" spcFirstLastPara="1" vertOverflow="overflow" horzOverflow="overflow" vert="horz" wrap="square" lIns="91439" tIns="45719" rIns="91439" bIns="45719" numCol="1" spcCol="38100" rtlCol="0" anchor="t">
         <a:noAutofit/>
       </a:bodyPr>
       <a:lstStyle>
@@ -15000,7 +15187,7 @@
           <a:buFontTx/>
           <a:buNone/>
           <a:tabLst/>
-          <a:defRPr b="0" baseline="0" cap="none" i="0" spc="0" strike="noStrike" sz="1800" u="none" kumimoji="0" normalizeH="0">
+          <a:defRPr kumimoji="0" sz="1800" b="0" i="0" u="none" strike="noStrike" cap="none" spc="0" normalizeH="0" baseline="0">
             <a:ln>
               <a:noFill/>
             </a:ln>
@@ -15026,7 +15213,7 @@
           <a:buFontTx/>
           <a:buNone/>
           <a:tabLst/>
-          <a:defRPr b="0" baseline="0" cap="none" i="0" spc="0" strike="noStrike" sz="1800" u="none" kumimoji="0" normalizeH="0">
+          <a:defRPr kumimoji="0" sz="1800" b="0" i="0" u="none" strike="noStrike" cap="none" spc="0" normalizeH="0" baseline="0">
             <a:ln>
               <a:noFill/>
             </a:ln>
@@ -15052,7 +15239,7 @@
           <a:buFontTx/>
           <a:buNone/>
           <a:tabLst/>
-          <a:defRPr b="0" baseline="0" cap="none" i="0" spc="0" strike="noStrike" sz="1800" u="none" kumimoji="0" normalizeH="0">
+          <a:defRPr kumimoji="0" sz="1800" b="0" i="0" u="none" strike="noStrike" cap="none" spc="0" normalizeH="0" baseline="0">
             <a:ln>
               <a:noFill/>
             </a:ln>
@@ -15078,7 +15265,7 @@
           <a:buFontTx/>
           <a:buNone/>
           <a:tabLst/>
-          <a:defRPr b="0" baseline="0" cap="none" i="0" spc="0" strike="noStrike" sz="1800" u="none" kumimoji="0" normalizeH="0">
+          <a:defRPr kumimoji="0" sz="1800" b="0" i="0" u="none" strike="noStrike" cap="none" spc="0" normalizeH="0" baseline="0">
             <a:ln>
               <a:noFill/>
             </a:ln>
@@ -15104,7 +15291,7 @@
           <a:buFontTx/>
           <a:buNone/>
           <a:tabLst/>
-          <a:defRPr b="0" baseline="0" cap="none" i="0" spc="0" strike="noStrike" sz="1800" u="none" kumimoji="0" normalizeH="0">
+          <a:defRPr kumimoji="0" sz="1800" b="0" i="0" u="none" strike="noStrike" cap="none" spc="0" normalizeH="0" baseline="0">
             <a:ln>
               <a:noFill/>
             </a:ln>
@@ -15130,7 +15317,7 @@
           <a:buFontTx/>
           <a:buNone/>
           <a:tabLst/>
-          <a:defRPr b="0" baseline="0" cap="none" i="0" spc="0" strike="noStrike" sz="1800" u="none" kumimoji="0" normalizeH="0">
+          <a:defRPr kumimoji="0" sz="1800" b="0" i="0" u="none" strike="noStrike" cap="none" spc="0" normalizeH="0" baseline="0">
             <a:ln>
               <a:noFill/>
             </a:ln>
@@ -15156,7 +15343,7 @@
           <a:buFontTx/>
           <a:buNone/>
           <a:tabLst/>
-          <a:defRPr b="0" baseline="0" cap="none" i="0" spc="0" strike="noStrike" sz="1800" u="none" kumimoji="0" normalizeH="0">
+          <a:defRPr kumimoji="0" sz="1800" b="0" i="0" u="none" strike="noStrike" cap="none" spc="0" normalizeH="0" baseline="0">
             <a:ln>
               <a:noFill/>
             </a:ln>
@@ -15182,7 +15369,7 @@
           <a:buFontTx/>
           <a:buNone/>
           <a:tabLst/>
-          <a:defRPr b="0" baseline="0" cap="none" i="0" spc="0" strike="noStrike" sz="1800" u="none" kumimoji="0" normalizeH="0">
+          <a:defRPr kumimoji="0" sz="1800" b="0" i="0" u="none" strike="noStrike" cap="none" spc="0" normalizeH="0" baseline="0">
             <a:ln>
               <a:noFill/>
             </a:ln>
@@ -15208,7 +15395,7 @@
           <a:buFontTx/>
           <a:buNone/>
           <a:tabLst/>
-          <a:defRPr b="0" baseline="0" cap="none" i="0" spc="0" strike="noStrike" sz="1800" u="none" kumimoji="0" normalizeH="0">
+          <a:defRPr kumimoji="0" sz="1800" b="0" i="0" u="none" strike="noStrike" cap="none" spc="0" normalizeH="0" baseline="0">
             <a:ln>
               <a:noFill/>
             </a:ln>
@@ -15234,7 +15421,7 @@
           <a:buFontTx/>
           <a:buNone/>
           <a:tabLst/>
-          <a:defRPr b="0" baseline="0" cap="none" i="0" spc="0" strike="noStrike" sz="1800" u="none" kumimoji="0" normalizeH="0">
+          <a:defRPr kumimoji="0" sz="1800" b="0" i="0" u="none" strike="noStrike" cap="none" spc="0" normalizeH="0" baseline="0">
             <a:ln>
               <a:noFill/>
             </a:ln>
@@ -15247,9 +15434,15 @@
         </a:lvl9pPr>
       </a:lstStyle>
       <a:style>
-        <a:lnRef idx="0"/>
-        <a:fillRef idx="0"/>
-        <a:effectRef idx="0"/>
+        <a:lnRef idx="0">
+          <a:scrgbClr r="0" g="0" b="0"/>
+        </a:lnRef>
+        <a:fillRef idx="0">
+          <a:scrgbClr r="0" g="0" b="0"/>
+        </a:fillRef>
+        <a:effectRef idx="0">
+          <a:scrgbClr r="0" g="0" b="0"/>
+        </a:effectRef>
         <a:fontRef idx="none"/>
       </a:style>
     </a:lnDef>
@@ -15263,7 +15456,7 @@
         <a:effectLst/>
         <a:sp3d/>
       </a:spPr>
-      <a:bodyPr rot="0" spcFirstLastPara="1" vertOverflow="overflow" horzOverflow="overflow" vert="horz" wrap="square" lIns="45719" tIns="45719" rIns="45719" bIns="45719" numCol="1" spcCol="38100" rtlCol="0" anchor="t" upright="0">
+      <a:bodyPr rot="0" spcFirstLastPara="1" vertOverflow="overflow" horzOverflow="overflow" vert="horz" wrap="square" lIns="45719" tIns="45719" rIns="45719" bIns="45719" numCol="1" spcCol="38100" rtlCol="0" anchor="t">
         <a:spAutoFit/>
       </a:bodyPr>
       <a:lstStyle>
@@ -15282,7 +15475,7 @@
           <a:buFontTx/>
           <a:buNone/>
           <a:tabLst/>
-          <a:defRPr b="0" baseline="0" cap="none" i="0" spc="0" strike="noStrike" sz="1800" u="none" kumimoji="0" normalizeH="0">
+          <a:defRPr kumimoji="0" sz="1800" b="0" i="0" u="none" strike="noStrike" cap="none" spc="0" normalizeH="0" baseline="0">
             <a:ln>
               <a:noFill/>
             </a:ln>
@@ -15312,7 +15505,7 @@
           <a:buFontTx/>
           <a:buNone/>
           <a:tabLst/>
-          <a:defRPr b="0" baseline="0" cap="none" i="0" spc="0" strike="noStrike" sz="1800" u="none" kumimoji="0" normalizeH="0">
+          <a:defRPr kumimoji="0" sz="1800" b="0" i="0" u="none" strike="noStrike" cap="none" spc="0" normalizeH="0" baseline="0">
             <a:ln>
               <a:noFill/>
             </a:ln>
@@ -15338,7 +15531,7 @@
           <a:buFontTx/>
           <a:buNone/>
           <a:tabLst/>
-          <a:defRPr b="0" baseline="0" cap="none" i="0" spc="0" strike="noStrike" sz="1800" u="none" kumimoji="0" normalizeH="0">
+          <a:defRPr kumimoji="0" sz="1800" b="0" i="0" u="none" strike="noStrike" cap="none" spc="0" normalizeH="0" baseline="0">
             <a:ln>
               <a:noFill/>
             </a:ln>
@@ -15364,7 +15557,7 @@
           <a:buFontTx/>
           <a:buNone/>
           <a:tabLst/>
-          <a:defRPr b="0" baseline="0" cap="none" i="0" spc="0" strike="noStrike" sz="1800" u="none" kumimoji="0" normalizeH="0">
+          <a:defRPr kumimoji="0" sz="1800" b="0" i="0" u="none" strike="noStrike" cap="none" spc="0" normalizeH="0" baseline="0">
             <a:ln>
               <a:noFill/>
             </a:ln>
@@ -15390,7 +15583,7 @@
           <a:buFontTx/>
           <a:buNone/>
           <a:tabLst/>
-          <a:defRPr b="0" baseline="0" cap="none" i="0" spc="0" strike="noStrike" sz="1800" u="none" kumimoji="0" normalizeH="0">
+          <a:defRPr kumimoji="0" sz="1800" b="0" i="0" u="none" strike="noStrike" cap="none" spc="0" normalizeH="0" baseline="0">
             <a:ln>
               <a:noFill/>
             </a:ln>
@@ -15416,7 +15609,7 @@
           <a:buFontTx/>
           <a:buNone/>
           <a:tabLst/>
-          <a:defRPr b="0" baseline="0" cap="none" i="0" spc="0" strike="noStrike" sz="1800" u="none" kumimoji="0" normalizeH="0">
+          <a:defRPr kumimoji="0" sz="1800" b="0" i="0" u="none" strike="noStrike" cap="none" spc="0" normalizeH="0" baseline="0">
             <a:ln>
               <a:noFill/>
             </a:ln>
@@ -15442,7 +15635,7 @@
           <a:buFontTx/>
           <a:buNone/>
           <a:tabLst/>
-          <a:defRPr b="0" baseline="0" cap="none" i="0" spc="0" strike="noStrike" sz="1800" u="none" kumimoji="0" normalizeH="0">
+          <a:defRPr kumimoji="0" sz="1800" b="0" i="0" u="none" strike="noStrike" cap="none" spc="0" normalizeH="0" baseline="0">
             <a:ln>
               <a:noFill/>
             </a:ln>
@@ -15468,7 +15661,7 @@
           <a:buFontTx/>
           <a:buNone/>
           <a:tabLst/>
-          <a:defRPr b="0" baseline="0" cap="none" i="0" spc="0" strike="noStrike" sz="1800" u="none" kumimoji="0" normalizeH="0">
+          <a:defRPr kumimoji="0" sz="1800" b="0" i="0" u="none" strike="noStrike" cap="none" spc="0" normalizeH="0" baseline="0">
             <a:ln>
               <a:noFill/>
             </a:ln>
@@ -15494,7 +15687,7 @@
           <a:buFontTx/>
           <a:buNone/>
           <a:tabLst/>
-          <a:defRPr b="0" baseline="0" cap="none" i="0" spc="0" strike="noStrike" sz="1800" u="none" kumimoji="0" normalizeH="0">
+          <a:defRPr kumimoji="0" sz="1800" b="0" i="0" u="none" strike="noStrike" cap="none" spc="0" normalizeH="0" baseline="0">
             <a:ln>
               <a:noFill/>
             </a:ln>
@@ -15520,7 +15713,7 @@
           <a:buFontTx/>
           <a:buNone/>
           <a:tabLst/>
-          <a:defRPr b="0" baseline="0" cap="none" i="0" spc="0" strike="noStrike" sz="1800" u="none" kumimoji="0" normalizeH="0">
+          <a:defRPr kumimoji="0" sz="1800" b="0" i="0" u="none" strike="noStrike" cap="none" spc="0" normalizeH="0" baseline="0">
             <a:ln>
               <a:noFill/>
             </a:ln>
@@ -15533,12 +15726,19 @@
         </a:lvl9pPr>
       </a:lstStyle>
       <a:style>
-        <a:lnRef idx="0"/>
-        <a:fillRef idx="0"/>
-        <a:effectRef idx="0"/>
+        <a:lnRef idx="0">
+          <a:scrgbClr r="0" g="0" b="0"/>
+        </a:lnRef>
+        <a:fillRef idx="0">
+          <a:scrgbClr r="0" g="0" b="0"/>
+        </a:fillRef>
+        <a:effectRef idx="0">
+          <a:scrgbClr r="0" g="0" b="0"/>
+        </a:effectRef>
         <a:fontRef idx="none"/>
       </a:style>
     </a:txDef>
   </a:objectDefaults>
+  <a:extraClrSchemeLst/>
 </a:theme>
 </file>